--- a/Materi/Materi Mensin Pencari.pptx
+++ b/Materi/Materi Mensin Pencari.pptx
@@ -16,34 +16,37 @@
     <p:sldId id="264" r:id="rId10"/>
     <p:sldId id="265" r:id="rId11"/>
     <p:sldId id="266" r:id="rId12"/>
-    <p:sldId id="267" r:id="rId13"/>
-    <p:sldId id="268" r:id="rId14"/>
-    <p:sldId id="269" r:id="rId15"/>
-    <p:sldId id="270" r:id="rId16"/>
-    <p:sldId id="271" r:id="rId17"/>
-    <p:sldId id="272" r:id="rId18"/>
-    <p:sldId id="273" r:id="rId19"/>
+    <p:sldId id="276" r:id="rId13"/>
+    <p:sldId id="267" r:id="rId14"/>
+    <p:sldId id="268" r:id="rId15"/>
+    <p:sldId id="275" r:id="rId16"/>
+    <p:sldId id="269" r:id="rId17"/>
+    <p:sldId id="270" r:id="rId18"/>
+    <p:sldId id="271" r:id="rId19"/>
+    <p:sldId id="272" r:id="rId20"/>
+    <p:sldId id="273" r:id="rId21"/>
+    <p:sldId id="277" r:id="rId22"/>
   </p:sldIdLst>
   <p:sldSz cx="18288000" cy="10287000"/>
   <p:notesSz cx="6858000" cy="9144000"/>
   <p:embeddedFontLst>
     <p:embeddedFont>
       <p:font typeface="Archivo Black" panose="020B0A03020202020B04" pitchFamily="34" charset="77"/>
-      <p:regular r:id="rId20"/>
+      <p:regular r:id="rId23"/>
     </p:embeddedFont>
     <p:embeddedFont>
       <p:font typeface="Bricolage Grotesque Bold" panose="020B0605040402000204" pitchFamily="34" charset="0"/>
-      <p:regular r:id="rId21"/>
-      <p:bold r:id="rId22"/>
+      <p:regular r:id="rId24"/>
+      <p:bold r:id="rId25"/>
     </p:embeddedFont>
     <p:embeddedFont>
       <p:font typeface="DM Sans" pitchFamily="2" charset="77"/>
-      <p:regular r:id="rId23"/>
+      <p:regular r:id="rId26"/>
     </p:embeddedFont>
     <p:embeddedFont>
       <p:font typeface="DM Sans Bold" pitchFamily="2" charset="77"/>
-      <p:regular r:id="rId24"/>
-      <p:bold r:id="rId25"/>
+      <p:regular r:id="rId27"/>
+      <p:bold r:id="rId28"/>
     </p:embeddedFont>
   </p:embeddedFontLst>
   <p:defaultTextStyle>
@@ -5123,193 +5126,13 @@
       </p:sp>
       <p:grpSp>
         <p:nvGrpSpPr>
-          <p:cNvPr id="5" name="Group 5"/>
-          <p:cNvGrpSpPr/>
-          <p:nvPr/>
-        </p:nvGrpSpPr>
-        <p:grpSpPr>
-          <a:xfrm>
-            <a:off x="762000" y="3524250"/>
-            <a:ext cx="2000250" cy="1238250"/>
-            <a:chOff x="0" y="0"/>
-            <a:chExt cx="2667000" cy="1651000"/>
-          </a:xfrm>
-        </p:grpSpPr>
-        <p:sp>
-          <p:nvSpPr>
-            <p:cNvPr id="6" name="Freeform 6"/>
-            <p:cNvSpPr/>
-            <p:nvPr/>
-          </p:nvSpPr>
-          <p:spPr>
-            <a:xfrm>
-              <a:off x="0" y="0"/>
-              <a:ext cx="2667000" cy="1651000"/>
-            </a:xfrm>
-            <a:custGeom>
-              <a:avLst/>
-              <a:gdLst/>
-              <a:ahLst/>
-              <a:cxnLst/>
-              <a:rect l="l" t="t" r="r" b="b"/>
-              <a:pathLst>
-                <a:path w="2667000" h="1651000">
-                  <a:moveTo>
-                    <a:pt x="72571" y="0"/>
-                  </a:moveTo>
-                  <a:lnTo>
-                    <a:pt x="2594429" y="0"/>
-                  </a:lnTo>
-                  <a:cubicBezTo>
-                    <a:pt x="2613676" y="0"/>
-                    <a:pt x="2632134" y="7646"/>
-                    <a:pt x="2645744" y="21256"/>
-                  </a:cubicBezTo>
-                  <a:cubicBezTo>
-                    <a:pt x="2659354" y="34865"/>
-                    <a:pt x="2667000" y="53324"/>
-                    <a:pt x="2667000" y="72571"/>
-                  </a:cubicBezTo>
-                  <a:lnTo>
-                    <a:pt x="2667000" y="1578429"/>
-                  </a:lnTo>
-                  <a:cubicBezTo>
-                    <a:pt x="2667000" y="1597676"/>
-                    <a:pt x="2659354" y="1616135"/>
-                    <a:pt x="2645744" y="1629744"/>
-                  </a:cubicBezTo>
-                  <a:cubicBezTo>
-                    <a:pt x="2632134" y="1643354"/>
-                    <a:pt x="2613676" y="1651000"/>
-                    <a:pt x="2594429" y="1651000"/>
-                  </a:cubicBezTo>
-                  <a:lnTo>
-                    <a:pt x="72571" y="1651000"/>
-                  </a:lnTo>
-                  <a:cubicBezTo>
-                    <a:pt x="53324" y="1651000"/>
-                    <a:pt x="34865" y="1643354"/>
-                    <a:pt x="21256" y="1629744"/>
-                  </a:cubicBezTo>
-                  <a:cubicBezTo>
-                    <a:pt x="7646" y="1616135"/>
-                    <a:pt x="0" y="1597676"/>
-                    <a:pt x="0" y="1578429"/>
-                  </a:cubicBezTo>
-                  <a:lnTo>
-                    <a:pt x="0" y="72571"/>
-                  </a:lnTo>
-                  <a:cubicBezTo>
-                    <a:pt x="0" y="53324"/>
-                    <a:pt x="7646" y="34865"/>
-                    <a:pt x="21256" y="21256"/>
-                  </a:cubicBezTo>
-                  <a:cubicBezTo>
-                    <a:pt x="34865" y="7646"/>
-                    <a:pt x="53324" y="0"/>
-                    <a:pt x="72571" y="0"/>
-                  </a:cubicBezTo>
-                  <a:close/>
-                </a:path>
-              </a:pathLst>
-            </a:custGeom>
-            <a:solidFill>
-              <a:srgbClr val="FFFFFF"/>
-            </a:solidFill>
-            <a:ln cap="sq">
-              <a:noFill/>
-              <a:prstDash val="solid"/>
-              <a:miter/>
-            </a:ln>
-          </p:spPr>
-          <p:txBody>
-            <a:bodyPr/>
-            <a:lstStyle/>
-            <a:p>
-              <a:endParaRPr lang="en-US"/>
-            </a:p>
-          </p:txBody>
-        </p:sp>
-        <p:sp>
-          <p:nvSpPr>
-            <p:cNvPr id="7" name="TextBox 7"/>
-            <p:cNvSpPr txBox="1"/>
-            <p:nvPr/>
-          </p:nvSpPr>
-          <p:spPr>
-            <a:xfrm>
-              <a:off x="0" y="-28575"/>
-              <a:ext cx="2667000" cy="1679575"/>
-            </a:xfrm>
-            <a:prstGeom prst="rect">
-              <a:avLst/>
-            </a:prstGeom>
-          </p:spPr>
-          <p:txBody>
-            <a:bodyPr lIns="50800" tIns="50800" rIns="50800" bIns="50800" rtlCol="0" anchor="ctr"/>
-            <a:lstStyle/>
-            <a:p>
-              <a:pPr algn="ctr">
-                <a:lnSpc>
-                  <a:spcPts val="2415"/>
-                </a:lnSpc>
-              </a:pPr>
-              <a:r>
-                <a:rPr lang="en-US" sz="1725" b="1">
-                  <a:solidFill>
-                    <a:srgbClr val="12233F"/>
-                  </a:solidFill>
-                  <a:latin typeface="DM Sans Bold"/>
-                  <a:ea typeface="DM Sans Bold"/>
-                  <a:cs typeface="DM Sans Bold"/>
-                  <a:sym typeface="DM Sans Bold"/>
-                </a:rPr>
-                <a:t>Website A</a:t>
-              </a:r>
-            </a:p>
-          </p:txBody>
-        </p:sp>
-      </p:grpSp>
-      <p:sp>
-        <p:nvSpPr>
-          <p:cNvPr id="8" name="AutoShape 8"/>
-          <p:cNvSpPr/>
-          <p:nvPr/>
-        </p:nvSpPr>
-        <p:spPr>
-          <a:xfrm>
-            <a:off x="2762250" y="4143375"/>
-            <a:ext cx="428625" cy="762000"/>
-          </a:xfrm>
-          <a:prstGeom prst="line">
-            <a:avLst/>
-          </a:prstGeom>
-          <a:ln w="28575" cap="flat">
-            <a:solidFill>
-              <a:srgbClr val="5D6B7E"/>
-            </a:solidFill>
-            <a:prstDash val="sysDash"/>
-            <a:headEnd type="none" w="sm" len="sm"/>
-            <a:tailEnd type="none" w="sm" len="sm"/>
-          </a:ln>
-        </p:spPr>
-        <p:txBody>
-          <a:bodyPr/>
-          <a:lstStyle/>
-          <a:p>
-            <a:endParaRPr lang="en-US"/>
-          </a:p>
-        </p:txBody>
-      </p:sp>
-      <p:grpSp>
-        <p:nvGrpSpPr>
           <p:cNvPr id="9" name="Group 9"/>
           <p:cNvGrpSpPr/>
           <p:nvPr/>
         </p:nvGrpSpPr>
         <p:grpSpPr>
           <a:xfrm>
-            <a:off x="3238500" y="4286250"/>
+            <a:off x="1905000" y="4389120"/>
             <a:ext cx="2000250" cy="1238250"/>
             <a:chOff x="0" y="0"/>
             <a:chExt cx="2667000" cy="1651000"/>
@@ -5435,7 +5258,7 @@
                 </a:lnSpc>
               </a:pPr>
               <a:r>
-                <a:rPr lang="en-US" sz="1725" b="1">
+                <a:rPr lang="en-US" sz="1725" b="1" dirty="0">
                   <a:solidFill>
                     <a:srgbClr val="12233F"/>
                   </a:solidFill>
@@ -5444,7 +5267,7 @@
                   <a:cs typeface="DM Sans Bold"/>
                   <a:sym typeface="DM Sans Bold"/>
                 </a:rPr>
-                <a:t>Website B</a:t>
+                <a:t>Website</a:t>
               </a:r>
             </a:p>
           </p:txBody>
@@ -5458,7 +5281,7 @@
         </p:nvSpPr>
         <p:spPr>
           <a:xfrm flipV="1">
-            <a:off x="5238750" y="4143375"/>
+            <a:off x="3905250" y="4246245"/>
             <a:ext cx="428625" cy="762000"/>
           </a:xfrm>
           <a:prstGeom prst="line">
@@ -5489,7 +5312,7 @@
         </p:nvGrpSpPr>
         <p:grpSpPr>
           <a:xfrm>
-            <a:off x="5715000" y="3524250"/>
+            <a:off x="4381500" y="3627120"/>
             <a:ext cx="2000250" cy="1238250"/>
             <a:chOff x="0" y="0"/>
             <a:chExt cx="2667000" cy="1651000"/>
@@ -5638,7 +5461,7 @@
         </p:nvSpPr>
         <p:spPr>
           <a:xfrm>
-            <a:off x="7715250" y="4143375"/>
+            <a:off x="6381750" y="4246245"/>
             <a:ext cx="428625" cy="762000"/>
           </a:xfrm>
           <a:prstGeom prst="line">
@@ -5669,7 +5492,7 @@
         </p:nvGrpSpPr>
         <p:grpSpPr>
           <a:xfrm>
-            <a:off x="8191500" y="4286250"/>
+            <a:off x="6858000" y="4389120"/>
             <a:ext cx="2000250" cy="1238250"/>
             <a:chOff x="0" y="0"/>
             <a:chExt cx="2667000" cy="1651000"/>
@@ -5818,7 +5641,7 @@
         </p:nvSpPr>
         <p:spPr>
           <a:xfrm flipV="1">
-            <a:off x="10191750" y="4143375"/>
+            <a:off x="8858250" y="4246245"/>
             <a:ext cx="428625" cy="762000"/>
           </a:xfrm>
           <a:prstGeom prst="line">
@@ -5849,7 +5672,7 @@
         </p:nvGrpSpPr>
         <p:grpSpPr>
           <a:xfrm>
-            <a:off x="10668000" y="3524250"/>
+            <a:off x="9334500" y="3627120"/>
             <a:ext cx="2000250" cy="1238250"/>
             <a:chOff x="0" y="0"/>
             <a:chExt cx="2667000" cy="1651000"/>
@@ -5998,7 +5821,7 @@
         </p:nvSpPr>
         <p:spPr>
           <a:xfrm>
-            <a:off x="12668250" y="4143375"/>
+            <a:off x="11334750" y="4246245"/>
             <a:ext cx="428625" cy="762000"/>
           </a:xfrm>
           <a:prstGeom prst="line">
@@ -6029,7 +5852,7 @@
         </p:nvGrpSpPr>
         <p:grpSpPr>
           <a:xfrm>
-            <a:off x="13144500" y="4286250"/>
+            <a:off x="11811000" y="4389120"/>
             <a:ext cx="2000250" cy="1238250"/>
             <a:chOff x="0" y="0"/>
             <a:chExt cx="2667000" cy="1651000"/>
@@ -6178,7 +6001,7 @@
         </p:nvSpPr>
         <p:spPr>
           <a:xfrm flipV="1">
-            <a:off x="15144750" y="4143375"/>
+            <a:off x="13811250" y="4246245"/>
             <a:ext cx="428625" cy="762000"/>
           </a:xfrm>
           <a:prstGeom prst="line">
@@ -6209,7 +6032,7 @@
         </p:nvGrpSpPr>
         <p:grpSpPr>
           <a:xfrm>
-            <a:off x="15621000" y="3524250"/>
+            <a:off x="14287500" y="3627120"/>
             <a:ext cx="2000250" cy="1238250"/>
             <a:chOff x="0" y="0"/>
             <a:chExt cx="2667000" cy="1651000"/>
@@ -6418,7 +6241,7 @@
               </a:lnSpc>
             </a:pPr>
             <a:r>
-              <a:rPr lang="en-US" sz="2100">
+              <a:rPr lang="en-US" sz="2100" dirty="0">
                 <a:solidFill>
                   <a:srgbClr val="12233F"/>
                 </a:solidFill>
@@ -6427,7 +6250,223 @@
                 <a:cs typeface="DM Sans"/>
                 <a:sym typeface="DM Sans"/>
               </a:rPr>
-              <a:t>Jenis media tidak otomatis menentukan kredibilitas. Periksa isi, pembuat, bukti, dan konteksnya.</a:t>
+              <a:t>Jenis media </a:t>
+            </a:r>
+            <a:r>
+              <a:rPr lang="en-US" sz="2100" dirty="0" err="1">
+                <a:solidFill>
+                  <a:srgbClr val="12233F"/>
+                </a:solidFill>
+                <a:latin typeface="DM Sans"/>
+                <a:ea typeface="DM Sans"/>
+                <a:cs typeface="DM Sans"/>
+                <a:sym typeface="DM Sans"/>
+              </a:rPr>
+              <a:t>tidak</a:t>
+            </a:r>
+            <a:r>
+              <a:rPr lang="en-US" sz="2100" dirty="0">
+                <a:solidFill>
+                  <a:srgbClr val="12233F"/>
+                </a:solidFill>
+                <a:latin typeface="DM Sans"/>
+                <a:ea typeface="DM Sans"/>
+                <a:cs typeface="DM Sans"/>
+                <a:sym typeface="DM Sans"/>
+              </a:rPr>
+              <a:t> </a:t>
+            </a:r>
+            <a:r>
+              <a:rPr lang="en-US" sz="2100" dirty="0" err="1">
+                <a:solidFill>
+                  <a:srgbClr val="12233F"/>
+                </a:solidFill>
+                <a:latin typeface="DM Sans"/>
+                <a:ea typeface="DM Sans"/>
+                <a:cs typeface="DM Sans"/>
+                <a:sym typeface="DM Sans"/>
+              </a:rPr>
+              <a:t>otomatis</a:t>
+            </a:r>
+            <a:r>
+              <a:rPr lang="en-US" sz="2100" dirty="0">
+                <a:solidFill>
+                  <a:srgbClr val="12233F"/>
+                </a:solidFill>
+                <a:latin typeface="DM Sans"/>
+                <a:ea typeface="DM Sans"/>
+                <a:cs typeface="DM Sans"/>
+                <a:sym typeface="DM Sans"/>
+              </a:rPr>
+              <a:t> </a:t>
+            </a:r>
+            <a:r>
+              <a:rPr lang="en-US" sz="2100" dirty="0" err="1">
+                <a:solidFill>
+                  <a:srgbClr val="12233F"/>
+                </a:solidFill>
+                <a:latin typeface="DM Sans"/>
+                <a:ea typeface="DM Sans"/>
+                <a:cs typeface="DM Sans"/>
+                <a:sym typeface="DM Sans"/>
+              </a:rPr>
+              <a:t>menentukan</a:t>
+            </a:r>
+            <a:r>
+              <a:rPr lang="en-US" sz="2100" dirty="0">
+                <a:solidFill>
+                  <a:srgbClr val="12233F"/>
+                </a:solidFill>
+                <a:latin typeface="DM Sans"/>
+                <a:ea typeface="DM Sans"/>
+                <a:cs typeface="DM Sans"/>
+                <a:sym typeface="DM Sans"/>
+              </a:rPr>
+              <a:t> </a:t>
+            </a:r>
+            <a:r>
+              <a:rPr lang="en-US" sz="2100" dirty="0" err="1">
+                <a:solidFill>
+                  <a:srgbClr val="12233F"/>
+                </a:solidFill>
+                <a:latin typeface="DM Sans"/>
+                <a:ea typeface="DM Sans"/>
+                <a:cs typeface="DM Sans"/>
+                <a:sym typeface="DM Sans"/>
+              </a:rPr>
+              <a:t>kredibilitas</a:t>
+            </a:r>
+            <a:r>
+              <a:rPr lang="en-US" sz="2100" dirty="0">
+                <a:solidFill>
+                  <a:srgbClr val="12233F"/>
+                </a:solidFill>
+                <a:latin typeface="DM Sans"/>
+                <a:ea typeface="DM Sans"/>
+                <a:cs typeface="DM Sans"/>
+                <a:sym typeface="DM Sans"/>
+              </a:rPr>
+              <a:t>. </a:t>
+            </a:r>
+            <a:r>
+              <a:rPr lang="en-US" sz="2100" dirty="0" err="1">
+                <a:solidFill>
+                  <a:srgbClr val="12233F"/>
+                </a:solidFill>
+                <a:latin typeface="DM Sans"/>
+                <a:ea typeface="DM Sans"/>
+                <a:cs typeface="DM Sans"/>
+                <a:sym typeface="DM Sans"/>
+              </a:rPr>
+              <a:t>Periksa</a:t>
+            </a:r>
+            <a:r>
+              <a:rPr lang="en-US" sz="2100" dirty="0">
+                <a:solidFill>
+                  <a:srgbClr val="12233F"/>
+                </a:solidFill>
+                <a:latin typeface="DM Sans"/>
+                <a:ea typeface="DM Sans"/>
+                <a:cs typeface="DM Sans"/>
+                <a:sym typeface="DM Sans"/>
+              </a:rPr>
+              <a:t> </a:t>
+            </a:r>
+            <a:r>
+              <a:rPr lang="en-US" sz="2100" dirty="0" err="1">
+                <a:solidFill>
+                  <a:srgbClr val="12233F"/>
+                </a:solidFill>
+                <a:latin typeface="DM Sans"/>
+                <a:ea typeface="DM Sans"/>
+                <a:cs typeface="DM Sans"/>
+                <a:sym typeface="DM Sans"/>
+              </a:rPr>
+              <a:t>isi</a:t>
+            </a:r>
+            <a:r>
+              <a:rPr lang="en-US" sz="2100" dirty="0">
+                <a:solidFill>
+                  <a:srgbClr val="12233F"/>
+                </a:solidFill>
+                <a:latin typeface="DM Sans"/>
+                <a:ea typeface="DM Sans"/>
+                <a:cs typeface="DM Sans"/>
+                <a:sym typeface="DM Sans"/>
+              </a:rPr>
+              <a:t>, </a:t>
+            </a:r>
+            <a:r>
+              <a:rPr lang="en-US" sz="2100" dirty="0" err="1">
+                <a:solidFill>
+                  <a:srgbClr val="12233F"/>
+                </a:solidFill>
+                <a:latin typeface="DM Sans"/>
+                <a:ea typeface="DM Sans"/>
+                <a:cs typeface="DM Sans"/>
+                <a:sym typeface="DM Sans"/>
+              </a:rPr>
+              <a:t>pembuat</a:t>
+            </a:r>
+            <a:r>
+              <a:rPr lang="en-US" sz="2100" dirty="0">
+                <a:solidFill>
+                  <a:srgbClr val="12233F"/>
+                </a:solidFill>
+                <a:latin typeface="DM Sans"/>
+                <a:ea typeface="DM Sans"/>
+                <a:cs typeface="DM Sans"/>
+                <a:sym typeface="DM Sans"/>
+              </a:rPr>
+              <a:t>, </a:t>
+            </a:r>
+            <a:r>
+              <a:rPr lang="en-US" sz="2100" dirty="0" err="1">
+                <a:solidFill>
+                  <a:srgbClr val="12233F"/>
+                </a:solidFill>
+                <a:latin typeface="DM Sans"/>
+                <a:ea typeface="DM Sans"/>
+                <a:cs typeface="DM Sans"/>
+                <a:sym typeface="DM Sans"/>
+              </a:rPr>
+              <a:t>bukti</a:t>
+            </a:r>
+            <a:r>
+              <a:rPr lang="en-US" sz="2100" dirty="0">
+                <a:solidFill>
+                  <a:srgbClr val="12233F"/>
+                </a:solidFill>
+                <a:latin typeface="DM Sans"/>
+                <a:ea typeface="DM Sans"/>
+                <a:cs typeface="DM Sans"/>
+                <a:sym typeface="DM Sans"/>
+              </a:rPr>
+              <a:t>, dan </a:t>
+            </a:r>
+            <a:r>
+              <a:rPr lang="en-US" sz="2100" dirty="0" err="1">
+                <a:solidFill>
+                  <a:srgbClr val="12233F"/>
+                </a:solidFill>
+                <a:latin typeface="DM Sans"/>
+                <a:ea typeface="DM Sans"/>
+                <a:cs typeface="DM Sans"/>
+                <a:sym typeface="DM Sans"/>
+              </a:rPr>
+              <a:t>konteksnya</a:t>
+            </a:r>
+            <a:r>
+              <a:rPr lang="en-US" sz="2100" dirty="0">
+                <a:solidFill>
+                  <a:srgbClr val="12233F"/>
+                </a:solidFill>
+                <a:latin typeface="DM Sans"/>
+                <a:ea typeface="DM Sans"/>
+                <a:cs typeface="DM Sans"/>
+                <a:sym typeface="DM Sans"/>
+              </a:rPr>
+              <a:t>.</a:t>
             </a:r>
           </a:p>
         </p:txBody>
@@ -6535,6 +6574,353 @@
 </file>
 
 <file path=ppt/slides/slide12.xml><?xml version="1.0" encoding="utf-8"?>
+<p:sld xmlns:a="http://schemas.openxmlformats.org/drawingml/2006/main" xmlns:r="http://schemas.openxmlformats.org/officeDocument/2006/relationships" xmlns:p="http://schemas.openxmlformats.org/presentationml/2006/main">
+  <p:cSld>
+    <p:bg>
+      <p:bgPr>
+        <a:solidFill>
+          <a:srgbClr val="F6F1E8"/>
+        </a:solidFill>
+        <a:effectLst/>
+      </p:bgPr>
+    </p:bg>
+    <p:spTree>
+      <p:nvGrpSpPr>
+        <p:cNvPr id="1" name="">
+          <a:extLst>
+            <a:ext uri="{FF2B5EF4-FFF2-40B4-BE49-F238E27FC236}">
+              <a16:creationId xmlns:a16="http://schemas.microsoft.com/office/drawing/2014/main" id="{862186E9-6C6A-E09A-0036-684163786439}"/>
+            </a:ext>
+          </a:extLst>
+        </p:cNvPr>
+        <p:cNvGrpSpPr/>
+        <p:nvPr/>
+      </p:nvGrpSpPr>
+      <p:grpSpPr>
+        <a:xfrm>
+          <a:off x="0" y="0"/>
+          <a:ext cx="0" cy="0"/>
+          <a:chOff x="0" y="0"/>
+          <a:chExt cx="0" cy="0"/>
+        </a:xfrm>
+      </p:grpSpPr>
+      <p:sp>
+        <p:nvSpPr>
+          <p:cNvPr id="2" name="TextBox 2">
+            <a:extLst>
+              <a:ext uri="{FF2B5EF4-FFF2-40B4-BE49-F238E27FC236}">
+                <a16:creationId xmlns:a16="http://schemas.microsoft.com/office/drawing/2014/main" id="{7D7460E9-27BA-E6DB-F9C1-1D3923DCBFF8}"/>
+              </a:ext>
+            </a:extLst>
+          </p:cNvPr>
+          <p:cNvSpPr txBox="1"/>
+          <p:nvPr/>
+        </p:nvSpPr>
+        <p:spPr>
+          <a:xfrm>
+            <a:off x="952500" y="504825"/>
+            <a:ext cx="8572500" cy="272415"/>
+          </a:xfrm>
+          <a:prstGeom prst="rect">
+            <a:avLst/>
+          </a:prstGeom>
+        </p:spPr>
+        <p:txBody>
+          <a:bodyPr lIns="0" tIns="0" rIns="0" bIns="0" rtlCol="0" anchor="t">
+            <a:spAutoFit/>
+          </a:bodyPr>
+          <a:lstStyle/>
+          <a:p>
+            <a:pPr algn="l">
+              <a:lnSpc>
+                <a:spcPts val="2310"/>
+              </a:lnSpc>
+            </a:pPr>
+            <a:r>
+              <a:rPr lang="en-US" sz="1650" b="1" spc="198">
+                <a:solidFill>
+                  <a:srgbClr val="18A999"/>
+                </a:solidFill>
+                <a:latin typeface="DM Sans Bold"/>
+                <a:ea typeface="DM Sans Bold"/>
+                <a:cs typeface="DM Sans Bold"/>
+                <a:sym typeface="DM Sans Bold"/>
+              </a:rPr>
+              <a:t>MODUL INFORMASI DIGITAL  •  11</a:t>
+            </a:r>
+          </a:p>
+        </p:txBody>
+      </p:sp>
+      <p:sp>
+        <p:nvSpPr>
+          <p:cNvPr id="3" name="TextBox 3">
+            <a:extLst>
+              <a:ext uri="{FF2B5EF4-FFF2-40B4-BE49-F238E27FC236}">
+                <a16:creationId xmlns:a16="http://schemas.microsoft.com/office/drawing/2014/main" id="{15968025-DC81-BE79-3B9F-E94F2EF03C9F}"/>
+              </a:ext>
+            </a:extLst>
+          </p:cNvPr>
+          <p:cNvSpPr txBox="1"/>
+          <p:nvPr/>
+        </p:nvSpPr>
+        <p:spPr>
+          <a:xfrm>
+            <a:off x="952500" y="1028700"/>
+            <a:ext cx="14287500" cy="672465"/>
+          </a:xfrm>
+          <a:prstGeom prst="rect">
+            <a:avLst/>
+          </a:prstGeom>
+        </p:spPr>
+        <p:txBody>
+          <a:bodyPr lIns="0" tIns="0" rIns="0" bIns="0" rtlCol="0" anchor="t">
+            <a:spAutoFit/>
+          </a:bodyPr>
+          <a:lstStyle/>
+          <a:p>
+            <a:pPr algn="l">
+              <a:lnSpc>
+                <a:spcPts val="5040"/>
+              </a:lnSpc>
+            </a:pPr>
+            <a:r>
+              <a:rPr lang="en-US" sz="4800" b="1" dirty="0" err="1">
+                <a:solidFill>
+                  <a:srgbClr val="12233F"/>
+                </a:solidFill>
+                <a:latin typeface="Bricolage Grotesque Bold"/>
+                <a:ea typeface="Bricolage Grotesque Bold"/>
+                <a:cs typeface="Bricolage Grotesque Bold"/>
+                <a:sym typeface="Bricolage Grotesque Bold"/>
+              </a:rPr>
+              <a:t>Lihat</a:t>
+            </a:r>
+            <a:r>
+              <a:rPr lang="en-US" sz="4800" b="1" dirty="0">
+                <a:solidFill>
+                  <a:srgbClr val="12233F"/>
+                </a:solidFill>
+                <a:latin typeface="Bricolage Grotesque Bold"/>
+                <a:ea typeface="Bricolage Grotesque Bold"/>
+                <a:cs typeface="Bricolage Grotesque Bold"/>
+                <a:sym typeface="Bricolage Grotesque Bold"/>
+              </a:rPr>
+              <a:t> </a:t>
+            </a:r>
+            <a:r>
+              <a:rPr lang="en-US" sz="4800" b="1" dirty="0" err="1">
+                <a:solidFill>
+                  <a:srgbClr val="12233F"/>
+                </a:solidFill>
+                <a:latin typeface="Bricolage Grotesque Bold"/>
+                <a:ea typeface="Bricolage Grotesque Bold"/>
+                <a:cs typeface="Bricolage Grotesque Bold"/>
+                <a:sym typeface="Bricolage Grotesque Bold"/>
+              </a:rPr>
+              <a:t>ini</a:t>
+            </a:r>
+            <a:r>
+              <a:rPr lang="en-US" sz="4800" b="1" dirty="0">
+                <a:solidFill>
+                  <a:srgbClr val="12233F"/>
+                </a:solidFill>
+                <a:latin typeface="Bricolage Grotesque Bold"/>
+                <a:ea typeface="Bricolage Grotesque Bold"/>
+                <a:cs typeface="Bricolage Grotesque Bold"/>
+                <a:sym typeface="Bricolage Grotesque Bold"/>
+              </a:rPr>
+              <a:t>…</a:t>
+            </a:r>
+          </a:p>
+        </p:txBody>
+      </p:sp>
+      <p:sp>
+        <p:nvSpPr>
+          <p:cNvPr id="4" name="AutoShape 4">
+            <a:extLst>
+              <a:ext uri="{FF2B5EF4-FFF2-40B4-BE49-F238E27FC236}">
+                <a16:creationId xmlns:a16="http://schemas.microsoft.com/office/drawing/2014/main" id="{F4DBECF8-5004-CCBA-8A5C-AE81DF946A5D}"/>
+              </a:ext>
+            </a:extLst>
+          </p:cNvPr>
+          <p:cNvSpPr/>
+          <p:nvPr/>
+        </p:nvSpPr>
+        <p:spPr>
+          <a:xfrm>
+            <a:off x="952500" y="1962150"/>
+            <a:ext cx="16383000" cy="0"/>
+          </a:xfrm>
+          <a:prstGeom prst="line">
+            <a:avLst/>
+          </a:prstGeom>
+          <a:ln w="19050" cap="flat">
+            <a:solidFill>
+              <a:srgbClr val="D9D1C4"/>
+            </a:solidFill>
+            <a:prstDash val="solid"/>
+            <a:headEnd type="none" w="sm" len="sm"/>
+            <a:tailEnd type="none" w="sm" len="sm"/>
+          </a:ln>
+        </p:spPr>
+        <p:txBody>
+          <a:bodyPr/>
+          <a:lstStyle/>
+          <a:p>
+            <a:endParaRPr lang="en-US"/>
+          </a:p>
+        </p:txBody>
+      </p:sp>
+      <p:sp>
+        <p:nvSpPr>
+          <p:cNvPr id="34" name="TextBox 34">
+            <a:extLst>
+              <a:ext uri="{FF2B5EF4-FFF2-40B4-BE49-F238E27FC236}">
+                <a16:creationId xmlns:a16="http://schemas.microsoft.com/office/drawing/2014/main" id="{9954C9D9-1D1E-6D98-96B2-EC694A8DCF62}"/>
+              </a:ext>
+            </a:extLst>
+          </p:cNvPr>
+          <p:cNvSpPr txBox="1"/>
+          <p:nvPr/>
+        </p:nvSpPr>
+        <p:spPr>
+          <a:xfrm>
+            <a:off x="952500" y="9772650"/>
+            <a:ext cx="9525000" cy="222885"/>
+          </a:xfrm>
+          <a:prstGeom prst="rect">
+            <a:avLst/>
+          </a:prstGeom>
+        </p:spPr>
+        <p:txBody>
+          <a:bodyPr lIns="0" tIns="0" rIns="0" bIns="0" rtlCol="0" anchor="t">
+            <a:spAutoFit/>
+          </a:bodyPr>
+          <a:lstStyle/>
+          <a:p>
+            <a:pPr algn="l">
+              <a:lnSpc>
+                <a:spcPts val="1889"/>
+              </a:lnSpc>
+            </a:pPr>
+            <a:r>
+              <a:rPr lang="en-US" sz="1350" b="1" spc="108">
+                <a:solidFill>
+                  <a:srgbClr val="5D6B7E"/>
+                </a:solidFill>
+                <a:latin typeface="DM Sans Bold"/>
+                <a:ea typeface="DM Sans Bold"/>
+                <a:cs typeface="DM Sans Bold"/>
+                <a:sym typeface="DM Sans Bold"/>
+              </a:rPr>
+              <a:t>BERPIKIR KRITIS  •  VERIFIKASI  •  BERTANGGUNG JAWAB</a:t>
+            </a:r>
+          </a:p>
+        </p:txBody>
+      </p:sp>
+      <p:sp>
+        <p:nvSpPr>
+          <p:cNvPr id="35" name="TextBox 35">
+            <a:extLst>
+              <a:ext uri="{FF2B5EF4-FFF2-40B4-BE49-F238E27FC236}">
+                <a16:creationId xmlns:a16="http://schemas.microsoft.com/office/drawing/2014/main" id="{3E3A6BA1-0C04-444D-E811-099C22CC0104}"/>
+              </a:ext>
+            </a:extLst>
+          </p:cNvPr>
+          <p:cNvSpPr txBox="1"/>
+          <p:nvPr/>
+        </p:nvSpPr>
+        <p:spPr>
+          <a:xfrm>
+            <a:off x="16383000" y="9753600"/>
+            <a:ext cx="952500" cy="266700"/>
+          </a:xfrm>
+          <a:prstGeom prst="rect">
+            <a:avLst/>
+          </a:prstGeom>
+        </p:spPr>
+        <p:txBody>
+          <a:bodyPr lIns="0" tIns="0" rIns="0" bIns="0" rtlCol="0" anchor="t">
+            <a:spAutoFit/>
+          </a:bodyPr>
+          <a:lstStyle/>
+          <a:p>
+            <a:pPr algn="r">
+              <a:lnSpc>
+                <a:spcPts val="2100"/>
+              </a:lnSpc>
+            </a:pPr>
+            <a:r>
+              <a:rPr lang="en-US" sz="1500">
+                <a:solidFill>
+                  <a:srgbClr val="12233F"/>
+                </a:solidFill>
+                <a:latin typeface="Archivo Black"/>
+                <a:ea typeface="Archivo Black"/>
+                <a:cs typeface="Archivo Black"/>
+                <a:sym typeface="Archivo Black"/>
+              </a:rPr>
+              <a:t>11</a:t>
+            </a:r>
+          </a:p>
+        </p:txBody>
+      </p:sp>
+      <p:pic>
+        <p:nvPicPr>
+          <p:cNvPr id="5" name="Picture 4" descr="Kata Istana hingga Kemendikti soal Makalah MBG Catut Nama Prabowo untuk  Dapat Nobel">
+            <a:extLst>
+              <a:ext uri="{FF2B5EF4-FFF2-40B4-BE49-F238E27FC236}">
+                <a16:creationId xmlns:a16="http://schemas.microsoft.com/office/drawing/2014/main" id="{6C6B6198-C81F-18E1-84C2-6BFE118666C9}"/>
+              </a:ext>
+            </a:extLst>
+          </p:cNvPr>
+          <p:cNvPicPr>
+            <a:picLocks noChangeAspect="1"/>
+          </p:cNvPicPr>
+          <p:nvPr/>
+        </p:nvPicPr>
+        <p:blipFill>
+          <a:blip r:embed="rId2"/>
+          <a:stretch>
+            <a:fillRect/>
+          </a:stretch>
+        </p:blipFill>
+        <p:spPr>
+          <a:xfrm>
+            <a:off x="3581400" y="2025014"/>
+            <a:ext cx="9525000" cy="7143750"/>
+          </a:xfrm>
+          <a:prstGeom prst="rect">
+            <a:avLst/>
+          </a:prstGeom>
+        </p:spPr>
+      </p:pic>
+    </p:spTree>
+    <p:extLst>
+      <p:ext uri="{BB962C8B-B14F-4D97-AF65-F5344CB8AC3E}">
+        <p14:creationId xmlns:p14="http://schemas.microsoft.com/office/powerpoint/2010/main" val="3046188979"/>
+      </p:ext>
+    </p:extLst>
+  </p:cSld>
+  <p:clrMapOvr>
+    <a:masterClrMapping/>
+  </p:clrMapOvr>
+  <mc:AlternateContent xmlns:mc="http://schemas.openxmlformats.org/markup-compatibility/2006">
+    <mc:Choice xmlns:p159="http://schemas.microsoft.com/office/powerpoint/2015/09/main" Requires="p159">
+      <p:transition xmlns:p14="http://schemas.microsoft.com/office/powerpoint/2010/main" spd="slow" p14:dur="2000">
+        <p159:morph option="byObject"/>
+      </p:transition>
+    </mc:Choice>
+    <mc:Fallback>
+      <p:transition spd="slow">
+        <p:fade/>
+      </p:transition>
+    </mc:Fallback>
+  </mc:AlternateContent>
+</p:sld>
+</file>
+
+<file path=ppt/slides/slide13.xml><?xml version="1.0" encoding="utf-8"?>
 <p:sld xmlns:a="http://schemas.openxmlformats.org/drawingml/2006/main" xmlns:r="http://schemas.openxmlformats.org/officeDocument/2006/relationships" xmlns:p="http://schemas.openxmlformats.org/presentationml/2006/main">
   <p:cSld>
     <p:bg>
@@ -6808,7 +7194,7 @@
                 </a:lnSpc>
               </a:pPr>
               <a:r>
-                <a:rPr lang="en-US" sz="3750">
+                <a:rPr lang="en-US" sz="3750" dirty="0">
                   <a:solidFill>
                     <a:srgbClr val="FFC857"/>
                   </a:solidFill>
@@ -7939,7 +8325,7 @@
 </p:sld>
 </file>
 
-<file path=ppt/slides/slide13.xml><?xml version="1.0" encoding="utf-8"?>
+<file path=ppt/slides/slide14.xml><?xml version="1.0" encoding="utf-8"?>
 <p:sld xmlns:a="http://schemas.openxmlformats.org/drawingml/2006/main" xmlns:r="http://schemas.openxmlformats.org/officeDocument/2006/relationships" xmlns:p="http://schemas.openxmlformats.org/presentationml/2006/main">
   <p:cSld>
     <p:bg>
@@ -7966,6 +8352,160 @@
       </p:grpSpPr>
       <p:sp>
         <p:nvSpPr>
+          <p:cNvPr id="23" name="Rounded Rectangle 22">
+            <a:extLst>
+              <a:ext uri="{FF2B5EF4-FFF2-40B4-BE49-F238E27FC236}">
+                <a16:creationId xmlns:a16="http://schemas.microsoft.com/office/drawing/2014/main" id="{47AD9F5B-556F-2650-0EFE-1B7469BE2BE0}"/>
+              </a:ext>
+            </a:extLst>
+          </p:cNvPr>
+          <p:cNvSpPr/>
+          <p:nvPr/>
+        </p:nvSpPr>
+        <p:spPr>
+          <a:xfrm>
+            <a:off x="1537855" y="3389351"/>
+            <a:ext cx="4191000" cy="1600200"/>
+          </a:xfrm>
+          <a:prstGeom prst="roundRect">
+            <a:avLst/>
+          </a:prstGeom>
+          <a:solidFill>
+            <a:schemeClr val="bg2">
+              <a:lumMod val="75000"/>
+            </a:schemeClr>
+          </a:solidFill>
+        </p:spPr>
+        <p:style>
+          <a:lnRef idx="2">
+            <a:schemeClr val="accent1">
+              <a:shade val="15000"/>
+            </a:schemeClr>
+          </a:lnRef>
+          <a:fillRef idx="1">
+            <a:schemeClr val="accent1"/>
+          </a:fillRef>
+          <a:effectRef idx="0">
+            <a:schemeClr val="accent1"/>
+          </a:effectRef>
+          <a:fontRef idx="minor">
+            <a:schemeClr val="lt1"/>
+          </a:fontRef>
+        </p:style>
+        <p:txBody>
+          <a:bodyPr rtlCol="0" anchor="ctr"/>
+          <a:lstStyle/>
+          <a:p>
+            <a:pPr>
+              <a:lnSpc>
+                <a:spcPts val="3825"/>
+              </a:lnSpc>
+            </a:pPr>
+            <a:r>
+              <a:rPr lang="en-US" sz="2400" b="1" dirty="0">
+                <a:solidFill>
+                  <a:srgbClr val="12233F"/>
+                </a:solidFill>
+                <a:latin typeface="DM Sans Bold"/>
+                <a:ea typeface="DM Sans Bold"/>
+                <a:cs typeface="DM Sans Bold"/>
+                <a:sym typeface="DM Sans Bold"/>
+              </a:rPr>
+              <a:t>MISINFORMASI</a:t>
+            </a:r>
+          </a:p>
+          <a:p>
+            <a:pPr>
+              <a:lnSpc>
+                <a:spcPts val="3825"/>
+              </a:lnSpc>
+            </a:pPr>
+            <a:r>
+              <a:rPr lang="en-US" sz="2400" dirty="0">
+                <a:solidFill>
+                  <a:srgbClr val="12233F"/>
+                </a:solidFill>
+                <a:latin typeface="DM Sans Bold"/>
+                <a:ea typeface="DM Sans Bold"/>
+                <a:cs typeface="DM Sans Bold"/>
+                <a:sym typeface="DM Sans Bold"/>
+              </a:rPr>
+              <a:t>Salah </a:t>
+            </a:r>
+            <a:r>
+              <a:rPr lang="en-US" sz="2400" dirty="0" err="1">
+                <a:solidFill>
+                  <a:srgbClr val="12233F"/>
+                </a:solidFill>
+                <a:latin typeface="DM Sans Bold"/>
+                <a:ea typeface="DM Sans Bold"/>
+                <a:cs typeface="DM Sans Bold"/>
+                <a:sym typeface="DM Sans Bold"/>
+              </a:rPr>
+              <a:t>tanpa</a:t>
+            </a:r>
+            <a:r>
+              <a:rPr lang="en-US" sz="2400" dirty="0">
+                <a:solidFill>
+                  <a:srgbClr val="12233F"/>
+                </a:solidFill>
+                <a:latin typeface="DM Sans Bold"/>
+                <a:ea typeface="DM Sans Bold"/>
+                <a:cs typeface="DM Sans Bold"/>
+                <a:sym typeface="DM Sans Bold"/>
+              </a:rPr>
+              <a:t> </a:t>
+            </a:r>
+            <a:r>
+              <a:rPr lang="en-US" sz="2400" dirty="0" err="1">
+                <a:solidFill>
+                  <a:srgbClr val="12233F"/>
+                </a:solidFill>
+                <a:latin typeface="DM Sans Bold"/>
+                <a:ea typeface="DM Sans Bold"/>
+                <a:cs typeface="DM Sans Bold"/>
+                <a:sym typeface="DM Sans Bold"/>
+              </a:rPr>
+              <a:t>niat</a:t>
+            </a:r>
+            <a:r>
+              <a:rPr lang="en-US" sz="2400" dirty="0">
+                <a:solidFill>
+                  <a:srgbClr val="12233F"/>
+                </a:solidFill>
+                <a:latin typeface="DM Sans Bold"/>
+                <a:ea typeface="DM Sans Bold"/>
+                <a:cs typeface="DM Sans Bold"/>
+                <a:sym typeface="DM Sans Bold"/>
+              </a:rPr>
+              <a:t> </a:t>
+            </a:r>
+            <a:r>
+              <a:rPr lang="en-US" sz="2400" dirty="0" err="1">
+                <a:solidFill>
+                  <a:srgbClr val="12233F"/>
+                </a:solidFill>
+                <a:latin typeface="DM Sans Bold"/>
+                <a:ea typeface="DM Sans Bold"/>
+                <a:cs typeface="DM Sans Bold"/>
+                <a:sym typeface="DM Sans Bold"/>
+              </a:rPr>
+              <a:t>menipu</a:t>
+            </a:r>
+            <a:endParaRPr lang="en-US" sz="2400" dirty="0">
+              <a:solidFill>
+                <a:srgbClr val="12233F"/>
+              </a:solidFill>
+              <a:latin typeface="DM Sans Bold"/>
+              <a:ea typeface="DM Sans Bold"/>
+              <a:cs typeface="DM Sans Bold"/>
+              <a:sym typeface="DM Sans Bold"/>
+            </a:endParaRPr>
+          </a:p>
+        </p:txBody>
+      </p:sp>
+      <p:sp>
+        <p:nvSpPr>
           <p:cNvPr id="2" name="TextBox 2"/>
           <p:cNvSpPr txBox="1"/>
           <p:nvPr/>
@@ -7991,7 +8531,7 @@
               </a:lnSpc>
             </a:pPr>
             <a:r>
-              <a:rPr lang="en-US" sz="1650" b="1" spc="198">
+              <a:rPr lang="en-US" sz="1650" b="1" spc="198" dirty="0">
                 <a:solidFill>
                   <a:srgbClr val="18A999"/>
                 </a:solidFill>
@@ -8032,7 +8572,7 @@
               </a:lnSpc>
             </a:pPr>
             <a:r>
-              <a:rPr lang="en-US" sz="4800" b="1">
+              <a:rPr lang="en-US" sz="4800" b="1" dirty="0">
                 <a:solidFill>
                   <a:srgbClr val="12233F"/>
                 </a:solidFill>
@@ -8041,8 +8581,77 @@
                 <a:cs typeface="Bricolage Grotesque Bold"/>
                 <a:sym typeface="Bricolage Grotesque Bold"/>
               </a:rPr>
-              <a:t>Mengenali hoaks</a:t>
-            </a:r>
+              <a:t>Tidak </a:t>
+            </a:r>
+            <a:r>
+              <a:rPr lang="en-US" sz="4800" b="1" dirty="0" err="1">
+                <a:solidFill>
+                  <a:srgbClr val="12233F"/>
+                </a:solidFill>
+                <a:latin typeface="Bricolage Grotesque Bold"/>
+                <a:ea typeface="Bricolage Grotesque Bold"/>
+                <a:cs typeface="Bricolage Grotesque Bold"/>
+                <a:sym typeface="Bricolage Grotesque Bold"/>
+              </a:rPr>
+              <a:t>semua</a:t>
+            </a:r>
+            <a:r>
+              <a:rPr lang="en-US" sz="4800" b="1" dirty="0">
+                <a:solidFill>
+                  <a:srgbClr val="12233F"/>
+                </a:solidFill>
+                <a:latin typeface="Bricolage Grotesque Bold"/>
+                <a:ea typeface="Bricolage Grotesque Bold"/>
+                <a:cs typeface="Bricolage Grotesque Bold"/>
+                <a:sym typeface="Bricolage Grotesque Bold"/>
+              </a:rPr>
+              <a:t> </a:t>
+            </a:r>
+            <a:r>
+              <a:rPr lang="en-US" sz="4800" b="1" dirty="0" err="1">
+                <a:solidFill>
+                  <a:srgbClr val="12233F"/>
+                </a:solidFill>
+                <a:latin typeface="Bricolage Grotesque Bold"/>
+                <a:ea typeface="Bricolage Grotesque Bold"/>
+                <a:cs typeface="Bricolage Grotesque Bold"/>
+                <a:sym typeface="Bricolage Grotesque Bold"/>
+              </a:rPr>
+              <a:t>informasi</a:t>
+            </a:r>
+            <a:r>
+              <a:rPr lang="en-US" sz="4800" b="1" dirty="0">
+                <a:solidFill>
+                  <a:srgbClr val="12233F"/>
+                </a:solidFill>
+                <a:latin typeface="Bricolage Grotesque Bold"/>
+                <a:ea typeface="Bricolage Grotesque Bold"/>
+                <a:cs typeface="Bricolage Grotesque Bold"/>
+                <a:sym typeface="Bricolage Grotesque Bold"/>
+              </a:rPr>
+              <a:t> salah </a:t>
+            </a:r>
+            <a:r>
+              <a:rPr lang="en-US" sz="4800" b="1" dirty="0" err="1">
+                <a:solidFill>
+                  <a:srgbClr val="12233F"/>
+                </a:solidFill>
+                <a:latin typeface="Bricolage Grotesque Bold"/>
+                <a:ea typeface="Bricolage Grotesque Bold"/>
+                <a:cs typeface="Bricolage Grotesque Bold"/>
+                <a:sym typeface="Bricolage Grotesque Bold"/>
+              </a:rPr>
+              <a:t>sama</a:t>
+            </a:r>
+            <a:endParaRPr lang="en-US" sz="4800" b="1" dirty="0">
+              <a:solidFill>
+                <a:srgbClr val="12233F"/>
+              </a:solidFill>
+              <a:latin typeface="Bricolage Grotesque Bold"/>
+              <a:ea typeface="Bricolage Grotesque Bold"/>
+              <a:cs typeface="Bricolage Grotesque Bold"/>
+              <a:sym typeface="Bricolage Grotesque Bold"/>
+            </a:endParaRPr>
           </a:p>
         </p:txBody>
       </p:sp>
@@ -8077,9 +8686,960 @@
           </a:p>
         </p:txBody>
       </p:sp>
+      <p:sp>
+        <p:nvSpPr>
+          <p:cNvPr id="15" name="TextBox 15"/>
+          <p:cNvSpPr txBox="1"/>
+          <p:nvPr/>
+        </p:nvSpPr>
+        <p:spPr>
+          <a:xfrm>
+            <a:off x="952500" y="9772650"/>
+            <a:ext cx="9525000" cy="222885"/>
+          </a:xfrm>
+          <a:prstGeom prst="rect">
+            <a:avLst/>
+          </a:prstGeom>
+        </p:spPr>
+        <p:txBody>
+          <a:bodyPr lIns="0" tIns="0" rIns="0" bIns="0" rtlCol="0" anchor="t">
+            <a:spAutoFit/>
+          </a:bodyPr>
+          <a:lstStyle/>
+          <a:p>
+            <a:pPr algn="l">
+              <a:lnSpc>
+                <a:spcPts val="1889"/>
+              </a:lnSpc>
+            </a:pPr>
+            <a:r>
+              <a:rPr lang="en-US" sz="1350" b="1" spc="108">
+                <a:solidFill>
+                  <a:srgbClr val="5D6B7E"/>
+                </a:solidFill>
+                <a:latin typeface="DM Sans Bold"/>
+                <a:ea typeface="DM Sans Bold"/>
+                <a:cs typeface="DM Sans Bold"/>
+                <a:sym typeface="DM Sans Bold"/>
+              </a:rPr>
+              <a:t>BERPIKIR KRITIS  •  VERIFIKASI  •  BERTANGGUNG JAWAB</a:t>
+            </a:r>
+          </a:p>
+        </p:txBody>
+      </p:sp>
+      <p:sp>
+        <p:nvSpPr>
+          <p:cNvPr id="16" name="TextBox 16"/>
+          <p:cNvSpPr txBox="1"/>
+          <p:nvPr/>
+        </p:nvSpPr>
+        <p:spPr>
+          <a:xfrm>
+            <a:off x="16383000" y="9753600"/>
+            <a:ext cx="952500" cy="266700"/>
+          </a:xfrm>
+          <a:prstGeom prst="rect">
+            <a:avLst/>
+          </a:prstGeom>
+        </p:spPr>
+        <p:txBody>
+          <a:bodyPr lIns="0" tIns="0" rIns="0" bIns="0" rtlCol="0" anchor="t">
+            <a:spAutoFit/>
+          </a:bodyPr>
+          <a:lstStyle/>
+          <a:p>
+            <a:pPr algn="r">
+              <a:lnSpc>
+                <a:spcPts val="2100"/>
+              </a:lnSpc>
+            </a:pPr>
+            <a:r>
+              <a:rPr lang="en-US" sz="1500">
+                <a:solidFill>
+                  <a:srgbClr val="12233F"/>
+                </a:solidFill>
+                <a:latin typeface="Archivo Black"/>
+                <a:ea typeface="Archivo Black"/>
+                <a:cs typeface="Archivo Black"/>
+                <a:sym typeface="Archivo Black"/>
+              </a:rPr>
+              <a:t>13</a:t>
+            </a:r>
+          </a:p>
+        </p:txBody>
+      </p:sp>
+      <p:sp>
+        <p:nvSpPr>
+          <p:cNvPr id="24" name="Rounded Rectangle 23">
+            <a:extLst>
+              <a:ext uri="{FF2B5EF4-FFF2-40B4-BE49-F238E27FC236}">
+                <a16:creationId xmlns:a16="http://schemas.microsoft.com/office/drawing/2014/main" id="{270F17FE-A20C-13CC-9F90-16C0DE26D5E1}"/>
+              </a:ext>
+            </a:extLst>
+          </p:cNvPr>
+          <p:cNvSpPr/>
+          <p:nvPr/>
+        </p:nvSpPr>
+        <p:spPr>
+          <a:xfrm>
+            <a:off x="6459682" y="3316616"/>
+            <a:ext cx="4191000" cy="1600200"/>
+          </a:xfrm>
+          <a:prstGeom prst="roundRect">
+            <a:avLst/>
+          </a:prstGeom>
+          <a:solidFill>
+            <a:schemeClr val="accent6">
+              <a:lumMod val="20000"/>
+              <a:lumOff val="80000"/>
+            </a:schemeClr>
+          </a:solidFill>
+        </p:spPr>
+        <p:style>
+          <a:lnRef idx="2">
+            <a:schemeClr val="accent1">
+              <a:shade val="15000"/>
+            </a:schemeClr>
+          </a:lnRef>
+          <a:fillRef idx="1">
+            <a:schemeClr val="accent1"/>
+          </a:fillRef>
+          <a:effectRef idx="0">
+            <a:schemeClr val="accent1"/>
+          </a:effectRef>
+          <a:fontRef idx="minor">
+            <a:schemeClr val="lt1"/>
+          </a:fontRef>
+        </p:style>
+        <p:txBody>
+          <a:bodyPr rtlCol="0" anchor="ctr"/>
+          <a:lstStyle/>
+          <a:p>
+            <a:pPr>
+              <a:lnSpc>
+                <a:spcPts val="3825"/>
+              </a:lnSpc>
+            </a:pPr>
+            <a:r>
+              <a:rPr lang="en-US" sz="2400" dirty="0">
+                <a:solidFill>
+                  <a:srgbClr val="12233F"/>
+                </a:solidFill>
+                <a:latin typeface="DM Sans Bold"/>
+                <a:ea typeface="DM Sans Bold"/>
+                <a:cs typeface="DM Sans Bold"/>
+                <a:sym typeface="DM Sans Bold"/>
+              </a:rPr>
+              <a:t>DISINFORMASI</a:t>
+            </a:r>
+          </a:p>
+          <a:p>
+            <a:pPr>
+              <a:lnSpc>
+                <a:spcPts val="3825"/>
+              </a:lnSpc>
+            </a:pPr>
+            <a:r>
+              <a:rPr lang="en-US" sz="2400" b="1" dirty="0">
+                <a:solidFill>
+                  <a:srgbClr val="12233F"/>
+                </a:solidFill>
+                <a:latin typeface="DM Sans Bold"/>
+                <a:ea typeface="DM Sans Bold"/>
+                <a:cs typeface="DM Sans Bold"/>
+                <a:sym typeface="DM Sans Bold"/>
+              </a:rPr>
+              <a:t>Salah </a:t>
+            </a:r>
+            <a:r>
+              <a:rPr lang="en-US" sz="2400" b="1" dirty="0" err="1">
+                <a:solidFill>
+                  <a:srgbClr val="12233F"/>
+                </a:solidFill>
+                <a:latin typeface="DM Sans Bold"/>
+                <a:ea typeface="DM Sans Bold"/>
+                <a:cs typeface="DM Sans Bold"/>
+                <a:sym typeface="DM Sans Bold"/>
+              </a:rPr>
+              <a:t>dengan</a:t>
+            </a:r>
+            <a:r>
+              <a:rPr lang="en-US" sz="2400" b="1" dirty="0">
+                <a:solidFill>
+                  <a:srgbClr val="12233F"/>
+                </a:solidFill>
+                <a:latin typeface="DM Sans Bold"/>
+                <a:ea typeface="DM Sans Bold"/>
+                <a:cs typeface="DM Sans Bold"/>
+                <a:sym typeface="DM Sans Bold"/>
+              </a:rPr>
+              <a:t> </a:t>
+            </a:r>
+            <a:r>
+              <a:rPr lang="en-US" sz="2400" b="1" dirty="0" err="1">
+                <a:solidFill>
+                  <a:srgbClr val="12233F"/>
+                </a:solidFill>
+                <a:latin typeface="DM Sans Bold"/>
+                <a:ea typeface="DM Sans Bold"/>
+                <a:cs typeface="DM Sans Bold"/>
+                <a:sym typeface="DM Sans Bold"/>
+              </a:rPr>
+              <a:t>niat</a:t>
+            </a:r>
+            <a:r>
+              <a:rPr lang="en-US" sz="2400" b="1" dirty="0">
+                <a:solidFill>
+                  <a:srgbClr val="12233F"/>
+                </a:solidFill>
+                <a:latin typeface="DM Sans Bold"/>
+                <a:ea typeface="DM Sans Bold"/>
+                <a:cs typeface="DM Sans Bold"/>
+                <a:sym typeface="DM Sans Bold"/>
+              </a:rPr>
+              <a:t> </a:t>
+            </a:r>
+            <a:r>
+              <a:rPr lang="en-US" sz="2400" b="1" dirty="0" err="1">
+                <a:solidFill>
+                  <a:srgbClr val="12233F"/>
+                </a:solidFill>
+                <a:latin typeface="DM Sans Bold"/>
+                <a:ea typeface="DM Sans Bold"/>
+                <a:cs typeface="DM Sans Bold"/>
+                <a:sym typeface="DM Sans Bold"/>
+              </a:rPr>
+              <a:t>menipu</a:t>
+            </a:r>
+            <a:endParaRPr lang="en-US" sz="2400" b="1" dirty="0">
+              <a:solidFill>
+                <a:srgbClr val="12233F"/>
+              </a:solidFill>
+              <a:latin typeface="DM Sans Bold"/>
+              <a:ea typeface="DM Sans Bold"/>
+              <a:cs typeface="DM Sans Bold"/>
+              <a:sym typeface="DM Sans Bold"/>
+            </a:endParaRPr>
+          </a:p>
+        </p:txBody>
+      </p:sp>
+      <p:sp>
+        <p:nvSpPr>
+          <p:cNvPr id="25" name="Rounded Rectangle 24">
+            <a:extLst>
+              <a:ext uri="{FF2B5EF4-FFF2-40B4-BE49-F238E27FC236}">
+                <a16:creationId xmlns:a16="http://schemas.microsoft.com/office/drawing/2014/main" id="{C98434F4-7BD0-9CE1-FE06-D14322560A44}"/>
+              </a:ext>
+            </a:extLst>
+          </p:cNvPr>
+          <p:cNvSpPr/>
+          <p:nvPr/>
+        </p:nvSpPr>
+        <p:spPr>
+          <a:xfrm>
+            <a:off x="11381509" y="3221457"/>
+            <a:ext cx="4191000" cy="1600200"/>
+          </a:xfrm>
+          <a:prstGeom prst="roundRect">
+            <a:avLst/>
+          </a:prstGeom>
+          <a:solidFill>
+            <a:schemeClr val="accent5">
+              <a:lumMod val="60000"/>
+              <a:lumOff val="40000"/>
+            </a:schemeClr>
+          </a:solidFill>
+        </p:spPr>
+        <p:style>
+          <a:lnRef idx="2">
+            <a:schemeClr val="accent1">
+              <a:shade val="15000"/>
+            </a:schemeClr>
+          </a:lnRef>
+          <a:fillRef idx="1">
+            <a:schemeClr val="accent1"/>
+          </a:fillRef>
+          <a:effectRef idx="0">
+            <a:schemeClr val="accent1"/>
+          </a:effectRef>
+          <a:fontRef idx="minor">
+            <a:schemeClr val="lt1"/>
+          </a:fontRef>
+        </p:style>
+        <p:txBody>
+          <a:bodyPr rtlCol="0" anchor="ctr"/>
+          <a:lstStyle/>
+          <a:p>
+            <a:pPr>
+              <a:lnSpc>
+                <a:spcPts val="3825"/>
+              </a:lnSpc>
+            </a:pPr>
+            <a:r>
+              <a:rPr lang="en-US" sz="2400" b="1" dirty="0">
+                <a:solidFill>
+                  <a:srgbClr val="12233F"/>
+                </a:solidFill>
+                <a:latin typeface="DM Sans Bold"/>
+                <a:ea typeface="DM Sans Bold"/>
+                <a:cs typeface="DM Sans Bold"/>
+                <a:sym typeface="DM Sans Bold"/>
+              </a:rPr>
+              <a:t>MALINFORMASI</a:t>
+            </a:r>
+          </a:p>
+          <a:p>
+            <a:pPr>
+              <a:lnSpc>
+                <a:spcPts val="3825"/>
+              </a:lnSpc>
+            </a:pPr>
+            <a:r>
+              <a:rPr lang="en-US" sz="2400" b="1" dirty="0" err="1">
+                <a:solidFill>
+                  <a:srgbClr val="12233F"/>
+                </a:solidFill>
+                <a:latin typeface="DM Sans Bold"/>
+                <a:ea typeface="DM Sans Bold"/>
+                <a:cs typeface="DM Sans Bold"/>
+                <a:sym typeface="DM Sans Bold"/>
+              </a:rPr>
+              <a:t>Benar</a:t>
+            </a:r>
+            <a:r>
+              <a:rPr lang="en-US" sz="2400" b="1" dirty="0">
+                <a:solidFill>
+                  <a:srgbClr val="12233F"/>
+                </a:solidFill>
+                <a:latin typeface="DM Sans Bold"/>
+                <a:ea typeface="DM Sans Bold"/>
+                <a:cs typeface="DM Sans Bold"/>
+                <a:sym typeface="DM Sans Bold"/>
+              </a:rPr>
+              <a:t> </a:t>
+            </a:r>
+            <a:r>
+              <a:rPr lang="en-US" sz="2400" b="1" dirty="0" err="1">
+                <a:solidFill>
+                  <a:srgbClr val="12233F"/>
+                </a:solidFill>
+                <a:latin typeface="DM Sans Bold"/>
+                <a:ea typeface="DM Sans Bold"/>
+                <a:cs typeface="DM Sans Bold"/>
+                <a:sym typeface="DM Sans Bold"/>
+              </a:rPr>
+              <a:t>tetapi</a:t>
+            </a:r>
+            <a:r>
+              <a:rPr lang="en-US" sz="2400" b="1" dirty="0">
+                <a:solidFill>
+                  <a:srgbClr val="12233F"/>
+                </a:solidFill>
+                <a:latin typeface="DM Sans Bold"/>
+                <a:ea typeface="DM Sans Bold"/>
+                <a:cs typeface="DM Sans Bold"/>
+                <a:sym typeface="DM Sans Bold"/>
+              </a:rPr>
+              <a:t> </a:t>
+            </a:r>
+            <a:r>
+              <a:rPr lang="en-US" sz="2400" b="1" dirty="0" err="1">
+                <a:solidFill>
+                  <a:srgbClr val="12233F"/>
+                </a:solidFill>
+                <a:latin typeface="DM Sans Bold"/>
+                <a:ea typeface="DM Sans Bold"/>
+                <a:cs typeface="DM Sans Bold"/>
+                <a:sym typeface="DM Sans Bold"/>
+              </a:rPr>
+              <a:t>disebar</a:t>
+            </a:r>
+            <a:r>
+              <a:rPr lang="en-US" sz="2400" b="1" dirty="0">
+                <a:solidFill>
+                  <a:srgbClr val="12233F"/>
+                </a:solidFill>
+                <a:latin typeface="DM Sans Bold"/>
+                <a:ea typeface="DM Sans Bold"/>
+                <a:cs typeface="DM Sans Bold"/>
+                <a:sym typeface="DM Sans Bold"/>
+              </a:rPr>
+              <a:t> </a:t>
+            </a:r>
+            <a:r>
+              <a:rPr lang="en-US" sz="2400" b="1" dirty="0" err="1">
+                <a:solidFill>
+                  <a:srgbClr val="12233F"/>
+                </a:solidFill>
+                <a:latin typeface="DM Sans Bold"/>
+                <a:ea typeface="DM Sans Bold"/>
+                <a:cs typeface="DM Sans Bold"/>
+                <a:sym typeface="DM Sans Bold"/>
+              </a:rPr>
+              <a:t>untuk</a:t>
+            </a:r>
+            <a:r>
+              <a:rPr lang="en-US" sz="2400" b="1" dirty="0">
+                <a:solidFill>
+                  <a:srgbClr val="12233F"/>
+                </a:solidFill>
+                <a:latin typeface="DM Sans Bold"/>
+                <a:ea typeface="DM Sans Bold"/>
+                <a:cs typeface="DM Sans Bold"/>
+                <a:sym typeface="DM Sans Bold"/>
+              </a:rPr>
+              <a:t> </a:t>
+            </a:r>
+            <a:r>
+              <a:rPr lang="en-US" sz="2400" b="1" dirty="0" err="1">
+                <a:solidFill>
+                  <a:srgbClr val="12233F"/>
+                </a:solidFill>
+                <a:latin typeface="DM Sans Bold"/>
+                <a:ea typeface="DM Sans Bold"/>
+                <a:cs typeface="DM Sans Bold"/>
+                <a:sym typeface="DM Sans Bold"/>
+              </a:rPr>
+              <a:t>Merugikan</a:t>
+            </a:r>
+            <a:endParaRPr lang="en-US" sz="2400" b="1" dirty="0">
+              <a:solidFill>
+                <a:srgbClr val="12233F"/>
+              </a:solidFill>
+              <a:latin typeface="DM Sans Bold"/>
+              <a:ea typeface="DM Sans Bold"/>
+              <a:cs typeface="DM Sans Bold"/>
+              <a:sym typeface="DM Sans Bold"/>
+            </a:endParaRPr>
+          </a:p>
+        </p:txBody>
+      </p:sp>
+      <p:sp>
+        <p:nvSpPr>
+          <p:cNvPr id="26" name="Rounded Rectangle 25">
+            <a:extLst>
+              <a:ext uri="{FF2B5EF4-FFF2-40B4-BE49-F238E27FC236}">
+                <a16:creationId xmlns:a16="http://schemas.microsoft.com/office/drawing/2014/main" id="{3A6C6709-C34D-6829-0076-A3E7641C16DA}"/>
+              </a:ext>
+            </a:extLst>
+          </p:cNvPr>
+          <p:cNvSpPr/>
+          <p:nvPr/>
+        </p:nvSpPr>
+        <p:spPr>
+          <a:xfrm>
+            <a:off x="3870614" y="5945150"/>
+            <a:ext cx="4191000" cy="1600200"/>
+          </a:xfrm>
+          <a:prstGeom prst="roundRect">
+            <a:avLst/>
+          </a:prstGeom>
+          <a:solidFill>
+            <a:schemeClr val="bg1">
+              <a:lumMod val="75000"/>
+            </a:schemeClr>
+          </a:solidFill>
+        </p:spPr>
+        <p:style>
+          <a:lnRef idx="2">
+            <a:schemeClr val="accent1">
+              <a:shade val="15000"/>
+            </a:schemeClr>
+          </a:lnRef>
+          <a:fillRef idx="1">
+            <a:schemeClr val="accent1"/>
+          </a:fillRef>
+          <a:effectRef idx="0">
+            <a:schemeClr val="accent1"/>
+          </a:effectRef>
+          <a:fontRef idx="minor">
+            <a:schemeClr val="lt1"/>
+          </a:fontRef>
+        </p:style>
+        <p:txBody>
+          <a:bodyPr rtlCol="0" anchor="ctr"/>
+          <a:lstStyle/>
+          <a:p>
+            <a:pPr>
+              <a:lnSpc>
+                <a:spcPts val="3825"/>
+              </a:lnSpc>
+            </a:pPr>
+            <a:r>
+              <a:rPr lang="en-US" sz="2400" b="1" dirty="0">
+                <a:solidFill>
+                  <a:srgbClr val="12233F"/>
+                </a:solidFill>
+                <a:latin typeface="DM Sans Bold"/>
+                <a:ea typeface="DM Sans Bold"/>
+                <a:cs typeface="DM Sans Bold"/>
+                <a:sym typeface="DM Sans Bold"/>
+              </a:rPr>
+              <a:t>HOAKS</a:t>
+            </a:r>
+          </a:p>
+          <a:p>
+            <a:pPr>
+              <a:lnSpc>
+                <a:spcPts val="3825"/>
+              </a:lnSpc>
+            </a:pPr>
+            <a:r>
+              <a:rPr lang="en-US" sz="2400" b="1" dirty="0">
+                <a:solidFill>
+                  <a:srgbClr val="12233F"/>
+                </a:solidFill>
+                <a:latin typeface="DM Sans Bold"/>
+                <a:ea typeface="DM Sans Bold"/>
+                <a:cs typeface="DM Sans Bold"/>
+                <a:sym typeface="DM Sans Bold"/>
+              </a:rPr>
+              <a:t>Berita </a:t>
+            </a:r>
+            <a:r>
+              <a:rPr lang="en-US" sz="2400" b="1" dirty="0" err="1">
+                <a:solidFill>
+                  <a:srgbClr val="12233F"/>
+                </a:solidFill>
+                <a:latin typeface="DM Sans Bold"/>
+                <a:ea typeface="DM Sans Bold"/>
+                <a:cs typeface="DM Sans Bold"/>
+                <a:sym typeface="DM Sans Bold"/>
+              </a:rPr>
+              <a:t>bohong</a:t>
+            </a:r>
+            <a:r>
+              <a:rPr lang="en-US" sz="2400" b="1" dirty="0">
+                <a:solidFill>
+                  <a:srgbClr val="12233F"/>
+                </a:solidFill>
+                <a:latin typeface="DM Sans Bold"/>
+                <a:ea typeface="DM Sans Bold"/>
+                <a:cs typeface="DM Sans Bold"/>
+                <a:sym typeface="DM Sans Bold"/>
+              </a:rPr>
+              <a:t> yang </a:t>
+            </a:r>
+            <a:r>
+              <a:rPr lang="en-US" sz="2400" b="1" dirty="0" err="1">
+                <a:solidFill>
+                  <a:srgbClr val="12233F"/>
+                </a:solidFill>
+                <a:latin typeface="DM Sans Bold"/>
+                <a:ea typeface="DM Sans Bold"/>
+                <a:cs typeface="DM Sans Bold"/>
+                <a:sym typeface="DM Sans Bold"/>
+              </a:rPr>
+              <a:t>direkayasa</a:t>
+            </a:r>
+            <a:endParaRPr lang="en-US" sz="2400" b="1" dirty="0">
+              <a:solidFill>
+                <a:srgbClr val="12233F"/>
+              </a:solidFill>
+              <a:latin typeface="DM Sans Bold"/>
+              <a:ea typeface="DM Sans Bold"/>
+              <a:cs typeface="DM Sans Bold"/>
+              <a:sym typeface="DM Sans Bold"/>
+            </a:endParaRPr>
+          </a:p>
+        </p:txBody>
+      </p:sp>
+      <p:sp>
+        <p:nvSpPr>
+          <p:cNvPr id="27" name="Rounded Rectangle 26">
+            <a:extLst>
+              <a:ext uri="{FF2B5EF4-FFF2-40B4-BE49-F238E27FC236}">
+                <a16:creationId xmlns:a16="http://schemas.microsoft.com/office/drawing/2014/main" id="{D1CFFAEB-488A-70E2-8A22-6ADD3ABCFBC0}"/>
+              </a:ext>
+            </a:extLst>
+          </p:cNvPr>
+          <p:cNvSpPr/>
+          <p:nvPr/>
+        </p:nvSpPr>
+        <p:spPr>
+          <a:xfrm>
+            <a:off x="9144000" y="5945150"/>
+            <a:ext cx="4191000" cy="1600200"/>
+          </a:xfrm>
+          <a:prstGeom prst="roundRect">
+            <a:avLst/>
+          </a:prstGeom>
+          <a:solidFill>
+            <a:srgbClr val="EAFF7C"/>
+          </a:solidFill>
+          <a:ln>
+            <a:solidFill>
+              <a:schemeClr val="accent1"/>
+            </a:solidFill>
+          </a:ln>
+        </p:spPr>
+        <p:style>
+          <a:lnRef idx="2">
+            <a:schemeClr val="accent1">
+              <a:shade val="15000"/>
+            </a:schemeClr>
+          </a:lnRef>
+          <a:fillRef idx="1">
+            <a:schemeClr val="accent1"/>
+          </a:fillRef>
+          <a:effectRef idx="0">
+            <a:schemeClr val="accent1"/>
+          </a:effectRef>
+          <a:fontRef idx="minor">
+            <a:schemeClr val="lt1"/>
+          </a:fontRef>
+        </p:style>
+        <p:txBody>
+          <a:bodyPr rtlCol="0" anchor="ctr"/>
+          <a:lstStyle/>
+          <a:p>
+            <a:pPr>
+              <a:lnSpc>
+                <a:spcPts val="3825"/>
+              </a:lnSpc>
+            </a:pPr>
+            <a:r>
+              <a:rPr lang="en-US" sz="2400" b="1" dirty="0">
+                <a:solidFill>
+                  <a:srgbClr val="12233F"/>
+                </a:solidFill>
+                <a:latin typeface="DM Sans Bold"/>
+                <a:ea typeface="DM Sans Bold"/>
+                <a:cs typeface="DM Sans Bold"/>
+                <a:sym typeface="DM Sans Bold"/>
+              </a:rPr>
+              <a:t>CLICKBAIT</a:t>
+            </a:r>
+          </a:p>
+          <a:p>
+            <a:pPr>
+              <a:lnSpc>
+                <a:spcPts val="3825"/>
+              </a:lnSpc>
+            </a:pPr>
+            <a:r>
+              <a:rPr lang="en-US" sz="2400" b="1" dirty="0" err="1">
+                <a:solidFill>
+                  <a:srgbClr val="12233F"/>
+                </a:solidFill>
+                <a:latin typeface="DM Sans Bold"/>
+                <a:ea typeface="DM Sans Bold"/>
+                <a:cs typeface="DM Sans Bold"/>
+                <a:sym typeface="DM Sans Bold"/>
+              </a:rPr>
+              <a:t>Judul</a:t>
+            </a:r>
+            <a:r>
+              <a:rPr lang="en-US" sz="2400" b="1" dirty="0">
+                <a:solidFill>
+                  <a:srgbClr val="12233F"/>
+                </a:solidFill>
+                <a:latin typeface="DM Sans Bold"/>
+                <a:ea typeface="DM Sans Bold"/>
+                <a:cs typeface="DM Sans Bold"/>
+                <a:sym typeface="DM Sans Bold"/>
+              </a:rPr>
+              <a:t> </a:t>
+            </a:r>
+            <a:r>
+              <a:rPr lang="en-US" sz="2400" b="1" dirty="0" err="1">
+                <a:solidFill>
+                  <a:srgbClr val="12233F"/>
+                </a:solidFill>
+                <a:latin typeface="DM Sans Bold"/>
+                <a:ea typeface="DM Sans Bold"/>
+                <a:cs typeface="DM Sans Bold"/>
+                <a:sym typeface="DM Sans Bold"/>
+              </a:rPr>
+              <a:t>sensasional</a:t>
+            </a:r>
+            <a:r>
+              <a:rPr lang="en-US" sz="2400" b="1" dirty="0">
+                <a:solidFill>
+                  <a:srgbClr val="12233F"/>
+                </a:solidFill>
+                <a:latin typeface="DM Sans Bold"/>
+                <a:ea typeface="DM Sans Bold"/>
+                <a:cs typeface="DM Sans Bold"/>
+                <a:sym typeface="DM Sans Bold"/>
+              </a:rPr>
+              <a:t> yang </a:t>
+            </a:r>
+            <a:r>
+              <a:rPr lang="en-US" sz="2400" b="1" dirty="0" err="1">
+                <a:solidFill>
+                  <a:srgbClr val="12233F"/>
+                </a:solidFill>
+                <a:latin typeface="DM Sans Bold"/>
+                <a:ea typeface="DM Sans Bold"/>
+                <a:cs typeface="DM Sans Bold"/>
+                <a:sym typeface="DM Sans Bold"/>
+              </a:rPr>
+              <a:t>tak</a:t>
+            </a:r>
+            <a:r>
+              <a:rPr lang="en-US" sz="2400" b="1" dirty="0">
+                <a:solidFill>
+                  <a:srgbClr val="12233F"/>
+                </a:solidFill>
+                <a:latin typeface="DM Sans Bold"/>
+                <a:ea typeface="DM Sans Bold"/>
+                <a:cs typeface="DM Sans Bold"/>
+                <a:sym typeface="DM Sans Bold"/>
+              </a:rPr>
+              <a:t> </a:t>
+            </a:r>
+            <a:r>
+              <a:rPr lang="en-US" sz="2400" b="1" dirty="0" err="1">
+                <a:solidFill>
+                  <a:srgbClr val="12233F"/>
+                </a:solidFill>
+                <a:latin typeface="DM Sans Bold"/>
+                <a:ea typeface="DM Sans Bold"/>
+                <a:cs typeface="DM Sans Bold"/>
+                <a:sym typeface="DM Sans Bold"/>
+              </a:rPr>
+              <a:t>sesuai</a:t>
+            </a:r>
+            <a:endParaRPr lang="en-US" sz="2400" b="1" dirty="0">
+              <a:solidFill>
+                <a:srgbClr val="12233F"/>
+              </a:solidFill>
+              <a:latin typeface="DM Sans Bold"/>
+              <a:ea typeface="DM Sans Bold"/>
+              <a:cs typeface="DM Sans Bold"/>
+              <a:sym typeface="DM Sans Bold"/>
+            </a:endParaRPr>
+          </a:p>
+        </p:txBody>
+      </p:sp>
+    </p:spTree>
+  </p:cSld>
+  <p:clrMapOvr>
+    <a:masterClrMapping/>
+  </p:clrMapOvr>
+  <mc:AlternateContent xmlns:mc="http://schemas.openxmlformats.org/markup-compatibility/2006">
+    <mc:Choice xmlns:p159="http://schemas.microsoft.com/office/powerpoint/2015/09/main" Requires="p159">
+      <p:transition xmlns:p14="http://schemas.microsoft.com/office/powerpoint/2010/main" spd="slow" p14:dur="2000">
+        <p159:morph option="byObject"/>
+      </p:transition>
+    </mc:Choice>
+    <mc:Fallback>
+      <p:transition spd="slow">
+        <p:fade/>
+      </p:transition>
+    </mc:Fallback>
+  </mc:AlternateContent>
+</p:sld>
+</file>
+
+<file path=ppt/slides/slide15.xml><?xml version="1.0" encoding="utf-8"?>
+<p:sld xmlns:a="http://schemas.openxmlformats.org/drawingml/2006/main" xmlns:r="http://schemas.openxmlformats.org/officeDocument/2006/relationships" xmlns:p="http://schemas.openxmlformats.org/presentationml/2006/main">
+  <p:cSld>
+    <p:bg>
+      <p:bgPr>
+        <a:solidFill>
+          <a:srgbClr val="F6F1E8"/>
+        </a:solidFill>
+        <a:effectLst/>
+      </p:bgPr>
+    </p:bg>
+    <p:spTree>
+      <p:nvGrpSpPr>
+        <p:cNvPr id="1" name="">
+          <a:extLst>
+            <a:ext uri="{FF2B5EF4-FFF2-40B4-BE49-F238E27FC236}">
+              <a16:creationId xmlns:a16="http://schemas.microsoft.com/office/drawing/2014/main" id="{6F74CCD2-D0F9-0249-4E24-4837AB9E2358}"/>
+            </a:ext>
+          </a:extLst>
+        </p:cNvPr>
+        <p:cNvGrpSpPr/>
+        <p:nvPr/>
+      </p:nvGrpSpPr>
+      <p:grpSpPr>
+        <a:xfrm>
+          <a:off x="0" y="0"/>
+          <a:ext cx="0" cy="0"/>
+          <a:chOff x="0" y="0"/>
+          <a:chExt cx="0" cy="0"/>
+        </a:xfrm>
+      </p:grpSpPr>
+      <p:sp>
+        <p:nvSpPr>
+          <p:cNvPr id="2" name="TextBox 2">
+            <a:extLst>
+              <a:ext uri="{FF2B5EF4-FFF2-40B4-BE49-F238E27FC236}">
+                <a16:creationId xmlns:a16="http://schemas.microsoft.com/office/drawing/2014/main" id="{4A64C13C-4C19-4C2D-5F6A-58548A7BD0AD}"/>
+              </a:ext>
+            </a:extLst>
+          </p:cNvPr>
+          <p:cNvSpPr txBox="1"/>
+          <p:nvPr/>
+        </p:nvSpPr>
+        <p:spPr>
+          <a:xfrm>
+            <a:off x="952500" y="504825"/>
+            <a:ext cx="8572500" cy="272415"/>
+          </a:xfrm>
+          <a:prstGeom prst="rect">
+            <a:avLst/>
+          </a:prstGeom>
+        </p:spPr>
+        <p:txBody>
+          <a:bodyPr lIns="0" tIns="0" rIns="0" bIns="0" rtlCol="0" anchor="t">
+            <a:spAutoFit/>
+          </a:bodyPr>
+          <a:lstStyle/>
+          <a:p>
+            <a:pPr algn="l">
+              <a:lnSpc>
+                <a:spcPts val="2310"/>
+              </a:lnSpc>
+            </a:pPr>
+            <a:r>
+              <a:rPr lang="en-US" sz="1650" b="1" spc="198" dirty="0">
+                <a:solidFill>
+                  <a:srgbClr val="18A999"/>
+                </a:solidFill>
+                <a:latin typeface="DM Sans Bold"/>
+                <a:ea typeface="DM Sans Bold"/>
+                <a:cs typeface="DM Sans Bold"/>
+                <a:sym typeface="DM Sans Bold"/>
+              </a:rPr>
+              <a:t>MODUL INFORMASI DIGITAL  •  13</a:t>
+            </a:r>
+          </a:p>
+        </p:txBody>
+      </p:sp>
+      <p:sp>
+        <p:nvSpPr>
+          <p:cNvPr id="3" name="TextBox 3">
+            <a:extLst>
+              <a:ext uri="{FF2B5EF4-FFF2-40B4-BE49-F238E27FC236}">
+                <a16:creationId xmlns:a16="http://schemas.microsoft.com/office/drawing/2014/main" id="{913D64F0-2AC9-97F1-1152-219F623520CA}"/>
+              </a:ext>
+            </a:extLst>
+          </p:cNvPr>
+          <p:cNvSpPr txBox="1"/>
+          <p:nvPr/>
+        </p:nvSpPr>
+        <p:spPr>
+          <a:xfrm>
+            <a:off x="952500" y="1028700"/>
+            <a:ext cx="14287500" cy="672465"/>
+          </a:xfrm>
+          <a:prstGeom prst="rect">
+            <a:avLst/>
+          </a:prstGeom>
+        </p:spPr>
+        <p:txBody>
+          <a:bodyPr lIns="0" tIns="0" rIns="0" bIns="0" rtlCol="0" anchor="t">
+            <a:spAutoFit/>
+          </a:bodyPr>
+          <a:lstStyle/>
+          <a:p>
+            <a:pPr algn="l">
+              <a:lnSpc>
+                <a:spcPts val="5040"/>
+              </a:lnSpc>
+            </a:pPr>
+            <a:r>
+              <a:rPr lang="en-US" sz="4800" b="1" dirty="0" err="1">
+                <a:solidFill>
+                  <a:srgbClr val="12233F"/>
+                </a:solidFill>
+                <a:latin typeface="Bricolage Grotesque Bold"/>
+                <a:ea typeface="Bricolage Grotesque Bold"/>
+                <a:cs typeface="Bricolage Grotesque Bold"/>
+                <a:sym typeface="Bricolage Grotesque Bold"/>
+              </a:rPr>
+              <a:t>Mengenali</a:t>
+            </a:r>
+            <a:r>
+              <a:rPr lang="en-US" sz="4800" b="1" dirty="0">
+                <a:solidFill>
+                  <a:srgbClr val="12233F"/>
+                </a:solidFill>
+                <a:latin typeface="Bricolage Grotesque Bold"/>
+                <a:ea typeface="Bricolage Grotesque Bold"/>
+                <a:cs typeface="Bricolage Grotesque Bold"/>
+                <a:sym typeface="Bricolage Grotesque Bold"/>
+              </a:rPr>
+              <a:t> </a:t>
+            </a:r>
+            <a:r>
+              <a:rPr lang="en-US" sz="4800" b="1" dirty="0" err="1">
+                <a:solidFill>
+                  <a:srgbClr val="12233F"/>
+                </a:solidFill>
+                <a:latin typeface="Bricolage Grotesque Bold"/>
+                <a:ea typeface="Bricolage Grotesque Bold"/>
+                <a:cs typeface="Bricolage Grotesque Bold"/>
+                <a:sym typeface="Bricolage Grotesque Bold"/>
+              </a:rPr>
+              <a:t>informasi</a:t>
+            </a:r>
+            <a:r>
+              <a:rPr lang="en-US" sz="4800" b="1" dirty="0">
+                <a:solidFill>
+                  <a:srgbClr val="12233F"/>
+                </a:solidFill>
+                <a:latin typeface="Bricolage Grotesque Bold"/>
+                <a:ea typeface="Bricolage Grotesque Bold"/>
+                <a:cs typeface="Bricolage Grotesque Bold"/>
+                <a:sym typeface="Bricolage Grotesque Bold"/>
+              </a:rPr>
+              <a:t> salah</a:t>
+            </a:r>
+          </a:p>
+        </p:txBody>
+      </p:sp>
+      <p:sp>
+        <p:nvSpPr>
+          <p:cNvPr id="4" name="AutoShape 4">
+            <a:extLst>
+              <a:ext uri="{FF2B5EF4-FFF2-40B4-BE49-F238E27FC236}">
+                <a16:creationId xmlns:a16="http://schemas.microsoft.com/office/drawing/2014/main" id="{0AB2E064-95D1-87A0-7611-9250C534637C}"/>
+              </a:ext>
+            </a:extLst>
+          </p:cNvPr>
+          <p:cNvSpPr/>
+          <p:nvPr/>
+        </p:nvSpPr>
+        <p:spPr>
+          <a:xfrm>
+            <a:off x="952500" y="1962150"/>
+            <a:ext cx="16383000" cy="0"/>
+          </a:xfrm>
+          <a:prstGeom prst="line">
+            <a:avLst/>
+          </a:prstGeom>
+          <a:ln w="19050" cap="flat">
+            <a:solidFill>
+              <a:srgbClr val="D9D1C4"/>
+            </a:solidFill>
+            <a:prstDash val="solid"/>
+            <a:headEnd type="none" w="sm" len="sm"/>
+            <a:tailEnd type="none" w="sm" len="sm"/>
+          </a:ln>
+        </p:spPr>
+        <p:txBody>
+          <a:bodyPr/>
+          <a:lstStyle/>
+          <a:p>
+            <a:endParaRPr lang="en-US"/>
+          </a:p>
+        </p:txBody>
+      </p:sp>
       <p:grpSp>
         <p:nvGrpSpPr>
-          <p:cNvPr id="5" name="Group 5"/>
+          <p:cNvPr id="5" name="Group 5">
+            <a:extLst>
+              <a:ext uri="{FF2B5EF4-FFF2-40B4-BE49-F238E27FC236}">
+                <a16:creationId xmlns:a16="http://schemas.microsoft.com/office/drawing/2014/main" id="{9F00B741-5ADA-8EFA-ED2D-464F769B6423}"/>
+              </a:ext>
+            </a:extLst>
+          </p:cNvPr>
           <p:cNvGrpSpPr/>
           <p:nvPr/>
         </p:nvGrpSpPr>
@@ -8093,7 +9653,13 @@
         </p:grpSpPr>
         <p:sp>
           <p:nvSpPr>
-            <p:cNvPr id="6" name="Freeform 6"/>
+            <p:cNvPr id="6" name="Freeform 6">
+              <a:extLst>
+                <a:ext uri="{FF2B5EF4-FFF2-40B4-BE49-F238E27FC236}">
+                  <a16:creationId xmlns:a16="http://schemas.microsoft.com/office/drawing/2014/main" id="{56E84B07-20A1-79A3-4A17-FD941296A33D}"/>
+                </a:ext>
+              </a:extLst>
+            </p:cNvPr>
             <p:cNvSpPr/>
             <p:nvPr/>
           </p:nvSpPr>
@@ -8145,7 +9711,13 @@
         </p:sp>
         <p:sp>
           <p:nvSpPr>
-            <p:cNvPr id="7" name="TextBox 7"/>
+            <p:cNvPr id="7" name="TextBox 7">
+              <a:extLst>
+                <a:ext uri="{FF2B5EF4-FFF2-40B4-BE49-F238E27FC236}">
+                  <a16:creationId xmlns:a16="http://schemas.microsoft.com/office/drawing/2014/main" id="{3A01FF22-3EE8-C50D-0E2A-7F2BC2BF4B46}"/>
+                </a:ext>
+              </a:extLst>
+            </p:cNvPr>
             <p:cNvSpPr txBox="1"/>
             <p:nvPr/>
           </p:nvSpPr>
@@ -8174,7 +9746,13 @@
       </p:grpSp>
       <p:grpSp>
         <p:nvGrpSpPr>
-          <p:cNvPr id="8" name="Group 8"/>
+          <p:cNvPr id="8" name="Group 8">
+            <a:extLst>
+              <a:ext uri="{FF2B5EF4-FFF2-40B4-BE49-F238E27FC236}">
+                <a16:creationId xmlns:a16="http://schemas.microsoft.com/office/drawing/2014/main" id="{7A7055E4-975A-3F62-7FA5-6D9E5BBBAFEB}"/>
+              </a:ext>
+            </a:extLst>
+          </p:cNvPr>
           <p:cNvGrpSpPr/>
           <p:nvPr/>
         </p:nvGrpSpPr>
@@ -8188,7 +9766,13 @@
         </p:grpSpPr>
         <p:sp>
           <p:nvSpPr>
-            <p:cNvPr id="9" name="Freeform 9"/>
+            <p:cNvPr id="9" name="Freeform 9">
+              <a:extLst>
+                <a:ext uri="{FF2B5EF4-FFF2-40B4-BE49-F238E27FC236}">
+                  <a16:creationId xmlns:a16="http://schemas.microsoft.com/office/drawing/2014/main" id="{EE1D8CB2-7E53-7DF9-4C70-864B4E9A6BB3}"/>
+                </a:ext>
+              </a:extLst>
+            </p:cNvPr>
             <p:cNvSpPr/>
             <p:nvPr/>
           </p:nvSpPr>
@@ -8240,7 +9824,13 @@
         </p:sp>
         <p:sp>
           <p:nvSpPr>
-            <p:cNvPr id="10" name="TextBox 10"/>
+            <p:cNvPr id="10" name="TextBox 10">
+              <a:extLst>
+                <a:ext uri="{FF2B5EF4-FFF2-40B4-BE49-F238E27FC236}">
+                  <a16:creationId xmlns:a16="http://schemas.microsoft.com/office/drawing/2014/main" id="{7CE4991D-A6C6-2E62-C843-88B118B9E0D1}"/>
+                </a:ext>
+              </a:extLst>
+            </p:cNvPr>
             <p:cNvSpPr txBox="1"/>
             <p:nvPr/>
           </p:nvSpPr>
@@ -8269,7 +9859,13 @@
       </p:grpSp>
       <p:sp>
         <p:nvSpPr>
-          <p:cNvPr id="11" name="TextBox 11"/>
+          <p:cNvPr id="11" name="TextBox 11">
+            <a:extLst>
+              <a:ext uri="{FF2B5EF4-FFF2-40B4-BE49-F238E27FC236}">
+                <a16:creationId xmlns:a16="http://schemas.microsoft.com/office/drawing/2014/main" id="{3AFCB66D-41EE-D630-1CCE-33C922E3C3FD}"/>
+              </a:ext>
+            </a:extLst>
+          </p:cNvPr>
           <p:cNvSpPr txBox="1"/>
           <p:nvPr/>
         </p:nvSpPr>
@@ -8294,7 +9890,7 @@
               </a:lnSpc>
             </a:pPr>
             <a:r>
-              <a:rPr lang="en-US" sz="3900" b="1">
+              <a:rPr lang="en-US" sz="3900" b="1" dirty="0">
                 <a:solidFill>
                   <a:srgbClr val="FFFFFF"/>
                 </a:solidFill>
@@ -8303,7 +9899,79 @@
                 <a:cs typeface="Bricolage Grotesque Bold"/>
                 <a:sym typeface="Bricolage Grotesque Bold"/>
               </a:rPr>
-              <a:t>Pada pidato Pimpinan Negara mengatakan: </a:t>
+              <a:t>Pada </a:t>
+            </a:r>
+            <a:r>
+              <a:rPr lang="en-US" sz="3900" b="1" dirty="0" err="1">
+                <a:solidFill>
+                  <a:srgbClr val="FFFFFF"/>
+                </a:solidFill>
+                <a:latin typeface="Bricolage Grotesque Bold"/>
+                <a:ea typeface="Bricolage Grotesque Bold"/>
+                <a:cs typeface="Bricolage Grotesque Bold"/>
+                <a:sym typeface="Bricolage Grotesque Bold"/>
+              </a:rPr>
+              <a:t>pidato</a:t>
+            </a:r>
+            <a:r>
+              <a:rPr lang="en-US" sz="3900" b="1" dirty="0">
+                <a:solidFill>
+                  <a:srgbClr val="FFFFFF"/>
+                </a:solidFill>
+                <a:latin typeface="Bricolage Grotesque Bold"/>
+                <a:ea typeface="Bricolage Grotesque Bold"/>
+                <a:cs typeface="Bricolage Grotesque Bold"/>
+                <a:sym typeface="Bricolage Grotesque Bold"/>
+              </a:rPr>
+              <a:t> </a:t>
+            </a:r>
+            <a:r>
+              <a:rPr lang="en-US" sz="3900" b="1" dirty="0" err="1">
+                <a:solidFill>
+                  <a:srgbClr val="FFFFFF"/>
+                </a:solidFill>
+                <a:latin typeface="Bricolage Grotesque Bold"/>
+                <a:ea typeface="Bricolage Grotesque Bold"/>
+                <a:cs typeface="Bricolage Grotesque Bold"/>
+                <a:sym typeface="Bricolage Grotesque Bold"/>
+              </a:rPr>
+              <a:t>Pimpinan</a:t>
+            </a:r>
+            <a:r>
+              <a:rPr lang="en-US" sz="3900" b="1" dirty="0">
+                <a:solidFill>
+                  <a:srgbClr val="FFFFFF"/>
+                </a:solidFill>
+                <a:latin typeface="Bricolage Grotesque Bold"/>
+                <a:ea typeface="Bricolage Grotesque Bold"/>
+                <a:cs typeface="Bricolage Grotesque Bold"/>
+                <a:sym typeface="Bricolage Grotesque Bold"/>
+              </a:rPr>
+              <a:t> Negara </a:t>
+            </a:r>
+            <a:r>
+              <a:rPr lang="en-US" sz="3900" b="1" dirty="0" err="1">
+                <a:solidFill>
+                  <a:srgbClr val="FFFFFF"/>
+                </a:solidFill>
+                <a:latin typeface="Bricolage Grotesque Bold"/>
+                <a:ea typeface="Bricolage Grotesque Bold"/>
+                <a:cs typeface="Bricolage Grotesque Bold"/>
+                <a:sym typeface="Bricolage Grotesque Bold"/>
+              </a:rPr>
+              <a:t>mengatakan</a:t>
+            </a:r>
+            <a:r>
+              <a:rPr lang="en-US" sz="3900" b="1" dirty="0">
+                <a:solidFill>
+                  <a:srgbClr val="FFFFFF"/>
+                </a:solidFill>
+                <a:latin typeface="Bricolage Grotesque Bold"/>
+                <a:ea typeface="Bricolage Grotesque Bold"/>
+                <a:cs typeface="Bricolage Grotesque Bold"/>
+                <a:sym typeface="Bricolage Grotesque Bold"/>
+              </a:rPr>
+              <a:t>: </a:t>
             </a:r>
           </a:p>
           <a:p>
@@ -8313,7 +9981,7 @@
               </a:lnSpc>
             </a:pPr>
             <a:r>
-              <a:rPr lang="en-US" sz="3900" b="1">
+              <a:rPr lang="en-US" sz="3900" b="1" dirty="0">
                 <a:solidFill>
                   <a:srgbClr val="FFFFFF"/>
                 </a:solidFill>
@@ -8322,21 +9990,369 @@
                 <a:cs typeface="Bricolage Grotesque Bold"/>
                 <a:sym typeface="Bricolage Grotesque Bold"/>
               </a:rPr>
-              <a:t>“Bu Susana mendapatkan upah Rp700.000/kg dari mengupas bawang”</a:t>
+              <a:t>“Bu Susana </a:t>
+            </a:r>
+            <a:r>
+              <a:rPr lang="en-US" sz="3900" b="1" dirty="0" err="1">
+                <a:solidFill>
+                  <a:srgbClr val="FFFFFF"/>
+                </a:solidFill>
+                <a:latin typeface="Bricolage Grotesque Bold"/>
+                <a:ea typeface="Bricolage Grotesque Bold"/>
+                <a:cs typeface="Bricolage Grotesque Bold"/>
+                <a:sym typeface="Bricolage Grotesque Bold"/>
+              </a:rPr>
+              <a:t>mendapatkan</a:t>
+            </a:r>
+            <a:r>
+              <a:rPr lang="en-US" sz="3900" b="1" dirty="0">
+                <a:solidFill>
+                  <a:srgbClr val="FFFFFF"/>
+                </a:solidFill>
+                <a:latin typeface="Bricolage Grotesque Bold"/>
+                <a:ea typeface="Bricolage Grotesque Bold"/>
+                <a:cs typeface="Bricolage Grotesque Bold"/>
+                <a:sym typeface="Bricolage Grotesque Bold"/>
+              </a:rPr>
+              <a:t> </a:t>
+            </a:r>
+            <a:r>
+              <a:rPr lang="en-US" sz="3900" b="1" dirty="0" err="1">
+                <a:solidFill>
+                  <a:srgbClr val="FFFFFF"/>
+                </a:solidFill>
+                <a:latin typeface="Bricolage Grotesque Bold"/>
+                <a:ea typeface="Bricolage Grotesque Bold"/>
+                <a:cs typeface="Bricolage Grotesque Bold"/>
+                <a:sym typeface="Bricolage Grotesque Bold"/>
+              </a:rPr>
+              <a:t>upah</a:t>
+            </a:r>
+            <a:r>
+              <a:rPr lang="en-US" sz="3900" b="1" dirty="0">
+                <a:solidFill>
+                  <a:srgbClr val="FFFFFF"/>
+                </a:solidFill>
+                <a:latin typeface="Bricolage Grotesque Bold"/>
+                <a:ea typeface="Bricolage Grotesque Bold"/>
+                <a:cs typeface="Bricolage Grotesque Bold"/>
+                <a:sym typeface="Bricolage Grotesque Bold"/>
+              </a:rPr>
+              <a:t> Rp700.000/kg </a:t>
+            </a:r>
+            <a:r>
+              <a:rPr lang="en-US" sz="3900" b="1" dirty="0" err="1">
+                <a:solidFill>
+                  <a:srgbClr val="FFFFFF"/>
+                </a:solidFill>
+                <a:latin typeface="Bricolage Grotesque Bold"/>
+                <a:ea typeface="Bricolage Grotesque Bold"/>
+                <a:cs typeface="Bricolage Grotesque Bold"/>
+                <a:sym typeface="Bricolage Grotesque Bold"/>
+              </a:rPr>
+              <a:t>dari</a:t>
+            </a:r>
+            <a:r>
+              <a:rPr lang="en-US" sz="3900" b="1" dirty="0">
+                <a:solidFill>
+                  <a:srgbClr val="FFFFFF"/>
+                </a:solidFill>
+                <a:latin typeface="Bricolage Grotesque Bold"/>
+                <a:ea typeface="Bricolage Grotesque Bold"/>
+                <a:cs typeface="Bricolage Grotesque Bold"/>
+                <a:sym typeface="Bricolage Grotesque Bold"/>
+              </a:rPr>
+              <a:t> </a:t>
+            </a:r>
+            <a:r>
+              <a:rPr lang="en-US" sz="3900" b="1" dirty="0" err="1">
+                <a:solidFill>
+                  <a:srgbClr val="FFFFFF"/>
+                </a:solidFill>
+                <a:latin typeface="Bricolage Grotesque Bold"/>
+                <a:ea typeface="Bricolage Grotesque Bold"/>
+                <a:cs typeface="Bricolage Grotesque Bold"/>
+                <a:sym typeface="Bricolage Grotesque Bold"/>
+              </a:rPr>
+              <a:t>mengupas</a:t>
+            </a:r>
+            <a:r>
+              <a:rPr lang="en-US" sz="3900" b="1" dirty="0">
+                <a:solidFill>
+                  <a:srgbClr val="FFFFFF"/>
+                </a:solidFill>
+                <a:latin typeface="Bricolage Grotesque Bold"/>
+                <a:ea typeface="Bricolage Grotesque Bold"/>
+                <a:cs typeface="Bricolage Grotesque Bold"/>
+                <a:sym typeface="Bricolage Grotesque Bold"/>
+              </a:rPr>
+              <a:t> </a:t>
+            </a:r>
+            <a:r>
+              <a:rPr lang="en-US" sz="3900" b="1" dirty="0" err="1">
+                <a:solidFill>
+                  <a:srgbClr val="FFFFFF"/>
+                </a:solidFill>
+                <a:latin typeface="Bricolage Grotesque Bold"/>
+                <a:ea typeface="Bricolage Grotesque Bold"/>
+                <a:cs typeface="Bricolage Grotesque Bold"/>
+                <a:sym typeface="Bricolage Grotesque Bold"/>
+              </a:rPr>
+              <a:t>bawang</a:t>
+            </a:r>
+            <a:r>
+              <a:rPr lang="en-US" sz="3900" b="1" dirty="0">
+                <a:solidFill>
+                  <a:srgbClr val="FFFFFF"/>
+                </a:solidFill>
+                <a:latin typeface="Bricolage Grotesque Bold"/>
+                <a:ea typeface="Bricolage Grotesque Bold"/>
+                <a:cs typeface="Bricolage Grotesque Bold"/>
+                <a:sym typeface="Bricolage Grotesque Bold"/>
+              </a:rPr>
+              <a:t>”</a:t>
             </a:r>
           </a:p>
         </p:txBody>
       </p:sp>
       <p:sp>
         <p:nvSpPr>
-          <p:cNvPr id="12" name="TextBox 12"/>
+          <p:cNvPr id="12" name="TextBox 12">
+            <a:extLst>
+              <a:ext uri="{FF2B5EF4-FFF2-40B4-BE49-F238E27FC236}">
+                <a16:creationId xmlns:a16="http://schemas.microsoft.com/office/drawing/2014/main" id="{AF018E0D-53E9-70D2-3279-4C11A94F598B}"/>
+              </a:ext>
+            </a:extLst>
+          </p:cNvPr>
           <p:cNvSpPr txBox="1"/>
           <p:nvPr/>
         </p:nvSpPr>
         <p:spPr>
           <a:xfrm>
             <a:off x="1143000" y="5429250"/>
-            <a:ext cx="8572500" cy="754380"/>
+            <a:ext cx="9829800" cy="750783"/>
+          </a:xfrm>
+          <a:prstGeom prst="rect">
+            <a:avLst/>
+          </a:prstGeom>
+        </p:spPr>
+        <p:txBody>
+          <a:bodyPr wrap="square" lIns="0" tIns="0" rIns="0" bIns="0" rtlCol="0" anchor="t">
+            <a:spAutoFit/>
+          </a:bodyPr>
+          <a:lstStyle/>
+          <a:p>
+            <a:pPr algn="l">
+              <a:lnSpc>
+                <a:spcPts val="3044"/>
+              </a:lnSpc>
+            </a:pPr>
+            <a:r>
+              <a:rPr lang="en-US" sz="2174" dirty="0">
+                <a:solidFill>
+                  <a:srgbClr val="000000"/>
+                </a:solidFill>
+                <a:latin typeface="Archivo Black"/>
+                <a:ea typeface="Archivo Black"/>
+                <a:cs typeface="Archivo Black"/>
+                <a:sym typeface="Archivo Black"/>
+              </a:rPr>
+              <a:t>JUDUL MENGEJUTKAN ≠ HOAKS (</a:t>
+            </a:r>
+            <a:r>
+              <a:rPr lang="en-US" sz="2174" dirty="0" err="1">
+                <a:solidFill>
+                  <a:srgbClr val="000000"/>
+                </a:solidFill>
+                <a:latin typeface="Archivo Black"/>
+                <a:ea typeface="Archivo Black"/>
+                <a:cs typeface="Archivo Black"/>
+                <a:sym typeface="Archivo Black"/>
+              </a:rPr>
+              <a:t>Ucapan</a:t>
+            </a:r>
+            <a:r>
+              <a:rPr lang="en-US" sz="2174" dirty="0">
+                <a:solidFill>
+                  <a:srgbClr val="000000"/>
+                </a:solidFill>
+                <a:latin typeface="Archivo Black"/>
+                <a:ea typeface="Archivo Black"/>
+                <a:cs typeface="Archivo Black"/>
+                <a:sym typeface="Archivo Black"/>
+              </a:rPr>
+              <a:t> </a:t>
+            </a:r>
+            <a:r>
+              <a:rPr lang="en-US" sz="2174" dirty="0" err="1">
+                <a:solidFill>
+                  <a:srgbClr val="000000"/>
+                </a:solidFill>
+                <a:latin typeface="Archivo Black"/>
+                <a:ea typeface="Archivo Black"/>
+                <a:cs typeface="Archivo Black"/>
+                <a:sym typeface="Archivo Black"/>
+              </a:rPr>
+              <a:t>Keliru</a:t>
+            </a:r>
+            <a:r>
+              <a:rPr lang="en-US" sz="2174" dirty="0">
+                <a:solidFill>
+                  <a:srgbClr val="000000"/>
+                </a:solidFill>
+                <a:latin typeface="Archivo Black"/>
+                <a:ea typeface="Archivo Black"/>
+                <a:cs typeface="Archivo Black"/>
+                <a:sym typeface="Archivo Black"/>
+              </a:rPr>
+              <a:t>/</a:t>
+            </a:r>
+            <a:r>
+              <a:rPr lang="en-US" sz="2174" dirty="0" err="1">
+                <a:solidFill>
+                  <a:srgbClr val="000000"/>
+                </a:solidFill>
+                <a:latin typeface="Archivo Black"/>
+                <a:ea typeface="Archivo Black"/>
+                <a:cs typeface="Archivo Black"/>
+                <a:sym typeface="Archivo Black"/>
+              </a:rPr>
+              <a:t>Misinformasi</a:t>
+            </a:r>
+            <a:r>
+              <a:rPr lang="en-US" sz="2174" dirty="0">
+                <a:solidFill>
+                  <a:srgbClr val="000000"/>
+                </a:solidFill>
+                <a:latin typeface="Archivo Black"/>
+                <a:ea typeface="Archivo Black"/>
+                <a:cs typeface="Archivo Black"/>
+                <a:sym typeface="Archivo Black"/>
+              </a:rPr>
+              <a:t>)</a:t>
+            </a:r>
+          </a:p>
+          <a:p>
+            <a:pPr algn="l">
+              <a:lnSpc>
+                <a:spcPts val="3044"/>
+              </a:lnSpc>
+            </a:pPr>
+            <a:r>
+              <a:rPr lang="en-US" sz="2174" dirty="0" err="1">
+                <a:solidFill>
+                  <a:srgbClr val="000000"/>
+                </a:solidFill>
+                <a:latin typeface="Archivo Black"/>
+                <a:ea typeface="Archivo Black"/>
+                <a:cs typeface="Archivo Black"/>
+                <a:sym typeface="Archivo Black"/>
+              </a:rPr>
+              <a:t>Kekeliruan</a:t>
+            </a:r>
+            <a:r>
+              <a:rPr lang="en-US" sz="2174" dirty="0">
+                <a:solidFill>
+                  <a:srgbClr val="000000"/>
+                </a:solidFill>
+                <a:latin typeface="Archivo Black"/>
+                <a:ea typeface="Archivo Black"/>
+                <a:cs typeface="Archivo Black"/>
+                <a:sym typeface="Archivo Black"/>
+              </a:rPr>
+              <a:t> </a:t>
+            </a:r>
+            <a:r>
+              <a:rPr lang="en-US" sz="2174" dirty="0" err="1">
+                <a:solidFill>
+                  <a:srgbClr val="000000"/>
+                </a:solidFill>
+                <a:latin typeface="Archivo Black"/>
+                <a:ea typeface="Archivo Black"/>
+                <a:cs typeface="Archivo Black"/>
+                <a:sym typeface="Archivo Black"/>
+              </a:rPr>
+              <a:t>tanpa</a:t>
+            </a:r>
+            <a:r>
+              <a:rPr lang="en-US" sz="2174" dirty="0">
+                <a:solidFill>
+                  <a:srgbClr val="000000"/>
+                </a:solidFill>
+                <a:latin typeface="Archivo Black"/>
+                <a:ea typeface="Archivo Black"/>
+                <a:cs typeface="Archivo Black"/>
+                <a:sym typeface="Archivo Black"/>
+              </a:rPr>
+              <a:t> </a:t>
+            </a:r>
+            <a:r>
+              <a:rPr lang="en-US" sz="2174" dirty="0" err="1">
+                <a:solidFill>
+                  <a:srgbClr val="000000"/>
+                </a:solidFill>
+                <a:latin typeface="Archivo Black"/>
+                <a:ea typeface="Archivo Black"/>
+                <a:cs typeface="Archivo Black"/>
+                <a:sym typeface="Archivo Black"/>
+              </a:rPr>
+              <a:t>adanya</a:t>
+            </a:r>
+            <a:r>
+              <a:rPr lang="en-US" sz="2174" dirty="0">
+                <a:solidFill>
+                  <a:srgbClr val="000000"/>
+                </a:solidFill>
+                <a:latin typeface="Archivo Black"/>
+                <a:ea typeface="Archivo Black"/>
+                <a:cs typeface="Archivo Black"/>
+                <a:sym typeface="Archivo Black"/>
+              </a:rPr>
+              <a:t> </a:t>
+            </a:r>
+            <a:r>
+              <a:rPr lang="en-US" sz="2174" dirty="0" err="1">
+                <a:solidFill>
+                  <a:srgbClr val="000000"/>
+                </a:solidFill>
+                <a:latin typeface="Archivo Black"/>
+                <a:ea typeface="Archivo Black"/>
+                <a:cs typeface="Archivo Black"/>
+                <a:sym typeface="Archivo Black"/>
+              </a:rPr>
+              <a:t>klarifikasi</a:t>
+            </a:r>
+            <a:r>
+              <a:rPr lang="en-US" sz="2174" dirty="0">
+                <a:solidFill>
+                  <a:srgbClr val="000000"/>
+                </a:solidFill>
+                <a:latin typeface="Archivo Black"/>
+                <a:ea typeface="Archivo Black"/>
+                <a:cs typeface="Archivo Black"/>
+                <a:sym typeface="Archivo Black"/>
+              </a:rPr>
+              <a:t> = DISINFORMASI</a:t>
+            </a:r>
+          </a:p>
+        </p:txBody>
+      </p:sp>
+      <p:sp>
+        <p:nvSpPr>
+          <p:cNvPr id="13" name="TextBox 13">
+            <a:extLst>
+              <a:ext uri="{FF2B5EF4-FFF2-40B4-BE49-F238E27FC236}">
+                <a16:creationId xmlns:a16="http://schemas.microsoft.com/office/drawing/2014/main" id="{C219FD5B-546A-D912-3662-4C2AEB507BD4}"/>
+              </a:ext>
+            </a:extLst>
+          </p:cNvPr>
+          <p:cNvSpPr txBox="1"/>
+          <p:nvPr/>
+        </p:nvSpPr>
+        <p:spPr>
+          <a:xfrm>
+            <a:off x="12382500" y="2933700"/>
+            <a:ext cx="4286250" cy="1914525"/>
           </a:xfrm>
           <a:prstGeom prst="rect">
             <a:avLst/>
@@ -8350,53 +10366,97 @@
           <a:p>
             <a:pPr algn="l">
               <a:lnSpc>
-                <a:spcPts val="3044"/>
+                <a:spcPts val="3825"/>
               </a:lnSpc>
             </a:pPr>
             <a:r>
-              <a:rPr lang="en-US" sz="2174">
-                <a:solidFill>
-                  <a:srgbClr val="000000"/>
-                </a:solidFill>
-                <a:latin typeface="Archivo Black"/>
-                <a:ea typeface="Archivo Black"/>
-                <a:cs typeface="Archivo Black"/>
-                <a:sym typeface="Archivo Black"/>
-              </a:rPr>
-              <a:t>JUDUL MENGEJUTKAN ≠ HOAKS (Ucapan Keliru)</a:t>
+              <a:rPr lang="en-US" sz="2250" b="1">
+                <a:solidFill>
+                  <a:srgbClr val="12233F"/>
+                </a:solidFill>
+                <a:latin typeface="DM Sans Bold"/>
+                <a:ea typeface="DM Sans Bold"/>
+                <a:cs typeface="DM Sans Bold"/>
+                <a:sym typeface="DM Sans Bold"/>
+              </a:rPr>
+              <a:t>1  Cek sumber</a:t>
             </a:r>
           </a:p>
           <a:p>
             <a:pPr algn="l">
               <a:lnSpc>
-                <a:spcPts val="3044"/>
+                <a:spcPts val="3825"/>
               </a:lnSpc>
             </a:pPr>
             <a:r>
-              <a:rPr lang="en-US" sz="2174">
-                <a:solidFill>
-                  <a:srgbClr val="000000"/>
-                </a:solidFill>
-                <a:latin typeface="Archivo Black"/>
-                <a:ea typeface="Archivo Black"/>
-                <a:cs typeface="Archivo Black"/>
-                <a:sym typeface="Archivo Black"/>
-              </a:rPr>
-              <a:t>Kekeliruan tanpa adanya klarifikasi = HOAKS</a:t>
+              <a:rPr lang="en-US" sz="2250" b="1">
+                <a:solidFill>
+                  <a:srgbClr val="12233F"/>
+                </a:solidFill>
+                <a:latin typeface="DM Sans Bold"/>
+                <a:ea typeface="DM Sans Bold"/>
+                <a:cs typeface="DM Sans Bold"/>
+                <a:sym typeface="DM Sans Bold"/>
+              </a:rPr>
+              <a:t>2  Cek tanggal</a:t>
+            </a:r>
+          </a:p>
+          <a:p>
+            <a:pPr algn="l">
+              <a:lnSpc>
+                <a:spcPts val="3825"/>
+              </a:lnSpc>
+            </a:pPr>
+            <a:r>
+              <a:rPr lang="en-US" sz="2250" b="1">
+                <a:solidFill>
+                  <a:srgbClr val="12233F"/>
+                </a:solidFill>
+                <a:latin typeface="DM Sans Bold"/>
+                <a:ea typeface="DM Sans Bold"/>
+                <a:cs typeface="DM Sans Bold"/>
+                <a:sym typeface="DM Sans Bold"/>
+              </a:rPr>
+              <a:t>3  Cari media pembanding</a:t>
+            </a:r>
+          </a:p>
+          <a:p>
+            <a:pPr algn="l">
+              <a:lnSpc>
+                <a:spcPts val="3825"/>
+              </a:lnSpc>
+            </a:pPr>
+            <a:r>
+              <a:rPr lang="en-US" sz="2250" b="1">
+                <a:solidFill>
+                  <a:srgbClr val="12233F"/>
+                </a:solidFill>
+                <a:latin typeface="DM Sans Bold"/>
+                <a:ea typeface="DM Sans Bold"/>
+                <a:cs typeface="DM Sans Bold"/>
+                <a:sym typeface="DM Sans Bold"/>
+              </a:rPr>
+              <a:t>4  Periksa bukti</a:t>
             </a:r>
           </a:p>
         </p:txBody>
       </p:sp>
       <p:sp>
         <p:nvSpPr>
-          <p:cNvPr id="13" name="TextBox 13"/>
+          <p:cNvPr id="14" name="TextBox 14">
+            <a:extLst>
+              <a:ext uri="{FF2B5EF4-FFF2-40B4-BE49-F238E27FC236}">
+                <a16:creationId xmlns:a16="http://schemas.microsoft.com/office/drawing/2014/main" id="{B1071333-6A4A-8C90-0882-0BC4085AE36F}"/>
+              </a:ext>
+            </a:extLst>
+          </p:cNvPr>
           <p:cNvSpPr txBox="1"/>
           <p:nvPr/>
         </p:nvSpPr>
         <p:spPr>
           <a:xfrm>
-            <a:off x="12382500" y="2933700"/>
-            <a:ext cx="4286250" cy="1914525"/>
+            <a:off x="1143000" y="8372475"/>
+            <a:ext cx="15240000" cy="350520"/>
           </a:xfrm>
           <a:prstGeom prst="rect">
             <a:avLst/>
@@ -8408,93 +10468,42 @@
           </a:bodyPr>
           <a:lstStyle/>
           <a:p>
-            <a:pPr algn="l">
+            <a:pPr algn="ctr">
               <a:lnSpc>
-                <a:spcPts val="3825"/>
+                <a:spcPts val="2835"/>
               </a:lnSpc>
             </a:pPr>
             <a:r>
-              <a:rPr lang="en-US" sz="2250" b="1">
+              <a:rPr lang="en-US" sz="2100">
                 <a:solidFill>
                   <a:srgbClr val="12233F"/>
                 </a:solidFill>
-                <a:latin typeface="DM Sans Bold"/>
-                <a:ea typeface="DM Sans Bold"/>
-                <a:cs typeface="DM Sans Bold"/>
-                <a:sym typeface="DM Sans Bold"/>
-              </a:rPr>
-              <a:t>1  Cek sumber</a:t>
-            </a:r>
-          </a:p>
-          <a:p>
-            <a:pPr algn="l">
-              <a:lnSpc>
-                <a:spcPts val="3825"/>
-              </a:lnSpc>
-            </a:pPr>
-            <a:r>
-              <a:rPr lang="en-US" sz="2250" b="1">
-                <a:solidFill>
-                  <a:srgbClr val="12233F"/>
-                </a:solidFill>
-                <a:latin typeface="DM Sans Bold"/>
-                <a:ea typeface="DM Sans Bold"/>
-                <a:cs typeface="DM Sans Bold"/>
-                <a:sym typeface="DM Sans Bold"/>
-              </a:rPr>
-              <a:t>2  Cek tanggal</a:t>
-            </a:r>
-          </a:p>
-          <a:p>
-            <a:pPr algn="l">
-              <a:lnSpc>
-                <a:spcPts val="3825"/>
-              </a:lnSpc>
-            </a:pPr>
-            <a:r>
-              <a:rPr lang="en-US" sz="2250" b="1">
-                <a:solidFill>
-                  <a:srgbClr val="12233F"/>
-                </a:solidFill>
-                <a:latin typeface="DM Sans Bold"/>
-                <a:ea typeface="DM Sans Bold"/>
-                <a:cs typeface="DM Sans Bold"/>
-                <a:sym typeface="DM Sans Bold"/>
-              </a:rPr>
-              <a:t>3  Cari media pembanding</a:t>
-            </a:r>
-          </a:p>
-          <a:p>
-            <a:pPr algn="l">
-              <a:lnSpc>
-                <a:spcPts val="3825"/>
-              </a:lnSpc>
-            </a:pPr>
-            <a:r>
-              <a:rPr lang="en-US" sz="2250" b="1">
-                <a:solidFill>
-                  <a:srgbClr val="12233F"/>
-                </a:solidFill>
-                <a:latin typeface="DM Sans Bold"/>
-                <a:ea typeface="DM Sans Bold"/>
-                <a:cs typeface="DM Sans Bold"/>
-                <a:sym typeface="DM Sans Bold"/>
-              </a:rPr>
-              <a:t>4  Periksa bukti</a:t>
+                <a:latin typeface="DM Sans"/>
+                <a:ea typeface="DM Sans"/>
+                <a:cs typeface="DM Sans"/>
+                <a:sym typeface="DM Sans"/>
+              </a:rPr>
+              <a:t>Hubungkan dengan Ekosistem Periksa Fakta di buku Informatika.</a:t>
             </a:r>
           </a:p>
         </p:txBody>
       </p:sp>
       <p:sp>
         <p:nvSpPr>
-          <p:cNvPr id="14" name="TextBox 14"/>
+          <p:cNvPr id="15" name="TextBox 15">
+            <a:extLst>
+              <a:ext uri="{FF2B5EF4-FFF2-40B4-BE49-F238E27FC236}">
+                <a16:creationId xmlns:a16="http://schemas.microsoft.com/office/drawing/2014/main" id="{469E5E59-66C0-19CE-8B5C-23FC42C313A5}"/>
+              </a:ext>
+            </a:extLst>
+          </p:cNvPr>
           <p:cNvSpPr txBox="1"/>
           <p:nvPr/>
         </p:nvSpPr>
         <p:spPr>
           <a:xfrm>
-            <a:off x="1143000" y="8372475"/>
-            <a:ext cx="15240000" cy="350520"/>
+            <a:off x="952500" y="9772650"/>
+            <a:ext cx="9525000" cy="222885"/>
           </a:xfrm>
           <a:prstGeom prst="rect">
             <a:avLst/>
@@ -8506,36 +10515,42 @@
           </a:bodyPr>
           <a:lstStyle/>
           <a:p>
-            <a:pPr algn="ctr">
+            <a:pPr algn="l">
               <a:lnSpc>
-                <a:spcPts val="2835"/>
+                <a:spcPts val="1889"/>
               </a:lnSpc>
             </a:pPr>
             <a:r>
-              <a:rPr lang="en-US" sz="2100">
-                <a:solidFill>
-                  <a:srgbClr val="12233F"/>
-                </a:solidFill>
-                <a:latin typeface="DM Sans"/>
-                <a:ea typeface="DM Sans"/>
-                <a:cs typeface="DM Sans"/>
-                <a:sym typeface="DM Sans"/>
-              </a:rPr>
-              <a:t>Hubungkan dengan Ekosistem Periksa Fakta di buku Informatika.</a:t>
+              <a:rPr lang="en-US" sz="1350" b="1" spc="108">
+                <a:solidFill>
+                  <a:srgbClr val="5D6B7E"/>
+                </a:solidFill>
+                <a:latin typeface="DM Sans Bold"/>
+                <a:ea typeface="DM Sans Bold"/>
+                <a:cs typeface="DM Sans Bold"/>
+                <a:sym typeface="DM Sans Bold"/>
+              </a:rPr>
+              <a:t>BERPIKIR KRITIS  •  VERIFIKASI  •  BERTANGGUNG JAWAB</a:t>
             </a:r>
           </a:p>
         </p:txBody>
       </p:sp>
       <p:sp>
         <p:nvSpPr>
-          <p:cNvPr id="15" name="TextBox 15"/>
+          <p:cNvPr id="16" name="TextBox 16">
+            <a:extLst>
+              <a:ext uri="{FF2B5EF4-FFF2-40B4-BE49-F238E27FC236}">
+                <a16:creationId xmlns:a16="http://schemas.microsoft.com/office/drawing/2014/main" id="{72293BFD-5F7A-657B-4B9F-4D06076095E6}"/>
+              </a:ext>
+            </a:extLst>
+          </p:cNvPr>
           <p:cNvSpPr txBox="1"/>
           <p:nvPr/>
         </p:nvSpPr>
         <p:spPr>
           <a:xfrm>
-            <a:off x="952500" y="9772650"/>
-            <a:ext cx="9525000" cy="222885"/>
+            <a:off x="16383000" y="9753600"/>
+            <a:ext cx="952500" cy="266700"/>
           </a:xfrm>
           <a:prstGeom prst="rect">
             <a:avLst/>
@@ -8547,36 +10562,42 @@
           </a:bodyPr>
           <a:lstStyle/>
           <a:p>
-            <a:pPr algn="l">
+            <a:pPr algn="r">
               <a:lnSpc>
-                <a:spcPts val="1889"/>
+                <a:spcPts val="2100"/>
               </a:lnSpc>
             </a:pPr>
             <a:r>
-              <a:rPr lang="en-US" sz="1350" b="1" spc="108">
-                <a:solidFill>
-                  <a:srgbClr val="5D6B7E"/>
-                </a:solidFill>
-                <a:latin typeface="DM Sans Bold"/>
-                <a:ea typeface="DM Sans Bold"/>
-                <a:cs typeface="DM Sans Bold"/>
-                <a:sym typeface="DM Sans Bold"/>
-              </a:rPr>
-              <a:t>BERPIKIR KRITIS  •  VERIFIKASI  •  BERTANGGUNG JAWAB</a:t>
+              <a:rPr lang="en-US" sz="1500">
+                <a:solidFill>
+                  <a:srgbClr val="12233F"/>
+                </a:solidFill>
+                <a:latin typeface="Archivo Black"/>
+                <a:ea typeface="Archivo Black"/>
+                <a:cs typeface="Archivo Black"/>
+                <a:sym typeface="Archivo Black"/>
+              </a:rPr>
+              <a:t>13</a:t>
             </a:r>
           </a:p>
         </p:txBody>
       </p:sp>
       <p:sp>
         <p:nvSpPr>
-          <p:cNvPr id="16" name="TextBox 16"/>
+          <p:cNvPr id="17" name="TextBox 17">
+            <a:extLst>
+              <a:ext uri="{FF2B5EF4-FFF2-40B4-BE49-F238E27FC236}">
+                <a16:creationId xmlns:a16="http://schemas.microsoft.com/office/drawing/2014/main" id="{4BD7F76E-76DC-8697-16AA-F5100A607535}"/>
+              </a:ext>
+            </a:extLst>
+          </p:cNvPr>
           <p:cNvSpPr txBox="1"/>
           <p:nvPr/>
         </p:nvSpPr>
         <p:spPr>
           <a:xfrm>
-            <a:off x="16383000" y="9753600"/>
-            <a:ext cx="952500" cy="266700"/>
+            <a:off x="1028700" y="6838950"/>
+            <a:ext cx="10591800" cy="1243965"/>
           </a:xfrm>
           <a:prstGeom prst="rect">
             <a:avLst/>
@@ -8588,47 +10609,6 @@
           </a:bodyPr>
           <a:lstStyle/>
           <a:p>
-            <a:pPr algn="r">
-              <a:lnSpc>
-                <a:spcPts val="2100"/>
-              </a:lnSpc>
-            </a:pPr>
-            <a:r>
-              <a:rPr lang="en-US" sz="1500">
-                <a:solidFill>
-                  <a:srgbClr val="12233F"/>
-                </a:solidFill>
-                <a:latin typeface="Archivo Black"/>
-                <a:ea typeface="Archivo Black"/>
-                <a:cs typeface="Archivo Black"/>
-                <a:sym typeface="Archivo Black"/>
-              </a:rPr>
-              <a:t>13</a:t>
-            </a:r>
-          </a:p>
-        </p:txBody>
-      </p:sp>
-      <p:sp>
-        <p:nvSpPr>
-          <p:cNvPr id="17" name="TextBox 17"/>
-          <p:cNvSpPr txBox="1"/>
-          <p:nvPr/>
-        </p:nvSpPr>
-        <p:spPr>
-          <a:xfrm>
-            <a:off x="1028700" y="6838950"/>
-            <a:ext cx="10591800" cy="1243965"/>
-          </a:xfrm>
-          <a:prstGeom prst="rect">
-            <a:avLst/>
-          </a:prstGeom>
-        </p:spPr>
-        <p:txBody>
-          <a:bodyPr lIns="0" tIns="0" rIns="0" bIns="0" rtlCol="0" anchor="t">
-            <a:spAutoFit/>
-          </a:bodyPr>
-          <a:lstStyle/>
-          <a:p>
             <a:pPr algn="l">
               <a:lnSpc>
                 <a:spcPts val="3359"/>
@@ -8689,6 +10669,11 @@
         </p:txBody>
       </p:sp>
     </p:spTree>
+    <p:extLst>
+      <p:ext uri="{BB962C8B-B14F-4D97-AF65-F5344CB8AC3E}">
+        <p14:creationId xmlns:p14="http://schemas.microsoft.com/office/powerpoint/2010/main" val="690407354"/>
+      </p:ext>
+    </p:extLst>
   </p:cSld>
   <p:clrMapOvr>
     <a:masterClrMapping/>
@@ -8708,7 +10693,7 @@
 </p:sld>
 </file>
 
-<file path=ppt/slides/slide14.xml><?xml version="1.0" encoding="utf-8"?>
+<file path=ppt/slides/slide16.xml><?xml version="1.0" encoding="utf-8"?>
 <p:sld xmlns:a="http://schemas.openxmlformats.org/drawingml/2006/main" xmlns:r="http://schemas.openxmlformats.org/officeDocument/2006/relationships" xmlns:p="http://schemas.openxmlformats.org/presentationml/2006/main">
   <p:cSld>
     <p:bg>
@@ -9733,7 +11718,7 @@
 </p:sld>
 </file>
 
-<file path=ppt/slides/slide15.xml><?xml version="1.0" encoding="utf-8"?>
+<file path=ppt/slides/slide17.xml><?xml version="1.0" encoding="utf-8"?>
 <p:sld xmlns:a="http://schemas.openxmlformats.org/drawingml/2006/main" xmlns:r="http://schemas.openxmlformats.org/officeDocument/2006/relationships" xmlns:p="http://schemas.openxmlformats.org/presentationml/2006/main">
   <p:cSld>
     <p:bg>
@@ -10293,7 +12278,7 @@
 </p:sld>
 </file>
 
-<file path=ppt/slides/slide16.xml><?xml version="1.0" encoding="utf-8"?>
+<file path=ppt/slides/slide18.xml><?xml version="1.0" encoding="utf-8"?>
 <p:sld xmlns:a="http://schemas.openxmlformats.org/drawingml/2006/main" xmlns:r="http://schemas.openxmlformats.org/officeDocument/2006/relationships" xmlns:p="http://schemas.openxmlformats.org/presentationml/2006/main">
   <p:cSld>
     <p:bg>
@@ -11273,7 +13258,7 @@
 </p:sld>
 </file>
 
-<file path=ppt/slides/slide17.xml><?xml version="1.0" encoding="utf-8"?>
+<file path=ppt/slides/slide19.xml><?xml version="1.0" encoding="utf-8"?>
 <p:sld xmlns:a="http://schemas.openxmlformats.org/drawingml/2006/main" xmlns:r="http://schemas.openxmlformats.org/officeDocument/2006/relationships" xmlns:p="http://schemas.openxmlformats.org/presentationml/2006/main">
   <p:cSld>
     <p:bg>
@@ -11795,7 +13780,1015 @@
 </p:sld>
 </file>
 
-<file path=ppt/slides/slide18.xml><?xml version="1.0" encoding="utf-8"?>
+<file path=ppt/slides/slide2.xml><?xml version="1.0" encoding="utf-8"?>
+<p:sld xmlns:a="http://schemas.openxmlformats.org/drawingml/2006/main" xmlns:r="http://schemas.openxmlformats.org/officeDocument/2006/relationships" xmlns:p="http://schemas.openxmlformats.org/presentationml/2006/main">
+  <p:cSld>
+    <p:bg>
+      <p:bgPr>
+        <a:solidFill>
+          <a:srgbClr val="F6F1E8"/>
+        </a:solidFill>
+        <a:effectLst/>
+      </p:bgPr>
+    </p:bg>
+    <p:spTree>
+      <p:nvGrpSpPr>
+        <p:cNvPr id="1" name=""/>
+        <p:cNvGrpSpPr/>
+        <p:nvPr/>
+      </p:nvGrpSpPr>
+      <p:grpSpPr>
+        <a:xfrm>
+          <a:off x="0" y="0"/>
+          <a:ext cx="0" cy="0"/>
+          <a:chOff x="0" y="0"/>
+          <a:chExt cx="0" cy="0"/>
+        </a:xfrm>
+      </p:grpSpPr>
+      <p:sp>
+        <p:nvSpPr>
+          <p:cNvPr id="2" name="TextBox 2"/>
+          <p:cNvSpPr txBox="1"/>
+          <p:nvPr/>
+        </p:nvSpPr>
+        <p:spPr>
+          <a:xfrm>
+            <a:off x="952500" y="504825"/>
+            <a:ext cx="8572500" cy="272415"/>
+          </a:xfrm>
+          <a:prstGeom prst="rect">
+            <a:avLst/>
+          </a:prstGeom>
+        </p:spPr>
+        <p:txBody>
+          <a:bodyPr lIns="0" tIns="0" rIns="0" bIns="0" rtlCol="0" anchor="t">
+            <a:spAutoFit/>
+          </a:bodyPr>
+          <a:lstStyle/>
+          <a:p>
+            <a:pPr algn="l">
+              <a:lnSpc>
+                <a:spcPts val="2310"/>
+              </a:lnSpc>
+            </a:pPr>
+            <a:r>
+              <a:rPr lang="en-US" sz="1650" b="1" spc="198">
+                <a:solidFill>
+                  <a:srgbClr val="18A999"/>
+                </a:solidFill>
+                <a:latin typeface="DM Sans Bold"/>
+                <a:ea typeface="DM Sans Bold"/>
+                <a:cs typeface="DM Sans Bold"/>
+                <a:sym typeface="DM Sans Bold"/>
+              </a:rPr>
+              <a:t>MODUL INFORMASI DIGITAL  •  02</a:t>
+            </a:r>
+          </a:p>
+        </p:txBody>
+      </p:sp>
+      <p:sp>
+        <p:nvSpPr>
+          <p:cNvPr id="3" name="TextBox 3"/>
+          <p:cNvSpPr txBox="1"/>
+          <p:nvPr/>
+        </p:nvSpPr>
+        <p:spPr>
+          <a:xfrm>
+            <a:off x="952500" y="1028700"/>
+            <a:ext cx="14287500" cy="672465"/>
+          </a:xfrm>
+          <a:prstGeom prst="rect">
+            <a:avLst/>
+          </a:prstGeom>
+        </p:spPr>
+        <p:txBody>
+          <a:bodyPr lIns="0" tIns="0" rIns="0" bIns="0" rtlCol="0" anchor="t">
+            <a:spAutoFit/>
+          </a:bodyPr>
+          <a:lstStyle/>
+          <a:p>
+            <a:pPr algn="l">
+              <a:lnSpc>
+                <a:spcPts val="5040"/>
+              </a:lnSpc>
+            </a:pPr>
+            <a:r>
+              <a:rPr lang="en-US" sz="4800" b="1">
+                <a:solidFill>
+                  <a:srgbClr val="12233F"/>
+                </a:solidFill>
+                <a:latin typeface="Bricolage Grotesque Bold"/>
+                <a:ea typeface="Bricolage Grotesque Bold"/>
+                <a:cs typeface="Bricolage Grotesque Bold"/>
+                <a:sym typeface="Bricolage Grotesque Bold"/>
+              </a:rPr>
+              <a:t>Praktik pedagogis</a:t>
+            </a:r>
+          </a:p>
+        </p:txBody>
+      </p:sp>
+      <p:sp>
+        <p:nvSpPr>
+          <p:cNvPr id="4" name="AutoShape 4"/>
+          <p:cNvSpPr/>
+          <p:nvPr/>
+        </p:nvSpPr>
+        <p:spPr>
+          <a:xfrm>
+            <a:off x="952500" y="1962150"/>
+            <a:ext cx="16383000" cy="0"/>
+          </a:xfrm>
+          <a:prstGeom prst="line">
+            <a:avLst/>
+          </a:prstGeom>
+          <a:ln w="19050" cap="flat">
+            <a:solidFill>
+              <a:srgbClr val="D9D1C4"/>
+            </a:solidFill>
+            <a:prstDash val="solid"/>
+            <a:headEnd type="none" w="sm" len="sm"/>
+            <a:tailEnd type="none" w="sm" len="sm"/>
+          </a:ln>
+        </p:spPr>
+        <p:txBody>
+          <a:bodyPr/>
+          <a:lstStyle/>
+          <a:p>
+            <a:endParaRPr lang="en-US"/>
+          </a:p>
+        </p:txBody>
+      </p:sp>
+      <p:grpSp>
+        <p:nvGrpSpPr>
+          <p:cNvPr id="5" name="Group 5"/>
+          <p:cNvGrpSpPr/>
+          <p:nvPr/>
+        </p:nvGrpSpPr>
+        <p:grpSpPr>
+          <a:xfrm>
+            <a:off x="952500" y="2686050"/>
+            <a:ext cx="16383000" cy="1190625"/>
+            <a:chOff x="0" y="0"/>
+            <a:chExt cx="21844000" cy="1587500"/>
+          </a:xfrm>
+        </p:grpSpPr>
+        <p:grpSp>
+          <p:nvGrpSpPr>
+            <p:cNvPr id="6" name="Group 6"/>
+            <p:cNvGrpSpPr/>
+            <p:nvPr/>
+          </p:nvGrpSpPr>
+          <p:grpSpPr>
+            <a:xfrm>
+              <a:off x="0" y="0"/>
+              <a:ext cx="21844000" cy="1587500"/>
+              <a:chOff x="0" y="0"/>
+              <a:chExt cx="21844000" cy="1587500"/>
+            </a:xfrm>
+          </p:grpSpPr>
+          <p:sp>
+            <p:nvSpPr>
+              <p:cNvPr id="7" name="Freeform 7"/>
+              <p:cNvSpPr/>
+              <p:nvPr/>
+            </p:nvSpPr>
+            <p:spPr>
+              <a:xfrm>
+                <a:off x="0" y="0"/>
+                <a:ext cx="21844000" cy="1587500"/>
+              </a:xfrm>
+              <a:custGeom>
+                <a:avLst/>
+                <a:gdLst/>
+                <a:ahLst/>
+                <a:cxnLst/>
+                <a:rect l="l" t="t" r="r" b="b"/>
+                <a:pathLst>
+                  <a:path w="21844000" h="1587500">
+                    <a:moveTo>
+                      <a:pt x="0" y="0"/>
+                    </a:moveTo>
+                    <a:lnTo>
+                      <a:pt x="21844000" y="0"/>
+                    </a:lnTo>
+                    <a:lnTo>
+                      <a:pt x="21844000" y="1587500"/>
+                    </a:lnTo>
+                    <a:lnTo>
+                      <a:pt x="0" y="1587500"/>
+                    </a:lnTo>
+                    <a:close/>
+                  </a:path>
+                </a:pathLst>
+              </a:custGeom>
+              <a:solidFill>
+                <a:srgbClr val="FFFFFF"/>
+              </a:solidFill>
+              <a:ln cap="sq">
+                <a:noFill/>
+                <a:prstDash val="solid"/>
+                <a:miter/>
+              </a:ln>
+            </p:spPr>
+            <p:txBody>
+              <a:bodyPr/>
+              <a:lstStyle/>
+              <a:p>
+                <a:endParaRPr lang="en-US"/>
+              </a:p>
+            </p:txBody>
+          </p:sp>
+          <p:sp>
+            <p:nvSpPr>
+              <p:cNvPr id="8" name="TextBox 8"/>
+              <p:cNvSpPr txBox="1"/>
+              <p:nvPr/>
+            </p:nvSpPr>
+            <p:spPr>
+              <a:xfrm>
+                <a:off x="0" y="-38100"/>
+                <a:ext cx="21844000" cy="1625600"/>
+              </a:xfrm>
+              <a:prstGeom prst="rect">
+                <a:avLst/>
+              </a:prstGeom>
+            </p:spPr>
+            <p:txBody>
+              <a:bodyPr lIns="50800" tIns="50800" rIns="50800" bIns="50800" rtlCol="0" anchor="ctr"/>
+              <a:lstStyle/>
+              <a:p>
+                <a:pPr algn="l">
+                  <a:lnSpc>
+                    <a:spcPts val="1679"/>
+                  </a:lnSpc>
+                </a:pPr>
+                <a:endParaRPr/>
+              </a:p>
+            </p:txBody>
+          </p:sp>
+        </p:grpSp>
+        <p:sp>
+          <p:nvSpPr>
+            <p:cNvPr id="9" name="TextBox 9"/>
+            <p:cNvSpPr txBox="1"/>
+            <p:nvPr/>
+          </p:nvSpPr>
+          <p:spPr>
+            <a:xfrm>
+              <a:off x="571500" y="434975"/>
+              <a:ext cx="3937000" cy="428625"/>
+            </a:xfrm>
+            <a:prstGeom prst="rect">
+              <a:avLst/>
+            </a:prstGeom>
+          </p:spPr>
+          <p:txBody>
+            <a:bodyPr lIns="0" tIns="0" rIns="0" bIns="0" rtlCol="0" anchor="t">
+              <a:spAutoFit/>
+            </a:bodyPr>
+            <a:lstStyle/>
+            <a:p>
+              <a:pPr algn="l">
+                <a:lnSpc>
+                  <a:spcPts val="2625"/>
+                </a:lnSpc>
+              </a:pPr>
+              <a:r>
+                <a:rPr lang="en-US" sz="1875">
+                  <a:solidFill>
+                    <a:srgbClr val="18A999"/>
+                  </a:solidFill>
+                  <a:latin typeface="Archivo Black"/>
+                  <a:ea typeface="Archivo Black"/>
+                  <a:cs typeface="Archivo Black"/>
+                  <a:sym typeface="Archivo Black"/>
+                </a:rPr>
+                <a:t>MODEL</a:t>
+              </a:r>
+            </a:p>
+          </p:txBody>
+        </p:sp>
+        <p:sp>
+          <p:nvSpPr>
+            <p:cNvPr id="10" name="TextBox 10"/>
+            <p:cNvSpPr txBox="1"/>
+            <p:nvPr/>
+          </p:nvSpPr>
+          <p:spPr>
+            <a:xfrm>
+              <a:off x="5334000" y="298450"/>
+              <a:ext cx="14732000" cy="610870"/>
+            </a:xfrm>
+            <a:prstGeom prst="rect">
+              <a:avLst/>
+            </a:prstGeom>
+          </p:spPr>
+          <p:txBody>
+            <a:bodyPr lIns="0" tIns="0" rIns="0" bIns="0" rtlCol="0" anchor="t">
+              <a:spAutoFit/>
+            </a:bodyPr>
+            <a:lstStyle/>
+            <a:p>
+              <a:pPr algn="l">
+                <a:lnSpc>
+                  <a:spcPts val="3884"/>
+                </a:lnSpc>
+              </a:pPr>
+              <a:r>
+                <a:rPr lang="en-US" sz="2775" b="1">
+                  <a:solidFill>
+                    <a:srgbClr val="12233F"/>
+                  </a:solidFill>
+                  <a:latin typeface="Bricolage Grotesque Bold"/>
+                  <a:ea typeface="Bricolage Grotesque Bold"/>
+                  <a:cs typeface="Bricolage Grotesque Bold"/>
+                  <a:sym typeface="Bricolage Grotesque Bold"/>
+                </a:rPr>
+                <a:t>Case Based Learning</a:t>
+              </a:r>
+            </a:p>
+          </p:txBody>
+        </p:sp>
+      </p:grpSp>
+      <p:grpSp>
+        <p:nvGrpSpPr>
+          <p:cNvPr id="11" name="Group 11"/>
+          <p:cNvGrpSpPr/>
+          <p:nvPr/>
+        </p:nvGrpSpPr>
+        <p:grpSpPr>
+          <a:xfrm>
+            <a:off x="952500" y="4162425"/>
+            <a:ext cx="16383000" cy="1676400"/>
+            <a:chOff x="0" y="0"/>
+            <a:chExt cx="21844000" cy="2235200"/>
+          </a:xfrm>
+        </p:grpSpPr>
+        <p:grpSp>
+          <p:nvGrpSpPr>
+            <p:cNvPr id="12" name="Group 12"/>
+            <p:cNvGrpSpPr/>
+            <p:nvPr/>
+          </p:nvGrpSpPr>
+          <p:grpSpPr>
+            <a:xfrm>
+              <a:off x="0" y="0"/>
+              <a:ext cx="21844000" cy="2235200"/>
+              <a:chOff x="0" y="0"/>
+              <a:chExt cx="21844000" cy="2235200"/>
+            </a:xfrm>
+          </p:grpSpPr>
+          <p:sp>
+            <p:nvSpPr>
+              <p:cNvPr id="13" name="Freeform 13"/>
+              <p:cNvSpPr/>
+              <p:nvPr/>
+            </p:nvSpPr>
+            <p:spPr>
+              <a:xfrm>
+                <a:off x="0" y="0"/>
+                <a:ext cx="21844000" cy="2235200"/>
+              </a:xfrm>
+              <a:custGeom>
+                <a:avLst/>
+                <a:gdLst/>
+                <a:ahLst/>
+                <a:cxnLst/>
+                <a:rect l="l" t="t" r="r" b="b"/>
+                <a:pathLst>
+                  <a:path w="21844000" h="2235200">
+                    <a:moveTo>
+                      <a:pt x="0" y="0"/>
+                    </a:moveTo>
+                    <a:lnTo>
+                      <a:pt x="21844000" y="0"/>
+                    </a:lnTo>
+                    <a:lnTo>
+                      <a:pt x="21844000" y="2235200"/>
+                    </a:lnTo>
+                    <a:lnTo>
+                      <a:pt x="0" y="2235200"/>
+                    </a:lnTo>
+                    <a:close/>
+                  </a:path>
+                </a:pathLst>
+              </a:custGeom>
+              <a:solidFill>
+                <a:srgbClr val="FFFFFF"/>
+              </a:solidFill>
+              <a:ln cap="sq">
+                <a:noFill/>
+                <a:prstDash val="solid"/>
+                <a:miter/>
+              </a:ln>
+            </p:spPr>
+            <p:txBody>
+              <a:bodyPr/>
+              <a:lstStyle/>
+              <a:p>
+                <a:endParaRPr lang="en-US"/>
+              </a:p>
+            </p:txBody>
+          </p:sp>
+          <p:sp>
+            <p:nvSpPr>
+              <p:cNvPr id="14" name="TextBox 14"/>
+              <p:cNvSpPr txBox="1"/>
+              <p:nvPr/>
+            </p:nvSpPr>
+            <p:spPr>
+              <a:xfrm>
+                <a:off x="0" y="-38100"/>
+                <a:ext cx="21844000" cy="2273300"/>
+              </a:xfrm>
+              <a:prstGeom prst="rect">
+                <a:avLst/>
+              </a:prstGeom>
+            </p:spPr>
+            <p:txBody>
+              <a:bodyPr lIns="50800" tIns="50800" rIns="50800" bIns="50800" rtlCol="0" anchor="ctr"/>
+              <a:lstStyle/>
+              <a:p>
+                <a:pPr algn="l">
+                  <a:lnSpc>
+                    <a:spcPts val="1679"/>
+                  </a:lnSpc>
+                </a:pPr>
+                <a:endParaRPr/>
+              </a:p>
+            </p:txBody>
+          </p:sp>
+        </p:grpSp>
+        <p:sp>
+          <p:nvSpPr>
+            <p:cNvPr id="15" name="TextBox 15"/>
+            <p:cNvSpPr txBox="1"/>
+            <p:nvPr/>
+          </p:nvSpPr>
+          <p:spPr>
+            <a:xfrm>
+              <a:off x="571500" y="434975"/>
+              <a:ext cx="3937000" cy="428625"/>
+            </a:xfrm>
+            <a:prstGeom prst="rect">
+              <a:avLst/>
+            </a:prstGeom>
+          </p:spPr>
+          <p:txBody>
+            <a:bodyPr lIns="0" tIns="0" rIns="0" bIns="0" rtlCol="0" anchor="t">
+              <a:spAutoFit/>
+            </a:bodyPr>
+            <a:lstStyle/>
+            <a:p>
+              <a:pPr algn="l">
+                <a:lnSpc>
+                  <a:spcPts val="2625"/>
+                </a:lnSpc>
+              </a:pPr>
+              <a:r>
+                <a:rPr lang="en-US" sz="1875">
+                  <a:solidFill>
+                    <a:srgbClr val="18A999"/>
+                  </a:solidFill>
+                  <a:latin typeface="Archivo Black"/>
+                  <a:ea typeface="Archivo Black"/>
+                  <a:cs typeface="Archivo Black"/>
+                  <a:sym typeface="Archivo Black"/>
+                </a:rPr>
+                <a:t>PENDEKATAN</a:t>
+              </a:r>
+            </a:p>
+          </p:txBody>
+        </p:sp>
+        <p:sp>
+          <p:nvSpPr>
+            <p:cNvPr id="16" name="TextBox 16"/>
+            <p:cNvSpPr txBox="1"/>
+            <p:nvPr/>
+          </p:nvSpPr>
+          <p:spPr>
+            <a:xfrm>
+              <a:off x="5334000" y="298450"/>
+              <a:ext cx="14732000" cy="1258570"/>
+            </a:xfrm>
+            <a:prstGeom prst="rect">
+              <a:avLst/>
+            </a:prstGeom>
+          </p:spPr>
+          <p:txBody>
+            <a:bodyPr lIns="0" tIns="0" rIns="0" bIns="0" rtlCol="0" anchor="t">
+              <a:spAutoFit/>
+            </a:bodyPr>
+            <a:lstStyle/>
+            <a:p>
+              <a:pPr algn="l">
+                <a:lnSpc>
+                  <a:spcPts val="3884"/>
+                </a:lnSpc>
+              </a:pPr>
+              <a:r>
+                <a:rPr lang="en-US" sz="2775" b="1">
+                  <a:solidFill>
+                    <a:srgbClr val="12233F"/>
+                  </a:solidFill>
+                  <a:latin typeface="Bricolage Grotesque Bold"/>
+                  <a:ea typeface="Bricolage Grotesque Bold"/>
+                  <a:cs typeface="Bricolage Grotesque Bold"/>
+                  <a:sym typeface="Bricolage Grotesque Bold"/>
+                </a:rPr>
+                <a:t>Deep Learning berpusat pada murid (Student-Centered Learning).</a:t>
+              </a:r>
+            </a:p>
+          </p:txBody>
+        </p:sp>
+      </p:grpSp>
+      <p:grpSp>
+        <p:nvGrpSpPr>
+          <p:cNvPr id="17" name="Group 17"/>
+          <p:cNvGrpSpPr/>
+          <p:nvPr/>
+        </p:nvGrpSpPr>
+        <p:grpSpPr>
+          <a:xfrm>
+            <a:off x="952500" y="5638800"/>
+            <a:ext cx="16383000" cy="1190625"/>
+            <a:chOff x="0" y="0"/>
+            <a:chExt cx="21844000" cy="1587500"/>
+          </a:xfrm>
+        </p:grpSpPr>
+        <p:grpSp>
+          <p:nvGrpSpPr>
+            <p:cNvPr id="18" name="Group 18"/>
+            <p:cNvGrpSpPr/>
+            <p:nvPr/>
+          </p:nvGrpSpPr>
+          <p:grpSpPr>
+            <a:xfrm>
+              <a:off x="0" y="0"/>
+              <a:ext cx="21844000" cy="1587500"/>
+              <a:chOff x="0" y="0"/>
+              <a:chExt cx="21844000" cy="1587500"/>
+            </a:xfrm>
+          </p:grpSpPr>
+          <p:sp>
+            <p:nvSpPr>
+              <p:cNvPr id="19" name="Freeform 19"/>
+              <p:cNvSpPr/>
+              <p:nvPr/>
+            </p:nvSpPr>
+            <p:spPr>
+              <a:xfrm>
+                <a:off x="0" y="0"/>
+                <a:ext cx="21844000" cy="1587500"/>
+              </a:xfrm>
+              <a:custGeom>
+                <a:avLst/>
+                <a:gdLst/>
+                <a:ahLst/>
+                <a:cxnLst/>
+                <a:rect l="l" t="t" r="r" b="b"/>
+                <a:pathLst>
+                  <a:path w="21844000" h="1587500">
+                    <a:moveTo>
+                      <a:pt x="0" y="0"/>
+                    </a:moveTo>
+                    <a:lnTo>
+                      <a:pt x="21844000" y="0"/>
+                    </a:lnTo>
+                    <a:lnTo>
+                      <a:pt x="21844000" y="1587500"/>
+                    </a:lnTo>
+                    <a:lnTo>
+                      <a:pt x="0" y="1587500"/>
+                    </a:lnTo>
+                    <a:close/>
+                  </a:path>
+                </a:pathLst>
+              </a:custGeom>
+              <a:solidFill>
+                <a:srgbClr val="FFFFFF"/>
+              </a:solidFill>
+              <a:ln cap="sq">
+                <a:noFill/>
+                <a:prstDash val="solid"/>
+                <a:miter/>
+              </a:ln>
+            </p:spPr>
+            <p:txBody>
+              <a:bodyPr/>
+              <a:lstStyle/>
+              <a:p>
+                <a:endParaRPr lang="en-US"/>
+              </a:p>
+            </p:txBody>
+          </p:sp>
+          <p:sp>
+            <p:nvSpPr>
+              <p:cNvPr id="20" name="TextBox 20"/>
+              <p:cNvSpPr txBox="1"/>
+              <p:nvPr/>
+            </p:nvSpPr>
+            <p:spPr>
+              <a:xfrm>
+                <a:off x="0" y="-38100"/>
+                <a:ext cx="21844000" cy="1625600"/>
+              </a:xfrm>
+              <a:prstGeom prst="rect">
+                <a:avLst/>
+              </a:prstGeom>
+            </p:spPr>
+            <p:txBody>
+              <a:bodyPr lIns="50800" tIns="50800" rIns="50800" bIns="50800" rtlCol="0" anchor="ctr"/>
+              <a:lstStyle/>
+              <a:p>
+                <a:pPr algn="l">
+                  <a:lnSpc>
+                    <a:spcPts val="1679"/>
+                  </a:lnSpc>
+                </a:pPr>
+                <a:endParaRPr/>
+              </a:p>
+            </p:txBody>
+          </p:sp>
+        </p:grpSp>
+        <p:sp>
+          <p:nvSpPr>
+            <p:cNvPr id="21" name="TextBox 21"/>
+            <p:cNvSpPr txBox="1"/>
+            <p:nvPr/>
+          </p:nvSpPr>
+          <p:spPr>
+            <a:xfrm>
+              <a:off x="571500" y="434975"/>
+              <a:ext cx="3937000" cy="428625"/>
+            </a:xfrm>
+            <a:prstGeom prst="rect">
+              <a:avLst/>
+            </a:prstGeom>
+          </p:spPr>
+          <p:txBody>
+            <a:bodyPr lIns="0" tIns="0" rIns="0" bIns="0" rtlCol="0" anchor="t">
+              <a:spAutoFit/>
+            </a:bodyPr>
+            <a:lstStyle/>
+            <a:p>
+              <a:pPr algn="l">
+                <a:lnSpc>
+                  <a:spcPts val="2625"/>
+                </a:lnSpc>
+              </a:pPr>
+              <a:r>
+                <a:rPr lang="en-US" sz="1875">
+                  <a:solidFill>
+                    <a:srgbClr val="18A999"/>
+                  </a:solidFill>
+                  <a:latin typeface="Archivo Black"/>
+                  <a:ea typeface="Archivo Black"/>
+                  <a:cs typeface="Archivo Black"/>
+                  <a:sym typeface="Archivo Black"/>
+                </a:rPr>
+                <a:t>STRATEGI</a:t>
+              </a:r>
+            </a:p>
+          </p:txBody>
+        </p:sp>
+        <p:sp>
+          <p:nvSpPr>
+            <p:cNvPr id="22" name="TextBox 22"/>
+            <p:cNvSpPr txBox="1"/>
+            <p:nvPr/>
+          </p:nvSpPr>
+          <p:spPr>
+            <a:xfrm>
+              <a:off x="5334000" y="298450"/>
+              <a:ext cx="14732000" cy="610870"/>
+            </a:xfrm>
+            <a:prstGeom prst="rect">
+              <a:avLst/>
+            </a:prstGeom>
+          </p:spPr>
+          <p:txBody>
+            <a:bodyPr lIns="0" tIns="0" rIns="0" bIns="0" rtlCol="0" anchor="t">
+              <a:spAutoFit/>
+            </a:bodyPr>
+            <a:lstStyle/>
+            <a:p>
+              <a:pPr algn="l">
+                <a:lnSpc>
+                  <a:spcPts val="3884"/>
+                </a:lnSpc>
+              </a:pPr>
+              <a:r>
+                <a:rPr lang="en-US" sz="2775" b="1">
+                  <a:solidFill>
+                    <a:srgbClr val="12233F"/>
+                  </a:solidFill>
+                  <a:latin typeface="Bricolage Grotesque Bold"/>
+                  <a:ea typeface="Bricolage Grotesque Bold"/>
+                  <a:cs typeface="Bricolage Grotesque Bold"/>
+                  <a:sym typeface="Bricolage Grotesque Bold"/>
+                </a:rPr>
+                <a:t>Guiding Question • Investigasi • Diskusi • Refleksi</a:t>
+              </a:r>
+            </a:p>
+          </p:txBody>
+        </p:sp>
+      </p:grpSp>
+      <p:grpSp>
+        <p:nvGrpSpPr>
+          <p:cNvPr id="23" name="Group 23"/>
+          <p:cNvGrpSpPr/>
+          <p:nvPr/>
+        </p:nvGrpSpPr>
+        <p:grpSpPr>
+          <a:xfrm>
+            <a:off x="952500" y="7115175"/>
+            <a:ext cx="16383000" cy="1190625"/>
+            <a:chOff x="0" y="0"/>
+            <a:chExt cx="21844000" cy="1587500"/>
+          </a:xfrm>
+        </p:grpSpPr>
+        <p:grpSp>
+          <p:nvGrpSpPr>
+            <p:cNvPr id="24" name="Group 24"/>
+            <p:cNvGrpSpPr/>
+            <p:nvPr/>
+          </p:nvGrpSpPr>
+          <p:grpSpPr>
+            <a:xfrm>
+              <a:off x="0" y="0"/>
+              <a:ext cx="21844000" cy="1587500"/>
+              <a:chOff x="0" y="0"/>
+              <a:chExt cx="21844000" cy="1587500"/>
+            </a:xfrm>
+          </p:grpSpPr>
+          <p:sp>
+            <p:nvSpPr>
+              <p:cNvPr id="25" name="Freeform 25"/>
+              <p:cNvSpPr/>
+              <p:nvPr/>
+            </p:nvSpPr>
+            <p:spPr>
+              <a:xfrm>
+                <a:off x="0" y="0"/>
+                <a:ext cx="21844000" cy="1587500"/>
+              </a:xfrm>
+              <a:custGeom>
+                <a:avLst/>
+                <a:gdLst/>
+                <a:ahLst/>
+                <a:cxnLst/>
+                <a:rect l="l" t="t" r="r" b="b"/>
+                <a:pathLst>
+                  <a:path w="21844000" h="1587500">
+                    <a:moveTo>
+                      <a:pt x="0" y="0"/>
+                    </a:moveTo>
+                    <a:lnTo>
+                      <a:pt x="21844000" y="0"/>
+                    </a:lnTo>
+                    <a:lnTo>
+                      <a:pt x="21844000" y="1587500"/>
+                    </a:lnTo>
+                    <a:lnTo>
+                      <a:pt x="0" y="1587500"/>
+                    </a:lnTo>
+                    <a:close/>
+                  </a:path>
+                </a:pathLst>
+              </a:custGeom>
+              <a:solidFill>
+                <a:srgbClr val="12233F"/>
+              </a:solidFill>
+              <a:ln cap="sq">
+                <a:noFill/>
+                <a:prstDash val="solid"/>
+                <a:miter/>
+              </a:ln>
+            </p:spPr>
+            <p:txBody>
+              <a:bodyPr/>
+              <a:lstStyle/>
+              <a:p>
+                <a:endParaRPr lang="en-US"/>
+              </a:p>
+            </p:txBody>
+          </p:sp>
+          <p:sp>
+            <p:nvSpPr>
+              <p:cNvPr id="26" name="TextBox 26"/>
+              <p:cNvSpPr txBox="1"/>
+              <p:nvPr/>
+            </p:nvSpPr>
+            <p:spPr>
+              <a:xfrm>
+                <a:off x="0" y="-38100"/>
+                <a:ext cx="21844000" cy="1625600"/>
+              </a:xfrm>
+              <a:prstGeom prst="rect">
+                <a:avLst/>
+              </a:prstGeom>
+            </p:spPr>
+            <p:txBody>
+              <a:bodyPr lIns="50800" tIns="50800" rIns="50800" bIns="50800" rtlCol="0" anchor="ctr"/>
+              <a:lstStyle/>
+              <a:p>
+                <a:pPr algn="l">
+                  <a:lnSpc>
+                    <a:spcPts val="1679"/>
+                  </a:lnSpc>
+                </a:pPr>
+                <a:endParaRPr/>
+              </a:p>
+            </p:txBody>
+          </p:sp>
+        </p:grpSp>
+        <p:sp>
+          <p:nvSpPr>
+            <p:cNvPr id="27" name="TextBox 27"/>
+            <p:cNvSpPr txBox="1"/>
+            <p:nvPr/>
+          </p:nvSpPr>
+          <p:spPr>
+            <a:xfrm>
+              <a:off x="571500" y="434975"/>
+              <a:ext cx="3937000" cy="428625"/>
+            </a:xfrm>
+            <a:prstGeom prst="rect">
+              <a:avLst/>
+            </a:prstGeom>
+          </p:spPr>
+          <p:txBody>
+            <a:bodyPr lIns="0" tIns="0" rIns="0" bIns="0" rtlCol="0" anchor="t">
+              <a:spAutoFit/>
+            </a:bodyPr>
+            <a:lstStyle/>
+            <a:p>
+              <a:pPr algn="l">
+                <a:lnSpc>
+                  <a:spcPts val="2625"/>
+                </a:lnSpc>
+              </a:pPr>
+              <a:r>
+                <a:rPr lang="en-US" sz="1875">
+                  <a:solidFill>
+                    <a:srgbClr val="FFC857"/>
+                  </a:solidFill>
+                  <a:latin typeface="Archivo Black"/>
+                  <a:ea typeface="Archivo Black"/>
+                  <a:cs typeface="Archivo Black"/>
+                  <a:sym typeface="Archivo Black"/>
+                </a:rPr>
+                <a:t>PRODUK</a:t>
+              </a:r>
+            </a:p>
+          </p:txBody>
+        </p:sp>
+        <p:sp>
+          <p:nvSpPr>
+            <p:cNvPr id="28" name="TextBox 28"/>
+            <p:cNvSpPr txBox="1"/>
+            <p:nvPr/>
+          </p:nvSpPr>
+          <p:spPr>
+            <a:xfrm>
+              <a:off x="5334000" y="298450"/>
+              <a:ext cx="14732000" cy="610870"/>
+            </a:xfrm>
+            <a:prstGeom prst="rect">
+              <a:avLst/>
+            </a:prstGeom>
+          </p:spPr>
+          <p:txBody>
+            <a:bodyPr lIns="0" tIns="0" rIns="0" bIns="0" rtlCol="0" anchor="t">
+              <a:spAutoFit/>
+            </a:bodyPr>
+            <a:lstStyle/>
+            <a:p>
+              <a:pPr algn="l">
+                <a:lnSpc>
+                  <a:spcPts val="3884"/>
+                </a:lnSpc>
+              </a:pPr>
+              <a:r>
+                <a:rPr lang="en-US" sz="2775" b="1">
+                  <a:solidFill>
+                    <a:srgbClr val="FFFFFF"/>
+                  </a:solidFill>
+                  <a:latin typeface="Bricolage Grotesque Bold"/>
+                  <a:ea typeface="Bricolage Grotesque Bold"/>
+                  <a:cs typeface="Bricolage Grotesque Bold"/>
+                  <a:sym typeface="Bricolage Grotesque Bold"/>
+                </a:rPr>
+                <a:t>Analisis Kredibilitas Informasi</a:t>
+              </a:r>
+            </a:p>
+          </p:txBody>
+        </p:sp>
+      </p:grpSp>
+      <p:sp>
+        <p:nvSpPr>
+          <p:cNvPr id="29" name="TextBox 29"/>
+          <p:cNvSpPr txBox="1"/>
+          <p:nvPr/>
+        </p:nvSpPr>
+        <p:spPr>
+          <a:xfrm>
+            <a:off x="952500" y="9772650"/>
+            <a:ext cx="9525000" cy="222885"/>
+          </a:xfrm>
+          <a:prstGeom prst="rect">
+            <a:avLst/>
+          </a:prstGeom>
+        </p:spPr>
+        <p:txBody>
+          <a:bodyPr lIns="0" tIns="0" rIns="0" bIns="0" rtlCol="0" anchor="t">
+            <a:spAutoFit/>
+          </a:bodyPr>
+          <a:lstStyle/>
+          <a:p>
+            <a:pPr algn="l">
+              <a:lnSpc>
+                <a:spcPts val="1889"/>
+              </a:lnSpc>
+            </a:pPr>
+            <a:r>
+              <a:rPr lang="en-US" sz="1350" b="1" spc="108">
+                <a:solidFill>
+                  <a:srgbClr val="5D6B7E"/>
+                </a:solidFill>
+                <a:latin typeface="DM Sans Bold"/>
+                <a:ea typeface="DM Sans Bold"/>
+                <a:cs typeface="DM Sans Bold"/>
+                <a:sym typeface="DM Sans Bold"/>
+              </a:rPr>
+              <a:t>BERPIKIR KRITIS  •  VERIFIKASI  •  BERTANGGUNG JAWAB</a:t>
+            </a:r>
+          </a:p>
+        </p:txBody>
+      </p:sp>
+      <p:sp>
+        <p:nvSpPr>
+          <p:cNvPr id="30" name="TextBox 30"/>
+          <p:cNvSpPr txBox="1"/>
+          <p:nvPr/>
+        </p:nvSpPr>
+        <p:spPr>
+          <a:xfrm>
+            <a:off x="16383000" y="9753600"/>
+            <a:ext cx="952500" cy="266700"/>
+          </a:xfrm>
+          <a:prstGeom prst="rect">
+            <a:avLst/>
+          </a:prstGeom>
+        </p:spPr>
+        <p:txBody>
+          <a:bodyPr lIns="0" tIns="0" rIns="0" bIns="0" rtlCol="0" anchor="t">
+            <a:spAutoFit/>
+          </a:bodyPr>
+          <a:lstStyle/>
+          <a:p>
+            <a:pPr algn="r">
+              <a:lnSpc>
+                <a:spcPts val="2100"/>
+              </a:lnSpc>
+            </a:pPr>
+            <a:r>
+              <a:rPr lang="en-US" sz="1500">
+                <a:solidFill>
+                  <a:srgbClr val="12233F"/>
+                </a:solidFill>
+                <a:latin typeface="Archivo Black"/>
+                <a:ea typeface="Archivo Black"/>
+                <a:cs typeface="Archivo Black"/>
+                <a:sym typeface="Archivo Black"/>
+              </a:rPr>
+              <a:t>02</a:t>
+            </a:r>
+          </a:p>
+        </p:txBody>
+      </p:sp>
+    </p:spTree>
+  </p:cSld>
+  <p:clrMapOvr>
+    <a:masterClrMapping/>
+  </p:clrMapOvr>
+  <mc:AlternateContent xmlns:mc="http://schemas.openxmlformats.org/markup-compatibility/2006">
+    <mc:Choice xmlns:p159="http://schemas.microsoft.com/office/powerpoint/2015/09/main" Requires="p159">
+      <p:transition xmlns:p14="http://schemas.microsoft.com/office/powerpoint/2010/main" spd="slow" p14:dur="2000">
+        <p159:morph option="byObject"/>
+      </p:transition>
+    </mc:Choice>
+    <mc:Fallback>
+      <p:transition spd="slow">
+        <p:fade/>
+      </p:transition>
+    </mc:Fallback>
+  </mc:AlternateContent>
+</p:sld>
+</file>
+
+<file path=ppt/slides/slide20.xml><?xml version="1.0" encoding="utf-8"?>
 <p:sld xmlns:a="http://schemas.openxmlformats.org/drawingml/2006/main" xmlns:r="http://schemas.openxmlformats.org/officeDocument/2006/relationships" xmlns:p="http://schemas.openxmlformats.org/presentationml/2006/main">
   <p:cSld>
     <p:bg>
@@ -13216,7 +16209,7 @@
 </p:sld>
 </file>
 
-<file path=ppt/slides/slide2.xml><?xml version="1.0" encoding="utf-8"?>
+<file path=ppt/slides/slide21.xml><?xml version="1.0" encoding="utf-8"?>
 <p:sld xmlns:a="http://schemas.openxmlformats.org/drawingml/2006/main" xmlns:r="http://schemas.openxmlformats.org/officeDocument/2006/relationships" xmlns:p="http://schemas.openxmlformats.org/presentationml/2006/main">
   <p:cSld>
     <p:bg>
@@ -13229,7 +16222,13 @@
     </p:bg>
     <p:spTree>
       <p:nvGrpSpPr>
-        <p:cNvPr id="1" name=""/>
+        <p:cNvPr id="1" name="">
+          <a:extLst>
+            <a:ext uri="{FF2B5EF4-FFF2-40B4-BE49-F238E27FC236}">
+              <a16:creationId xmlns:a16="http://schemas.microsoft.com/office/drawing/2014/main" id="{633BD5C7-F6EB-F6F7-942F-E2A2C9BFBA85}"/>
+            </a:ext>
+          </a:extLst>
+        </p:cNvPr>
         <p:cNvGrpSpPr/>
         <p:nvPr/>
       </p:nvGrpSpPr>
@@ -13243,7 +16242,13 @@
       </p:grpSpPr>
       <p:sp>
         <p:nvSpPr>
-          <p:cNvPr id="2" name="TextBox 2"/>
+          <p:cNvPr id="2" name="TextBox 2">
+            <a:extLst>
+              <a:ext uri="{FF2B5EF4-FFF2-40B4-BE49-F238E27FC236}">
+                <a16:creationId xmlns:a16="http://schemas.microsoft.com/office/drawing/2014/main" id="{867213BC-B50C-BCBD-2C90-7728B5860E4D}"/>
+              </a:ext>
+            </a:extLst>
+          </p:cNvPr>
           <p:cNvSpPr txBox="1"/>
           <p:nvPr/>
         </p:nvSpPr>
@@ -13277,14 +16282,20 @@
                 <a:cs typeface="DM Sans Bold"/>
                 <a:sym typeface="DM Sans Bold"/>
               </a:rPr>
-              <a:t>MODUL INFORMASI DIGITAL  •  02</a:t>
+              <a:t>MODUL INFORMASI DIGITAL  •  18</a:t>
             </a:r>
           </a:p>
         </p:txBody>
       </p:sp>
       <p:sp>
         <p:nvSpPr>
-          <p:cNvPr id="3" name="TextBox 3"/>
+          <p:cNvPr id="3" name="TextBox 3">
+            <a:extLst>
+              <a:ext uri="{FF2B5EF4-FFF2-40B4-BE49-F238E27FC236}">
+                <a16:creationId xmlns:a16="http://schemas.microsoft.com/office/drawing/2014/main" id="{606394D4-C615-D917-C6E6-74D7FBD18E3E}"/>
+              </a:ext>
+            </a:extLst>
+          </p:cNvPr>
           <p:cNvSpPr txBox="1"/>
           <p:nvPr/>
         </p:nvSpPr>
@@ -13309,7 +16320,7 @@
               </a:lnSpc>
             </a:pPr>
             <a:r>
-              <a:rPr lang="en-US" sz="4800" b="1">
+              <a:rPr lang="en-US" sz="4800" b="1" dirty="0" err="1">
                 <a:solidFill>
                   <a:srgbClr val="12233F"/>
                 </a:solidFill>
@@ -13318,14 +16329,53 @@
                 <a:cs typeface="Bricolage Grotesque Bold"/>
                 <a:sym typeface="Bricolage Grotesque Bold"/>
               </a:rPr>
-              <a:t>Praktik pedagogis</a:t>
-            </a:r>
+              <a:t>Pembagian</a:t>
+            </a:r>
+            <a:r>
+              <a:rPr lang="en-US" sz="4800" b="1" dirty="0">
+                <a:solidFill>
+                  <a:srgbClr val="12233F"/>
+                </a:solidFill>
+                <a:latin typeface="Bricolage Grotesque Bold"/>
+                <a:ea typeface="Bricolage Grotesque Bold"/>
+                <a:cs typeface="Bricolage Grotesque Bold"/>
+                <a:sym typeface="Bricolage Grotesque Bold"/>
+              </a:rPr>
+              <a:t> </a:t>
+            </a:r>
+            <a:r>
+              <a:rPr lang="en-US" sz="4800" b="1">
+                <a:solidFill>
+                  <a:srgbClr val="12233F"/>
+                </a:solidFill>
+                <a:latin typeface="Bricolage Grotesque Bold"/>
+                <a:ea typeface="Bricolage Grotesque Bold"/>
+                <a:cs typeface="Bricolage Grotesque Bold"/>
+                <a:sym typeface="Bricolage Grotesque Bold"/>
+              </a:rPr>
+              <a:t>Kelompok</a:t>
+            </a:r>
+            <a:endParaRPr lang="en-US" sz="4800" b="1" dirty="0">
+              <a:solidFill>
+                <a:srgbClr val="12233F"/>
+              </a:solidFill>
+              <a:latin typeface="Bricolage Grotesque Bold"/>
+              <a:ea typeface="Bricolage Grotesque Bold"/>
+              <a:cs typeface="Bricolage Grotesque Bold"/>
+              <a:sym typeface="Bricolage Grotesque Bold"/>
+            </a:endParaRPr>
           </a:p>
         </p:txBody>
       </p:sp>
       <p:sp>
         <p:nvSpPr>
-          <p:cNvPr id="4" name="AutoShape 4"/>
+          <p:cNvPr id="4" name="AutoShape 4">
+            <a:extLst>
+              <a:ext uri="{FF2B5EF4-FFF2-40B4-BE49-F238E27FC236}">
+                <a16:creationId xmlns:a16="http://schemas.microsoft.com/office/drawing/2014/main" id="{FA972678-7D77-20BE-3B00-BB57CA8EFC8C}"/>
+              </a:ext>
+            </a:extLst>
+          </p:cNvPr>
           <p:cNvSpPr/>
           <p:nvPr/>
         </p:nvSpPr>
@@ -13356,42 +16406,60 @@
       </p:sp>
       <p:grpSp>
         <p:nvGrpSpPr>
-          <p:cNvPr id="5" name="Group 5"/>
+          <p:cNvPr id="5" name="Group 5">
+            <a:extLst>
+              <a:ext uri="{FF2B5EF4-FFF2-40B4-BE49-F238E27FC236}">
+                <a16:creationId xmlns:a16="http://schemas.microsoft.com/office/drawing/2014/main" id="{DD8C0369-7D22-F5CB-47F1-5ACBC05CE962}"/>
+              </a:ext>
+            </a:extLst>
+          </p:cNvPr>
           <p:cNvGrpSpPr/>
           <p:nvPr/>
         </p:nvGrpSpPr>
         <p:grpSpPr>
           <a:xfrm>
-            <a:off x="952500" y="2686050"/>
-            <a:ext cx="16383000" cy="1190625"/>
+            <a:off x="2057400" y="2354276"/>
+            <a:ext cx="4191000" cy="1809749"/>
             <a:chOff x="0" y="0"/>
-            <a:chExt cx="21844000" cy="1587500"/>
+            <a:chExt cx="10414000" cy="2413000"/>
           </a:xfrm>
         </p:grpSpPr>
         <p:grpSp>
           <p:nvGrpSpPr>
-            <p:cNvPr id="6" name="Group 6"/>
+            <p:cNvPr id="6" name="Group 6">
+              <a:extLst>
+                <a:ext uri="{FF2B5EF4-FFF2-40B4-BE49-F238E27FC236}">
+                  <a16:creationId xmlns:a16="http://schemas.microsoft.com/office/drawing/2014/main" id="{5DE3A681-D44C-F0FF-B754-31F330F325D4}"/>
+                </a:ext>
+              </a:extLst>
+            </p:cNvPr>
             <p:cNvGrpSpPr/>
             <p:nvPr/>
           </p:nvGrpSpPr>
           <p:grpSpPr>
             <a:xfrm>
               <a:off x="0" y="0"/>
-              <a:ext cx="21844000" cy="1587500"/>
+              <a:ext cx="10414000" cy="2413000"/>
               <a:chOff x="0" y="0"/>
-              <a:chExt cx="21844000" cy="1587500"/>
+              <a:chExt cx="10414000" cy="2413000"/>
             </a:xfrm>
           </p:grpSpPr>
           <p:sp>
             <p:nvSpPr>
-              <p:cNvPr id="7" name="Freeform 7"/>
+              <p:cNvPr id="7" name="Freeform 7">
+                <a:extLst>
+                  <a:ext uri="{FF2B5EF4-FFF2-40B4-BE49-F238E27FC236}">
+                    <a16:creationId xmlns:a16="http://schemas.microsoft.com/office/drawing/2014/main" id="{C06B0766-5B0F-A93A-39B3-8B0202C4B608}"/>
+                  </a:ext>
+                </a:extLst>
+              </p:cNvPr>
               <p:cNvSpPr/>
               <p:nvPr/>
             </p:nvSpPr>
             <p:spPr>
               <a:xfrm>
                 <a:off x="0" y="0"/>
-                <a:ext cx="21844000" cy="1587500"/>
+                <a:ext cx="10414000" cy="2413000"/>
               </a:xfrm>
               <a:custGeom>
                 <a:avLst/>
@@ -13400,18 +16468,18 @@
                 <a:cxnLst/>
                 <a:rect l="l" t="t" r="r" b="b"/>
                 <a:pathLst>
-                  <a:path w="21844000" h="1587500">
+                  <a:path w="10414000" h="2413000">
                     <a:moveTo>
                       <a:pt x="0" y="0"/>
                     </a:moveTo>
                     <a:lnTo>
-                      <a:pt x="21844000" y="0"/>
+                      <a:pt x="10414000" y="0"/>
                     </a:lnTo>
                     <a:lnTo>
-                      <a:pt x="21844000" y="1587500"/>
+                      <a:pt x="10414000" y="2413000"/>
                     </a:lnTo>
                     <a:lnTo>
-                      <a:pt x="0" y="1587500"/>
+                      <a:pt x="0" y="2413000"/>
                     </a:lnTo>
                     <a:close/>
                   </a:path>
@@ -13436,14 +16504,133 @@
           </p:sp>
           <p:sp>
             <p:nvSpPr>
-              <p:cNvPr id="8" name="TextBox 8"/>
+              <p:cNvPr id="8" name="TextBox 8">
+                <a:extLst>
+                  <a:ext uri="{FF2B5EF4-FFF2-40B4-BE49-F238E27FC236}">
+                    <a16:creationId xmlns:a16="http://schemas.microsoft.com/office/drawing/2014/main" id="{748A9FA9-B3ED-B435-B6C5-59E2A9007511}"/>
+                  </a:ext>
+                </a:extLst>
+              </p:cNvPr>
               <p:cNvSpPr txBox="1"/>
               <p:nvPr/>
             </p:nvSpPr>
             <p:spPr>
               <a:xfrm>
                 <a:off x="0" y="-38100"/>
-                <a:ext cx="21844000" cy="1625600"/>
+                <a:ext cx="10414000" cy="2451100"/>
+              </a:xfrm>
+              <a:prstGeom prst="rect">
+                <a:avLst/>
+              </a:prstGeom>
+            </p:spPr>
+            <p:txBody>
+              <a:bodyPr lIns="50800" tIns="50800" rIns="50800" bIns="50800" rtlCol="0" anchor="ctr"/>
+              <a:lstStyle/>
+              <a:p>
+                <a:pPr algn="l">
+                  <a:lnSpc>
+                    <a:spcPts val="1679"/>
+                  </a:lnSpc>
+                </a:pPr>
+                <a:endParaRPr/>
+              </a:p>
+            </p:txBody>
+          </p:sp>
+        </p:grpSp>
+        <p:grpSp>
+          <p:nvGrpSpPr>
+            <p:cNvPr id="9" name="Group 9">
+              <a:extLst>
+                <a:ext uri="{FF2B5EF4-FFF2-40B4-BE49-F238E27FC236}">
+                  <a16:creationId xmlns:a16="http://schemas.microsoft.com/office/drawing/2014/main" id="{FCFE8134-673C-0421-C870-96A0BF365079}"/>
+                </a:ext>
+              </a:extLst>
+            </p:cNvPr>
+            <p:cNvGrpSpPr/>
+            <p:nvPr/>
+          </p:nvGrpSpPr>
+          <p:grpSpPr>
+            <a:xfrm>
+              <a:off x="0" y="0"/>
+              <a:ext cx="152400" cy="2413000"/>
+              <a:chOff x="0" y="0"/>
+              <a:chExt cx="152400" cy="2413000"/>
+            </a:xfrm>
+          </p:grpSpPr>
+          <p:sp>
+            <p:nvSpPr>
+              <p:cNvPr id="10" name="Freeform 10">
+                <a:extLst>
+                  <a:ext uri="{FF2B5EF4-FFF2-40B4-BE49-F238E27FC236}">
+                    <a16:creationId xmlns:a16="http://schemas.microsoft.com/office/drawing/2014/main" id="{E537F1A5-E7AF-8E33-2DD6-99935562A70C}"/>
+                  </a:ext>
+                </a:extLst>
+              </p:cNvPr>
+              <p:cNvSpPr/>
+              <p:nvPr/>
+            </p:nvSpPr>
+            <p:spPr>
+              <a:xfrm>
+                <a:off x="0" y="0"/>
+                <a:ext cx="152400" cy="2413000"/>
+              </a:xfrm>
+              <a:custGeom>
+                <a:avLst/>
+                <a:gdLst/>
+                <a:ahLst/>
+                <a:cxnLst/>
+                <a:rect l="l" t="t" r="r" b="b"/>
+                <a:pathLst>
+                  <a:path w="152400" h="2413000">
+                    <a:moveTo>
+                      <a:pt x="0" y="0"/>
+                    </a:moveTo>
+                    <a:lnTo>
+                      <a:pt x="152400" y="0"/>
+                    </a:lnTo>
+                    <a:lnTo>
+                      <a:pt x="152400" y="2413000"/>
+                    </a:lnTo>
+                    <a:lnTo>
+                      <a:pt x="0" y="2413000"/>
+                    </a:lnTo>
+                    <a:close/>
+                  </a:path>
+                </a:pathLst>
+              </a:custGeom>
+              <a:solidFill>
+                <a:srgbClr val="18A999"/>
+              </a:solidFill>
+              <a:ln cap="sq">
+                <a:noFill/>
+                <a:prstDash val="solid"/>
+                <a:miter/>
+              </a:ln>
+            </p:spPr>
+            <p:txBody>
+              <a:bodyPr/>
+              <a:lstStyle/>
+              <a:p>
+                <a:endParaRPr lang="en-US"/>
+              </a:p>
+            </p:txBody>
+          </p:sp>
+          <p:sp>
+            <p:nvSpPr>
+              <p:cNvPr id="11" name="TextBox 11">
+                <a:extLst>
+                  <a:ext uri="{FF2B5EF4-FFF2-40B4-BE49-F238E27FC236}">
+                    <a16:creationId xmlns:a16="http://schemas.microsoft.com/office/drawing/2014/main" id="{DBE97E90-E6ED-1C79-2578-A6AAEA824C0A}"/>
+                  </a:ext>
+                </a:extLst>
+              </p:cNvPr>
+              <p:cNvSpPr txBox="1"/>
+              <p:nvPr/>
+            </p:nvSpPr>
+            <p:spPr>
+              <a:xfrm>
+                <a:off x="0" y="-38100"/>
+                <a:ext cx="152400" cy="2451100"/>
               </a:xfrm>
               <a:prstGeom prst="rect">
                 <a:avLst/>
@@ -13465,14 +16652,20 @@
         </p:grpSp>
         <p:sp>
           <p:nvSpPr>
-            <p:cNvPr id="9" name="TextBox 9"/>
+            <p:cNvPr id="12" name="TextBox 12">
+              <a:extLst>
+                <a:ext uri="{FF2B5EF4-FFF2-40B4-BE49-F238E27FC236}">
+                  <a16:creationId xmlns:a16="http://schemas.microsoft.com/office/drawing/2014/main" id="{D0ED8210-E6DF-C1DD-54A4-9492B8027C5C}"/>
+                </a:ext>
+              </a:extLst>
+            </p:cNvPr>
             <p:cNvSpPr txBox="1"/>
             <p:nvPr/>
           </p:nvSpPr>
           <p:spPr>
             <a:xfrm>
-              <a:off x="571500" y="434975"/>
-              <a:ext cx="3937000" cy="428625"/>
+              <a:off x="444500" y="218151"/>
+              <a:ext cx="9525001" cy="1969772"/>
             </a:xfrm>
             <a:prstGeom prst="rect">
               <a:avLst/>
@@ -13484,106 +16677,123 @@
             </a:bodyPr>
             <a:lstStyle/>
             <a:p>
-              <a:pPr algn="l">
-                <a:lnSpc>
-                  <a:spcPts val="2625"/>
-                </a:lnSpc>
+              <a:pPr marL="457200" lvl="0" indent="-457200">
+                <a:buFont typeface="Arial" panose="020B0604020202020204" pitchFamily="34" charset="0"/>
+                <a:buChar char="•"/>
               </a:pPr>
               <a:r>
-                <a:rPr lang="en-US" sz="1875">
-                  <a:solidFill>
-                    <a:srgbClr val="18A999"/>
-                  </a:solidFill>
-                  <a:latin typeface="Archivo Black"/>
-                  <a:ea typeface="Archivo Black"/>
-                  <a:cs typeface="Archivo Black"/>
-                  <a:sym typeface="Archivo Black"/>
-                </a:rPr>
-                <a:t>MODEL</a:t>
+                <a:rPr lang="en-ID" sz="2400" dirty="0"/>
+                <a:t>Affan Dua </a:t>
+              </a:r>
+              <a:r>
+                <a:rPr lang="en-ID" sz="2400" dirty="0" err="1"/>
+                <a:t>Nurwiyan</a:t>
+              </a:r>
+              <a:r>
+                <a:rPr lang="en-ID" sz="2400" dirty="0"/>
+                <a:t> </a:t>
               </a:r>
             </a:p>
-          </p:txBody>
-        </p:sp>
-        <p:sp>
-          <p:nvSpPr>
-            <p:cNvPr id="10" name="TextBox 10"/>
-            <p:cNvSpPr txBox="1"/>
-            <p:nvPr/>
-          </p:nvSpPr>
-          <p:spPr>
-            <a:xfrm>
-              <a:off x="5334000" y="298450"/>
-              <a:ext cx="14732000" cy="610870"/>
-            </a:xfrm>
-            <a:prstGeom prst="rect">
-              <a:avLst/>
-            </a:prstGeom>
-          </p:spPr>
-          <p:txBody>
-            <a:bodyPr lIns="0" tIns="0" rIns="0" bIns="0" rtlCol="0" anchor="t">
-              <a:spAutoFit/>
-            </a:bodyPr>
-            <a:lstStyle/>
             <a:p>
-              <a:pPr algn="l">
-                <a:lnSpc>
-                  <a:spcPts val="3884"/>
-                </a:lnSpc>
+              <a:pPr marL="457200" lvl="0" indent="-457200">
+                <a:buFont typeface="Arial" panose="020B0604020202020204" pitchFamily="34" charset="0"/>
+                <a:buChar char="•"/>
               </a:pPr>
               <a:r>
-                <a:rPr lang="en-US" sz="2775" b="1">
-                  <a:solidFill>
-                    <a:srgbClr val="12233F"/>
-                  </a:solidFill>
-                  <a:latin typeface="Bricolage Grotesque Bold"/>
-                  <a:ea typeface="Bricolage Grotesque Bold"/>
-                  <a:cs typeface="Bricolage Grotesque Bold"/>
-                  <a:sym typeface="Bricolage Grotesque Bold"/>
-                </a:rPr>
-                <a:t>Case Based Learning</a:t>
+                <a:rPr lang="en-ID" sz="2400" dirty="0"/>
+                <a:t>Abdul Hakim Elvino</a:t>
               </a:r>
+            </a:p>
+            <a:p>
+              <a:pPr marL="457200" lvl="0" indent="-457200">
+                <a:buFont typeface="Arial" panose="020B0604020202020204" pitchFamily="34" charset="0"/>
+                <a:buChar char="•"/>
+              </a:pPr>
+              <a:r>
+                <a:rPr lang="en-ID" sz="2400" dirty="0"/>
+                <a:t>Dwi Ahmad Nur Sholeh </a:t>
+              </a:r>
+            </a:p>
+            <a:p>
+              <a:pPr marL="457200" indent="-457200">
+                <a:buFont typeface="Arial" panose="020B0604020202020204" pitchFamily="34" charset="0"/>
+                <a:buChar char="•"/>
+              </a:pPr>
+              <a:r>
+                <a:rPr lang="en-ID" sz="2400" dirty="0"/>
+                <a:t>Lintang Saka </a:t>
+              </a:r>
+              <a:r>
+                <a:rPr lang="en-ID" sz="2400" dirty="0" err="1"/>
+                <a:t>Senggani</a:t>
+              </a:r>
+              <a:r>
+                <a:rPr lang="en-ID" sz="2400" dirty="0"/>
+                <a:t> </a:t>
+              </a:r>
+              <a:endParaRPr lang="en-US" sz="2400" dirty="0">
+                <a:sym typeface="Bricolage Grotesque Bold"/>
+              </a:endParaRPr>
             </a:p>
           </p:txBody>
         </p:sp>
       </p:grpSp>
       <p:grpSp>
         <p:nvGrpSpPr>
-          <p:cNvPr id="11" name="Group 11"/>
+          <p:cNvPr id="13" name="Group 13">
+            <a:extLst>
+              <a:ext uri="{FF2B5EF4-FFF2-40B4-BE49-F238E27FC236}">
+                <a16:creationId xmlns:a16="http://schemas.microsoft.com/office/drawing/2014/main" id="{652F7B05-7E9C-C28B-6B29-D931D5B68484}"/>
+              </a:ext>
+            </a:extLst>
+          </p:cNvPr>
           <p:cNvGrpSpPr/>
           <p:nvPr/>
         </p:nvGrpSpPr>
         <p:grpSpPr>
           <a:xfrm>
-            <a:off x="952500" y="4162425"/>
-            <a:ext cx="16383000" cy="1676400"/>
+            <a:off x="6875563" y="2354276"/>
+            <a:ext cx="4279028" cy="1809750"/>
             <a:chOff x="0" y="0"/>
-            <a:chExt cx="21844000" cy="2235200"/>
+            <a:chExt cx="10414000" cy="2413000"/>
           </a:xfrm>
         </p:grpSpPr>
         <p:grpSp>
           <p:nvGrpSpPr>
-            <p:cNvPr id="12" name="Group 12"/>
+            <p:cNvPr id="14" name="Group 14">
+              <a:extLst>
+                <a:ext uri="{FF2B5EF4-FFF2-40B4-BE49-F238E27FC236}">
+                  <a16:creationId xmlns:a16="http://schemas.microsoft.com/office/drawing/2014/main" id="{BD5A5297-C9B3-5162-195B-152D6A93207B}"/>
+                </a:ext>
+              </a:extLst>
+            </p:cNvPr>
             <p:cNvGrpSpPr/>
             <p:nvPr/>
           </p:nvGrpSpPr>
           <p:grpSpPr>
             <a:xfrm>
               <a:off x="0" y="0"/>
-              <a:ext cx="21844000" cy="2235200"/>
+              <a:ext cx="10414000" cy="2413000"/>
               <a:chOff x="0" y="0"/>
-              <a:chExt cx="21844000" cy="2235200"/>
+              <a:chExt cx="10414000" cy="2413000"/>
             </a:xfrm>
           </p:grpSpPr>
           <p:sp>
             <p:nvSpPr>
-              <p:cNvPr id="13" name="Freeform 13"/>
+              <p:cNvPr id="15" name="Freeform 15">
+                <a:extLst>
+                  <a:ext uri="{FF2B5EF4-FFF2-40B4-BE49-F238E27FC236}">
+                    <a16:creationId xmlns:a16="http://schemas.microsoft.com/office/drawing/2014/main" id="{F62B9D27-4FC6-8FD8-0758-BD68422BE5D4}"/>
+                  </a:ext>
+                </a:extLst>
+              </p:cNvPr>
               <p:cNvSpPr/>
               <p:nvPr/>
             </p:nvSpPr>
             <p:spPr>
               <a:xfrm>
                 <a:off x="0" y="0"/>
-                <a:ext cx="21844000" cy="2235200"/>
+                <a:ext cx="10414000" cy="2413000"/>
               </a:xfrm>
               <a:custGeom>
                 <a:avLst/>
@@ -13592,18 +16802,18 @@
                 <a:cxnLst/>
                 <a:rect l="l" t="t" r="r" b="b"/>
                 <a:pathLst>
-                  <a:path w="21844000" h="2235200">
+                  <a:path w="10414000" h="2413000">
                     <a:moveTo>
                       <a:pt x="0" y="0"/>
                     </a:moveTo>
                     <a:lnTo>
-                      <a:pt x="21844000" y="0"/>
+                      <a:pt x="10414000" y="0"/>
                     </a:lnTo>
                     <a:lnTo>
-                      <a:pt x="21844000" y="2235200"/>
+                      <a:pt x="10414000" y="2413000"/>
                     </a:lnTo>
                     <a:lnTo>
-                      <a:pt x="0" y="2235200"/>
+                      <a:pt x="0" y="2413000"/>
                     </a:lnTo>
                     <a:close/>
                   </a:path>
@@ -13622,20 +16832,30 @@
               <a:bodyPr/>
               <a:lstStyle/>
               <a:p>
+                <a:pPr marL="285750" indent="-285750">
+                  <a:buFont typeface="Arial" panose="020B0604020202020204" pitchFamily="34" charset="0"/>
+                  <a:buChar char="•"/>
+                </a:pPr>
                 <a:endParaRPr lang="en-US"/>
               </a:p>
             </p:txBody>
           </p:sp>
           <p:sp>
             <p:nvSpPr>
-              <p:cNvPr id="14" name="TextBox 14"/>
+              <p:cNvPr id="16" name="TextBox 16">
+                <a:extLst>
+                  <a:ext uri="{FF2B5EF4-FFF2-40B4-BE49-F238E27FC236}">
+                    <a16:creationId xmlns:a16="http://schemas.microsoft.com/office/drawing/2014/main" id="{344E6E6B-46A1-8559-E89C-63B948DA233F}"/>
+                  </a:ext>
+                </a:extLst>
+              </p:cNvPr>
               <p:cNvSpPr txBox="1"/>
               <p:nvPr/>
             </p:nvSpPr>
             <p:spPr>
               <a:xfrm>
                 <a:off x="0" y="-38100"/>
-                <a:ext cx="21844000" cy="2273300"/>
+                <a:ext cx="10414000" cy="2451100"/>
               </a:xfrm>
               <a:prstGeom prst="rect">
                 <a:avLst/>
@@ -13645,10 +16865,131 @@
               <a:bodyPr lIns="50800" tIns="50800" rIns="50800" bIns="50800" rtlCol="0" anchor="ctr"/>
               <a:lstStyle/>
               <a:p>
-                <a:pPr algn="l">
+                <a:pPr marL="285750" indent="-285750" algn="l">
                   <a:lnSpc>
                     <a:spcPts val="1679"/>
                   </a:lnSpc>
+                  <a:buFont typeface="Arial" panose="020B0604020202020204" pitchFamily="34" charset="0"/>
+                  <a:buChar char="•"/>
+                </a:pPr>
+                <a:endParaRPr/>
+              </a:p>
+            </p:txBody>
+          </p:sp>
+        </p:grpSp>
+        <p:grpSp>
+          <p:nvGrpSpPr>
+            <p:cNvPr id="17" name="Group 17">
+              <a:extLst>
+                <a:ext uri="{FF2B5EF4-FFF2-40B4-BE49-F238E27FC236}">
+                  <a16:creationId xmlns:a16="http://schemas.microsoft.com/office/drawing/2014/main" id="{C385A9C0-EE43-AEBA-7B05-66D81DC38412}"/>
+                </a:ext>
+              </a:extLst>
+            </p:cNvPr>
+            <p:cNvGrpSpPr/>
+            <p:nvPr/>
+          </p:nvGrpSpPr>
+          <p:grpSpPr>
+            <a:xfrm>
+              <a:off x="0" y="0"/>
+              <a:ext cx="152400" cy="2413000"/>
+              <a:chOff x="0" y="0"/>
+              <a:chExt cx="152400" cy="2413000"/>
+            </a:xfrm>
+          </p:grpSpPr>
+          <p:sp>
+            <p:nvSpPr>
+              <p:cNvPr id="18" name="Freeform 18">
+                <a:extLst>
+                  <a:ext uri="{FF2B5EF4-FFF2-40B4-BE49-F238E27FC236}">
+                    <a16:creationId xmlns:a16="http://schemas.microsoft.com/office/drawing/2014/main" id="{9D694F28-BACD-9A7B-E03D-45D28B97BDE0}"/>
+                  </a:ext>
+                </a:extLst>
+              </p:cNvPr>
+              <p:cNvSpPr/>
+              <p:nvPr/>
+            </p:nvSpPr>
+            <p:spPr>
+              <a:xfrm>
+                <a:off x="0" y="0"/>
+                <a:ext cx="152400" cy="2413000"/>
+              </a:xfrm>
+              <a:custGeom>
+                <a:avLst/>
+                <a:gdLst/>
+                <a:ahLst/>
+                <a:cxnLst/>
+                <a:rect l="l" t="t" r="r" b="b"/>
+                <a:pathLst>
+                  <a:path w="152400" h="2413000">
+                    <a:moveTo>
+                      <a:pt x="0" y="0"/>
+                    </a:moveTo>
+                    <a:lnTo>
+                      <a:pt x="152400" y="0"/>
+                    </a:lnTo>
+                    <a:lnTo>
+                      <a:pt x="152400" y="2413000"/>
+                    </a:lnTo>
+                    <a:lnTo>
+                      <a:pt x="0" y="2413000"/>
+                    </a:lnTo>
+                    <a:close/>
+                  </a:path>
+                </a:pathLst>
+              </a:custGeom>
+              <a:solidFill>
+                <a:srgbClr val="18A999"/>
+              </a:solidFill>
+              <a:ln cap="sq">
+                <a:noFill/>
+                <a:prstDash val="solid"/>
+                <a:miter/>
+              </a:ln>
+            </p:spPr>
+            <p:txBody>
+              <a:bodyPr/>
+              <a:lstStyle/>
+              <a:p>
+                <a:pPr marL="285750" indent="-285750">
+                  <a:buFont typeface="Arial" panose="020B0604020202020204" pitchFamily="34" charset="0"/>
+                  <a:buChar char="•"/>
+                </a:pPr>
+                <a:endParaRPr lang="en-US"/>
+              </a:p>
+            </p:txBody>
+          </p:sp>
+          <p:sp>
+            <p:nvSpPr>
+              <p:cNvPr id="19" name="TextBox 19">
+                <a:extLst>
+                  <a:ext uri="{FF2B5EF4-FFF2-40B4-BE49-F238E27FC236}">
+                    <a16:creationId xmlns:a16="http://schemas.microsoft.com/office/drawing/2014/main" id="{8E0C19B3-567B-6CEE-5236-A9E341B557E9}"/>
+                  </a:ext>
+                </a:extLst>
+              </p:cNvPr>
+              <p:cNvSpPr txBox="1"/>
+              <p:nvPr/>
+            </p:nvSpPr>
+            <p:spPr>
+              <a:xfrm>
+                <a:off x="0" y="-38100"/>
+                <a:ext cx="152400" cy="2451100"/>
+              </a:xfrm>
+              <a:prstGeom prst="rect">
+                <a:avLst/>
+              </a:prstGeom>
+            </p:spPr>
+            <p:txBody>
+              <a:bodyPr lIns="50800" tIns="50800" rIns="50800" bIns="50800" rtlCol="0" anchor="ctr"/>
+              <a:lstStyle/>
+              <a:p>
+                <a:pPr marL="285750" indent="-285750" algn="l">
+                  <a:lnSpc>
+                    <a:spcPts val="1679"/>
+                  </a:lnSpc>
+                  <a:buFont typeface="Arial" panose="020B0604020202020204" pitchFamily="34" charset="0"/>
+                  <a:buChar char="•"/>
                 </a:pPr>
                 <a:endParaRPr/>
               </a:p>
@@ -13657,14 +16998,20 @@
         </p:grpSp>
         <p:sp>
           <p:nvSpPr>
-            <p:cNvPr id="15" name="TextBox 15"/>
+            <p:cNvPr id="20" name="TextBox 20">
+              <a:extLst>
+                <a:ext uri="{FF2B5EF4-FFF2-40B4-BE49-F238E27FC236}">
+                  <a16:creationId xmlns:a16="http://schemas.microsoft.com/office/drawing/2014/main" id="{924E7E9A-8052-B140-9A69-1D3D47CF3E0E}"/>
+                </a:ext>
+              </a:extLst>
+            </p:cNvPr>
             <p:cNvSpPr txBox="1"/>
             <p:nvPr/>
           </p:nvSpPr>
           <p:spPr>
             <a:xfrm>
-              <a:off x="571500" y="434975"/>
-              <a:ext cx="3937000" cy="428625"/>
+              <a:off x="417781" y="247485"/>
+              <a:ext cx="9525000" cy="1969771"/>
             </a:xfrm>
             <a:prstGeom prst="rect">
               <a:avLst/>
@@ -13674,108 +17021,146 @@
             <a:bodyPr lIns="0" tIns="0" rIns="0" bIns="0" rtlCol="0" anchor="t">
               <a:spAutoFit/>
             </a:bodyPr>
-            <a:lstStyle/>
+            <a:lstStyle>
+              <a:defPPr>
+                <a:defRPr lang="en-US"/>
+              </a:defPPr>
+              <a:lvl1pPr marL="457200" lvl="0" indent="-457200">
+                <a:buFont typeface="+mj-lt"/>
+                <a:buAutoNum type="arabicPeriod"/>
+                <a:defRPr sz="2800"/>
+              </a:lvl1pPr>
+            </a:lstStyle>
             <a:p>
-              <a:pPr algn="l">
-                <a:lnSpc>
-                  <a:spcPts val="2625"/>
-                </a:lnSpc>
+              <a:pPr>
+                <a:buFont typeface="Arial" panose="020B0604020202020204" pitchFamily="34" charset="0"/>
+                <a:buChar char="•"/>
               </a:pPr>
               <a:r>
-                <a:rPr lang="en-US" sz="1875">
-                  <a:solidFill>
-                    <a:srgbClr val="18A999"/>
-                  </a:solidFill>
-                  <a:latin typeface="Archivo Black"/>
-                  <a:ea typeface="Archivo Black"/>
-                  <a:cs typeface="Archivo Black"/>
-                  <a:sym typeface="Archivo Black"/>
-                </a:rPr>
-                <a:t>PENDEKATAN</a:t>
+                <a:rPr lang="en-ID" sz="2400" dirty="0"/>
+                <a:t>Andra </a:t>
+              </a:r>
+              <a:r>
+                <a:rPr lang="en-ID" sz="2400" dirty="0" err="1"/>
+                <a:t>Qabl</a:t>
+              </a:r>
+              <a:r>
+                <a:rPr lang="en-ID" sz="2400" dirty="0"/>
+                <a:t> Ramadhan, </a:t>
               </a:r>
             </a:p>
-          </p:txBody>
-        </p:sp>
-        <p:sp>
-          <p:nvSpPr>
-            <p:cNvPr id="16" name="TextBox 16"/>
-            <p:cNvSpPr txBox="1"/>
-            <p:nvPr/>
-          </p:nvSpPr>
-          <p:spPr>
-            <a:xfrm>
-              <a:off x="5334000" y="298450"/>
-              <a:ext cx="14732000" cy="1258570"/>
-            </a:xfrm>
-            <a:prstGeom prst="rect">
-              <a:avLst/>
-            </a:prstGeom>
-          </p:spPr>
-          <p:txBody>
-            <a:bodyPr lIns="0" tIns="0" rIns="0" bIns="0" rtlCol="0" anchor="t">
-              <a:spAutoFit/>
-            </a:bodyPr>
-            <a:lstStyle/>
             <a:p>
-              <a:pPr algn="l">
-                <a:lnSpc>
-                  <a:spcPts val="3884"/>
-                </a:lnSpc>
+              <a:pPr>
+                <a:buFont typeface="Arial" panose="020B0604020202020204" pitchFamily="34" charset="0"/>
+                <a:buChar char="•"/>
               </a:pPr>
               <a:r>
-                <a:rPr lang="en-US" sz="2775" b="1">
-                  <a:solidFill>
-                    <a:srgbClr val="12233F"/>
-                  </a:solidFill>
-                  <a:latin typeface="Bricolage Grotesque Bold"/>
-                  <a:ea typeface="Bricolage Grotesque Bold"/>
-                  <a:cs typeface="Bricolage Grotesque Bold"/>
-                  <a:sym typeface="Bricolage Grotesque Bold"/>
-                </a:rPr>
-                <a:t>Deep Learning berpusat pada murid (Student-Centered Learning).</a:t>
+                <a:rPr lang="en-ID" sz="2400" dirty="0" err="1"/>
+                <a:t>Afrizal</a:t>
               </a:r>
+              <a:r>
+                <a:rPr lang="en-ID" sz="2400" dirty="0"/>
+                <a:t> Nur </a:t>
+              </a:r>
+              <a:r>
+                <a:rPr lang="en-ID" sz="2400" dirty="0" err="1"/>
+                <a:t>Setyabudi</a:t>
+              </a:r>
+              <a:r>
+                <a:rPr lang="en-ID" sz="2400" dirty="0"/>
+                <a:t>, </a:t>
+              </a:r>
+            </a:p>
+            <a:p>
+              <a:pPr>
+                <a:buFont typeface="Arial" panose="020B0604020202020204" pitchFamily="34" charset="0"/>
+                <a:buChar char="•"/>
+              </a:pPr>
+              <a:r>
+                <a:rPr lang="en-ID" sz="2400" dirty="0"/>
+                <a:t>Gusta Laksana, </a:t>
+              </a:r>
+            </a:p>
+            <a:p>
+              <a:pPr>
+                <a:buFont typeface="Arial" panose="020B0604020202020204" pitchFamily="34" charset="0"/>
+                <a:buChar char="•"/>
+              </a:pPr>
+              <a:r>
+                <a:rPr lang="en-ID" sz="2400" dirty="0"/>
+                <a:t>Naufal Zaki </a:t>
+              </a:r>
+              <a:r>
+                <a:rPr lang="en-ID" sz="2400" dirty="0" err="1"/>
+                <a:t>Nazura</a:t>
+              </a:r>
+              <a:r>
+                <a:rPr lang="en-ID" sz="2400" dirty="0"/>
+                <a:t> </a:t>
+              </a:r>
+              <a:endParaRPr lang="en-US" sz="2400" dirty="0">
+                <a:sym typeface="Bricolage Grotesque Bold"/>
+              </a:endParaRPr>
             </a:p>
           </p:txBody>
         </p:sp>
       </p:grpSp>
       <p:grpSp>
         <p:nvGrpSpPr>
-          <p:cNvPr id="17" name="Group 17"/>
+          <p:cNvPr id="21" name="Group 21">
+            <a:extLst>
+              <a:ext uri="{FF2B5EF4-FFF2-40B4-BE49-F238E27FC236}">
+                <a16:creationId xmlns:a16="http://schemas.microsoft.com/office/drawing/2014/main" id="{A46CC21A-72E1-7C22-2957-CD8B971D5FE0}"/>
+              </a:ext>
+            </a:extLst>
+          </p:cNvPr>
           <p:cNvGrpSpPr/>
           <p:nvPr/>
         </p:nvGrpSpPr>
         <p:grpSpPr>
           <a:xfrm>
-            <a:off x="952500" y="5638800"/>
-            <a:ext cx="16383000" cy="1190625"/>
+            <a:off x="2057400" y="4684004"/>
+            <a:ext cx="4191000" cy="1809750"/>
             <a:chOff x="0" y="0"/>
-            <a:chExt cx="21844000" cy="1587500"/>
+            <a:chExt cx="10414000" cy="2413000"/>
           </a:xfrm>
         </p:grpSpPr>
         <p:grpSp>
           <p:nvGrpSpPr>
-            <p:cNvPr id="18" name="Group 18"/>
+            <p:cNvPr id="22" name="Group 22">
+              <a:extLst>
+                <a:ext uri="{FF2B5EF4-FFF2-40B4-BE49-F238E27FC236}">
+                  <a16:creationId xmlns:a16="http://schemas.microsoft.com/office/drawing/2014/main" id="{2271D221-9A1E-3DFB-9DAF-B1DE3A265504}"/>
+                </a:ext>
+              </a:extLst>
+            </p:cNvPr>
             <p:cNvGrpSpPr/>
             <p:nvPr/>
           </p:nvGrpSpPr>
           <p:grpSpPr>
             <a:xfrm>
               <a:off x="0" y="0"/>
-              <a:ext cx="21844000" cy="1587500"/>
+              <a:ext cx="10414000" cy="2413000"/>
               <a:chOff x="0" y="0"/>
-              <a:chExt cx="21844000" cy="1587500"/>
+              <a:chExt cx="10414000" cy="2413000"/>
             </a:xfrm>
           </p:grpSpPr>
           <p:sp>
             <p:nvSpPr>
-              <p:cNvPr id="19" name="Freeform 19"/>
+              <p:cNvPr id="23" name="Freeform 23">
+                <a:extLst>
+                  <a:ext uri="{FF2B5EF4-FFF2-40B4-BE49-F238E27FC236}">
+                    <a16:creationId xmlns:a16="http://schemas.microsoft.com/office/drawing/2014/main" id="{0238DE31-AC52-4296-37A1-A62E99D50212}"/>
+                  </a:ext>
+                </a:extLst>
+              </p:cNvPr>
               <p:cNvSpPr/>
               <p:nvPr/>
             </p:nvSpPr>
             <p:spPr>
               <a:xfrm>
                 <a:off x="0" y="0"/>
-                <a:ext cx="21844000" cy="1587500"/>
+                <a:ext cx="10414000" cy="2413000"/>
               </a:xfrm>
               <a:custGeom>
                 <a:avLst/>
@@ -13784,18 +17169,18 @@
                 <a:cxnLst/>
                 <a:rect l="l" t="t" r="r" b="b"/>
                 <a:pathLst>
-                  <a:path w="21844000" h="1587500">
+                  <a:path w="10414000" h="2413000">
                     <a:moveTo>
                       <a:pt x="0" y="0"/>
                     </a:moveTo>
                     <a:lnTo>
-                      <a:pt x="21844000" y="0"/>
+                      <a:pt x="10414000" y="0"/>
                     </a:lnTo>
                     <a:lnTo>
-                      <a:pt x="21844000" y="1587500"/>
+                      <a:pt x="10414000" y="2413000"/>
                     </a:lnTo>
                     <a:lnTo>
-                      <a:pt x="0" y="1587500"/>
+                      <a:pt x="0" y="2413000"/>
                     </a:lnTo>
                     <a:close/>
                   </a:path>
@@ -13814,20 +17199,30 @@
               <a:bodyPr/>
               <a:lstStyle/>
               <a:p>
+                <a:pPr marL="285750" indent="-285750">
+                  <a:buFont typeface="Arial" panose="020B0604020202020204" pitchFamily="34" charset="0"/>
+                  <a:buChar char="•"/>
+                </a:pPr>
                 <a:endParaRPr lang="en-US"/>
               </a:p>
             </p:txBody>
           </p:sp>
           <p:sp>
             <p:nvSpPr>
-              <p:cNvPr id="20" name="TextBox 20"/>
+              <p:cNvPr id="24" name="TextBox 24">
+                <a:extLst>
+                  <a:ext uri="{FF2B5EF4-FFF2-40B4-BE49-F238E27FC236}">
+                    <a16:creationId xmlns:a16="http://schemas.microsoft.com/office/drawing/2014/main" id="{61358235-6E0E-7F46-4BF4-53D68C06B738}"/>
+                  </a:ext>
+                </a:extLst>
+              </p:cNvPr>
               <p:cNvSpPr txBox="1"/>
               <p:nvPr/>
             </p:nvSpPr>
             <p:spPr>
               <a:xfrm>
                 <a:off x="0" y="-38100"/>
-                <a:ext cx="21844000" cy="1625600"/>
+                <a:ext cx="10414000" cy="2451100"/>
               </a:xfrm>
               <a:prstGeom prst="rect">
                 <a:avLst/>
@@ -13837,137 +17232,54 @@
               <a:bodyPr lIns="50800" tIns="50800" rIns="50800" bIns="50800" rtlCol="0" anchor="ctr"/>
               <a:lstStyle/>
               <a:p>
-                <a:pPr algn="l">
+                <a:pPr marL="285750" indent="-285750" algn="l">
                   <a:lnSpc>
                     <a:spcPts val="1679"/>
                   </a:lnSpc>
+                  <a:buFont typeface="Arial" panose="020B0604020202020204" pitchFamily="34" charset="0"/>
+                  <a:buChar char="•"/>
                 </a:pPr>
                 <a:endParaRPr/>
               </a:p>
             </p:txBody>
           </p:sp>
         </p:grpSp>
-        <p:sp>
-          <p:nvSpPr>
-            <p:cNvPr id="21" name="TextBox 21"/>
-            <p:cNvSpPr txBox="1"/>
-            <p:nvPr/>
-          </p:nvSpPr>
-          <p:spPr>
-            <a:xfrm>
-              <a:off x="571500" y="434975"/>
-              <a:ext cx="3937000" cy="428625"/>
-            </a:xfrm>
-            <a:prstGeom prst="rect">
-              <a:avLst/>
-            </a:prstGeom>
-          </p:spPr>
-          <p:txBody>
-            <a:bodyPr lIns="0" tIns="0" rIns="0" bIns="0" rtlCol="0" anchor="t">
-              <a:spAutoFit/>
-            </a:bodyPr>
-            <a:lstStyle/>
-            <a:p>
-              <a:pPr algn="l">
-                <a:lnSpc>
-                  <a:spcPts val="2625"/>
-                </a:lnSpc>
-              </a:pPr>
-              <a:r>
-                <a:rPr lang="en-US" sz="1875">
-                  <a:solidFill>
-                    <a:srgbClr val="18A999"/>
-                  </a:solidFill>
-                  <a:latin typeface="Archivo Black"/>
-                  <a:ea typeface="Archivo Black"/>
-                  <a:cs typeface="Archivo Black"/>
-                  <a:sym typeface="Archivo Black"/>
-                </a:rPr>
-                <a:t>STRATEGI</a:t>
-              </a:r>
-            </a:p>
-          </p:txBody>
-        </p:sp>
-        <p:sp>
-          <p:nvSpPr>
-            <p:cNvPr id="22" name="TextBox 22"/>
-            <p:cNvSpPr txBox="1"/>
-            <p:nvPr/>
-          </p:nvSpPr>
-          <p:spPr>
-            <a:xfrm>
-              <a:off x="5334000" y="298450"/>
-              <a:ext cx="14732000" cy="610870"/>
-            </a:xfrm>
-            <a:prstGeom prst="rect">
-              <a:avLst/>
-            </a:prstGeom>
-          </p:spPr>
-          <p:txBody>
-            <a:bodyPr lIns="0" tIns="0" rIns="0" bIns="0" rtlCol="0" anchor="t">
-              <a:spAutoFit/>
-            </a:bodyPr>
-            <a:lstStyle/>
-            <a:p>
-              <a:pPr algn="l">
-                <a:lnSpc>
-                  <a:spcPts val="3884"/>
-                </a:lnSpc>
-              </a:pPr>
-              <a:r>
-                <a:rPr lang="en-US" sz="2775" b="1">
-                  <a:solidFill>
-                    <a:srgbClr val="12233F"/>
-                  </a:solidFill>
-                  <a:latin typeface="Bricolage Grotesque Bold"/>
-                  <a:ea typeface="Bricolage Grotesque Bold"/>
-                  <a:cs typeface="Bricolage Grotesque Bold"/>
-                  <a:sym typeface="Bricolage Grotesque Bold"/>
-                </a:rPr>
-                <a:t>Guiding Question • Investigasi • Diskusi • Refleksi</a:t>
-              </a:r>
-            </a:p>
-          </p:txBody>
-        </p:sp>
-      </p:grpSp>
-      <p:grpSp>
-        <p:nvGrpSpPr>
-          <p:cNvPr id="23" name="Group 23"/>
-          <p:cNvGrpSpPr/>
-          <p:nvPr/>
-        </p:nvGrpSpPr>
-        <p:grpSpPr>
-          <a:xfrm>
-            <a:off x="952500" y="7115175"/>
-            <a:ext cx="16383000" cy="1190625"/>
-            <a:chOff x="0" y="0"/>
-            <a:chExt cx="21844000" cy="1587500"/>
-          </a:xfrm>
-        </p:grpSpPr>
         <p:grpSp>
           <p:nvGrpSpPr>
-            <p:cNvPr id="24" name="Group 24"/>
+            <p:cNvPr id="25" name="Group 25">
+              <a:extLst>
+                <a:ext uri="{FF2B5EF4-FFF2-40B4-BE49-F238E27FC236}">
+                  <a16:creationId xmlns:a16="http://schemas.microsoft.com/office/drawing/2014/main" id="{65158A13-ED10-1361-4153-CBD75B4F848A}"/>
+                </a:ext>
+              </a:extLst>
+            </p:cNvPr>
             <p:cNvGrpSpPr/>
             <p:nvPr/>
           </p:nvGrpSpPr>
           <p:grpSpPr>
             <a:xfrm>
               <a:off x="0" y="0"/>
-              <a:ext cx="21844000" cy="1587500"/>
+              <a:ext cx="152400" cy="2413000"/>
               <a:chOff x="0" y="0"/>
-              <a:chExt cx="21844000" cy="1587500"/>
+              <a:chExt cx="152400" cy="2413000"/>
             </a:xfrm>
           </p:grpSpPr>
           <p:sp>
             <p:nvSpPr>
-              <p:cNvPr id="25" name="Freeform 25"/>
+              <p:cNvPr id="26" name="Freeform 26">
+                <a:extLst>
+                  <a:ext uri="{FF2B5EF4-FFF2-40B4-BE49-F238E27FC236}">
+                    <a16:creationId xmlns:a16="http://schemas.microsoft.com/office/drawing/2014/main" id="{4D1784BB-A490-67B5-D06A-7A0A9FC69E92}"/>
+                  </a:ext>
+                </a:extLst>
+              </p:cNvPr>
               <p:cNvSpPr/>
               <p:nvPr/>
             </p:nvSpPr>
             <p:spPr>
               <a:xfrm>
                 <a:off x="0" y="0"/>
-                <a:ext cx="21844000" cy="1587500"/>
+                <a:ext cx="152400" cy="2413000"/>
               </a:xfrm>
               <a:custGeom>
                 <a:avLst/>
@@ -13976,25 +17288,25 @@
                 <a:cxnLst/>
                 <a:rect l="l" t="t" r="r" b="b"/>
                 <a:pathLst>
-                  <a:path w="21844000" h="1587500">
+                  <a:path w="152400" h="2413000">
                     <a:moveTo>
                       <a:pt x="0" y="0"/>
                     </a:moveTo>
                     <a:lnTo>
-                      <a:pt x="21844000" y="0"/>
+                      <a:pt x="152400" y="0"/>
                     </a:lnTo>
                     <a:lnTo>
-                      <a:pt x="21844000" y="1587500"/>
+                      <a:pt x="152400" y="2413000"/>
                     </a:lnTo>
                     <a:lnTo>
-                      <a:pt x="0" y="1587500"/>
+                      <a:pt x="0" y="2413000"/>
                     </a:lnTo>
                     <a:close/>
                   </a:path>
                 </a:pathLst>
               </a:custGeom>
               <a:solidFill>
-                <a:srgbClr val="12233F"/>
+                <a:srgbClr val="FFC857"/>
               </a:solidFill>
               <a:ln cap="sq">
                 <a:noFill/>
@@ -14006,20 +17318,30 @@
               <a:bodyPr/>
               <a:lstStyle/>
               <a:p>
+                <a:pPr marL="285750" indent="-285750">
+                  <a:buFont typeface="Arial" panose="020B0604020202020204" pitchFamily="34" charset="0"/>
+                  <a:buChar char="•"/>
+                </a:pPr>
                 <a:endParaRPr lang="en-US"/>
               </a:p>
             </p:txBody>
           </p:sp>
           <p:sp>
             <p:nvSpPr>
-              <p:cNvPr id="26" name="TextBox 26"/>
+              <p:cNvPr id="27" name="TextBox 27">
+                <a:extLst>
+                  <a:ext uri="{FF2B5EF4-FFF2-40B4-BE49-F238E27FC236}">
+                    <a16:creationId xmlns:a16="http://schemas.microsoft.com/office/drawing/2014/main" id="{2BA61417-8B2F-730E-9C33-D79443E340A8}"/>
+                  </a:ext>
+                </a:extLst>
+              </p:cNvPr>
               <p:cNvSpPr txBox="1"/>
               <p:nvPr/>
             </p:nvSpPr>
             <p:spPr>
               <a:xfrm>
                 <a:off x="0" y="-38100"/>
-                <a:ext cx="21844000" cy="1625600"/>
+                <a:ext cx="152400" cy="2451100"/>
               </a:xfrm>
               <a:prstGeom prst="rect">
                 <a:avLst/>
@@ -14029,10 +17351,12 @@
               <a:bodyPr lIns="50800" tIns="50800" rIns="50800" bIns="50800" rtlCol="0" anchor="ctr"/>
               <a:lstStyle/>
               <a:p>
-                <a:pPr algn="l">
+                <a:pPr marL="285750" indent="-285750" algn="l">
                   <a:lnSpc>
                     <a:spcPts val="1679"/>
                   </a:lnSpc>
+                  <a:buFont typeface="Arial" panose="020B0604020202020204" pitchFamily="34" charset="0"/>
+                  <a:buChar char="•"/>
                 </a:pPr>
                 <a:endParaRPr/>
               </a:p>
@@ -14041,14 +17365,20 @@
         </p:grpSp>
         <p:sp>
           <p:nvSpPr>
-            <p:cNvPr id="27" name="TextBox 27"/>
+            <p:cNvPr id="28" name="TextBox 28">
+              <a:extLst>
+                <a:ext uri="{FF2B5EF4-FFF2-40B4-BE49-F238E27FC236}">
+                  <a16:creationId xmlns:a16="http://schemas.microsoft.com/office/drawing/2014/main" id="{0CB51A4D-3C0D-C0B0-1319-F23C79C94F6B}"/>
+                </a:ext>
+              </a:extLst>
+            </p:cNvPr>
             <p:cNvSpPr txBox="1"/>
             <p:nvPr/>
           </p:nvSpPr>
           <p:spPr>
             <a:xfrm>
-              <a:off x="571500" y="434975"/>
-              <a:ext cx="3937000" cy="428625"/>
+              <a:off x="468165" y="269044"/>
+              <a:ext cx="9525001" cy="1969771"/>
             </a:xfrm>
             <a:prstGeom prst="rect">
               <a:avLst/>
@@ -14058,38 +17388,380 @@
             <a:bodyPr lIns="0" tIns="0" rIns="0" bIns="0" rtlCol="0" anchor="t">
               <a:spAutoFit/>
             </a:bodyPr>
-            <a:lstStyle/>
+            <a:lstStyle>
+              <a:defPPr>
+                <a:defRPr lang="en-US"/>
+              </a:defPPr>
+              <a:lvl1pPr marL="457200" lvl="0" indent="-457200">
+                <a:buFont typeface="+mj-lt"/>
+                <a:buAutoNum type="arabicPeriod"/>
+                <a:defRPr sz="2400"/>
+              </a:lvl1pPr>
+            </a:lstStyle>
             <a:p>
-              <a:pPr algn="l">
-                <a:lnSpc>
-                  <a:spcPts val="2625"/>
-                </a:lnSpc>
+              <a:pPr>
+                <a:buFont typeface="Arial" panose="020B0604020202020204" pitchFamily="34" charset="0"/>
+                <a:buChar char="•"/>
               </a:pPr>
               <a:r>
-                <a:rPr lang="en-US" sz="1875">
-                  <a:solidFill>
-                    <a:srgbClr val="FFC857"/>
-                  </a:solidFill>
-                  <a:latin typeface="Archivo Black"/>
-                  <a:ea typeface="Archivo Black"/>
-                  <a:cs typeface="Archivo Black"/>
-                  <a:sym typeface="Archivo Black"/>
-                </a:rPr>
-                <a:t>PRODUK</a:t>
+                <a:rPr lang="en-ID" dirty="0" err="1"/>
+                <a:t>Herjuno</a:t>
               </a:r>
+              <a:r>
+                <a:rPr lang="en-ID" dirty="0"/>
+                <a:t> </a:t>
+              </a:r>
+              <a:r>
+                <a:rPr lang="en-ID" dirty="0" err="1"/>
+                <a:t>Sinatrio</a:t>
+              </a:r>
+              <a:r>
+                <a:rPr lang="en-ID" dirty="0"/>
+                <a:t> Jati, </a:t>
+              </a:r>
+            </a:p>
+            <a:p>
+              <a:pPr>
+                <a:buFont typeface="Arial" panose="020B0604020202020204" pitchFamily="34" charset="0"/>
+                <a:buChar char="•"/>
+              </a:pPr>
+              <a:r>
+                <a:rPr lang="en-ID" dirty="0"/>
+                <a:t>Alif </a:t>
+              </a:r>
+              <a:r>
+                <a:rPr lang="en-ID" dirty="0" err="1"/>
+                <a:t>Alviansyah</a:t>
+              </a:r>
+              <a:r>
+                <a:rPr lang="en-ID" dirty="0"/>
+                <a:t>, </a:t>
+              </a:r>
+            </a:p>
+            <a:p>
+              <a:pPr>
+                <a:buFont typeface="Arial" panose="020B0604020202020204" pitchFamily="34" charset="0"/>
+                <a:buChar char="•"/>
+              </a:pPr>
+              <a:r>
+                <a:rPr lang="en-ID" dirty="0"/>
+                <a:t>Bagas Eka </a:t>
+              </a:r>
+              <a:r>
+                <a:rPr lang="en-ID" dirty="0" err="1"/>
+                <a:t>Nugraha</a:t>
+              </a:r>
+              <a:r>
+                <a:rPr lang="en-ID" dirty="0"/>
+                <a:t>, </a:t>
+              </a:r>
+            </a:p>
+            <a:p>
+              <a:pPr>
+                <a:buFont typeface="Arial" panose="020B0604020202020204" pitchFamily="34" charset="0"/>
+                <a:buChar char="•"/>
+              </a:pPr>
+              <a:r>
+                <a:rPr lang="en-ID" dirty="0"/>
+                <a:t>Zain </a:t>
+              </a:r>
+              <a:r>
+                <a:rPr lang="en-ID" dirty="0" err="1"/>
+                <a:t>Pazano</a:t>
+              </a:r>
+              <a:r>
+                <a:rPr lang="en-ID" dirty="0"/>
+                <a:t> </a:t>
+              </a:r>
+              <a:r>
+                <a:rPr lang="en-ID" dirty="0" err="1"/>
+                <a:t>Setya</a:t>
+              </a:r>
+              <a:r>
+                <a:rPr lang="en-ID" dirty="0"/>
+                <a:t> </a:t>
+              </a:r>
+              <a:endParaRPr lang="en-US" dirty="0">
+                <a:sym typeface="Bricolage Grotesque Bold"/>
+              </a:endParaRPr>
             </a:p>
           </p:txBody>
         </p:sp>
+      </p:grpSp>
+      <p:grpSp>
+        <p:nvGrpSpPr>
+          <p:cNvPr id="29" name="Group 29">
+            <a:extLst>
+              <a:ext uri="{FF2B5EF4-FFF2-40B4-BE49-F238E27FC236}">
+                <a16:creationId xmlns:a16="http://schemas.microsoft.com/office/drawing/2014/main" id="{FB05C360-A112-CB53-404A-F5624D5BD5B5}"/>
+              </a:ext>
+            </a:extLst>
+          </p:cNvPr>
+          <p:cNvGrpSpPr/>
+          <p:nvPr/>
+        </p:nvGrpSpPr>
+        <p:grpSpPr>
+          <a:xfrm>
+            <a:off x="6936895" y="4638543"/>
+            <a:ext cx="4191000" cy="1809750"/>
+            <a:chOff x="0" y="0"/>
+            <a:chExt cx="10414000" cy="2413000"/>
+          </a:xfrm>
+        </p:grpSpPr>
+        <p:grpSp>
+          <p:nvGrpSpPr>
+            <p:cNvPr id="30" name="Group 30">
+              <a:extLst>
+                <a:ext uri="{FF2B5EF4-FFF2-40B4-BE49-F238E27FC236}">
+                  <a16:creationId xmlns:a16="http://schemas.microsoft.com/office/drawing/2014/main" id="{7355841D-1C60-88BC-3D6E-8B003E0E70C3}"/>
+                </a:ext>
+              </a:extLst>
+            </p:cNvPr>
+            <p:cNvGrpSpPr/>
+            <p:nvPr/>
+          </p:nvGrpSpPr>
+          <p:grpSpPr>
+            <a:xfrm>
+              <a:off x="0" y="0"/>
+              <a:ext cx="10414000" cy="2413000"/>
+              <a:chOff x="0" y="0"/>
+              <a:chExt cx="10414000" cy="2413000"/>
+            </a:xfrm>
+          </p:grpSpPr>
+          <p:sp>
+            <p:nvSpPr>
+              <p:cNvPr id="31" name="Freeform 31">
+                <a:extLst>
+                  <a:ext uri="{FF2B5EF4-FFF2-40B4-BE49-F238E27FC236}">
+                    <a16:creationId xmlns:a16="http://schemas.microsoft.com/office/drawing/2014/main" id="{8FDC5D20-F8FB-DDEE-479A-9AD3EFC78143}"/>
+                  </a:ext>
+                </a:extLst>
+              </p:cNvPr>
+              <p:cNvSpPr/>
+              <p:nvPr/>
+            </p:nvSpPr>
+            <p:spPr>
+              <a:xfrm>
+                <a:off x="0" y="0"/>
+                <a:ext cx="10414000" cy="2413000"/>
+              </a:xfrm>
+              <a:custGeom>
+                <a:avLst/>
+                <a:gdLst/>
+                <a:ahLst/>
+                <a:cxnLst/>
+                <a:rect l="l" t="t" r="r" b="b"/>
+                <a:pathLst>
+                  <a:path w="10414000" h="2413000">
+                    <a:moveTo>
+                      <a:pt x="0" y="0"/>
+                    </a:moveTo>
+                    <a:lnTo>
+                      <a:pt x="10414000" y="0"/>
+                    </a:lnTo>
+                    <a:lnTo>
+                      <a:pt x="10414000" y="2413000"/>
+                    </a:lnTo>
+                    <a:lnTo>
+                      <a:pt x="0" y="2413000"/>
+                    </a:lnTo>
+                    <a:close/>
+                  </a:path>
+                </a:pathLst>
+              </a:custGeom>
+              <a:solidFill>
+                <a:srgbClr val="FFFFFF"/>
+              </a:solidFill>
+              <a:ln cap="sq">
+                <a:noFill/>
+                <a:prstDash val="solid"/>
+                <a:miter/>
+              </a:ln>
+            </p:spPr>
+            <p:txBody>
+              <a:bodyPr/>
+              <a:lstStyle/>
+              <a:p>
+                <a:pPr marL="285750" indent="-285750">
+                  <a:buFont typeface="Arial" panose="020B0604020202020204" pitchFamily="34" charset="0"/>
+                  <a:buChar char="•"/>
+                </a:pPr>
+                <a:endParaRPr lang="en-US"/>
+              </a:p>
+            </p:txBody>
+          </p:sp>
+          <p:sp>
+            <p:nvSpPr>
+              <p:cNvPr id="32" name="TextBox 32">
+                <a:extLst>
+                  <a:ext uri="{FF2B5EF4-FFF2-40B4-BE49-F238E27FC236}">
+                    <a16:creationId xmlns:a16="http://schemas.microsoft.com/office/drawing/2014/main" id="{F188816C-8684-14B6-6829-E84F4F6AA0DB}"/>
+                  </a:ext>
+                </a:extLst>
+              </p:cNvPr>
+              <p:cNvSpPr txBox="1"/>
+              <p:nvPr/>
+            </p:nvSpPr>
+            <p:spPr>
+              <a:xfrm>
+                <a:off x="0" y="-38100"/>
+                <a:ext cx="10414000" cy="2451100"/>
+              </a:xfrm>
+              <a:prstGeom prst="rect">
+                <a:avLst/>
+              </a:prstGeom>
+            </p:spPr>
+            <p:txBody>
+              <a:bodyPr lIns="50800" tIns="50800" rIns="50800" bIns="50800" rtlCol="0" anchor="ctr"/>
+              <a:lstStyle/>
+              <a:p>
+                <a:pPr marL="285750" indent="-285750" algn="l">
+                  <a:lnSpc>
+                    <a:spcPts val="1679"/>
+                  </a:lnSpc>
+                  <a:buFont typeface="Arial" panose="020B0604020202020204" pitchFamily="34" charset="0"/>
+                  <a:buChar char="•"/>
+                </a:pPr>
+                <a:endParaRPr/>
+              </a:p>
+            </p:txBody>
+          </p:sp>
+        </p:grpSp>
+        <p:grpSp>
+          <p:nvGrpSpPr>
+            <p:cNvPr id="33" name="Group 33">
+              <a:extLst>
+                <a:ext uri="{FF2B5EF4-FFF2-40B4-BE49-F238E27FC236}">
+                  <a16:creationId xmlns:a16="http://schemas.microsoft.com/office/drawing/2014/main" id="{37BB5302-5F34-1697-C76F-C9D2652807D9}"/>
+                </a:ext>
+              </a:extLst>
+            </p:cNvPr>
+            <p:cNvGrpSpPr/>
+            <p:nvPr/>
+          </p:nvGrpSpPr>
+          <p:grpSpPr>
+            <a:xfrm>
+              <a:off x="0" y="0"/>
+              <a:ext cx="152400" cy="2413000"/>
+              <a:chOff x="0" y="0"/>
+              <a:chExt cx="152400" cy="2413000"/>
+            </a:xfrm>
+          </p:grpSpPr>
+          <p:sp>
+            <p:nvSpPr>
+              <p:cNvPr id="34" name="Freeform 34">
+                <a:extLst>
+                  <a:ext uri="{FF2B5EF4-FFF2-40B4-BE49-F238E27FC236}">
+                    <a16:creationId xmlns:a16="http://schemas.microsoft.com/office/drawing/2014/main" id="{7619A44E-E69A-1FF2-4849-887EFC8BAED2}"/>
+                  </a:ext>
+                </a:extLst>
+              </p:cNvPr>
+              <p:cNvSpPr/>
+              <p:nvPr/>
+            </p:nvSpPr>
+            <p:spPr>
+              <a:xfrm>
+                <a:off x="0" y="0"/>
+                <a:ext cx="152400" cy="2413000"/>
+              </a:xfrm>
+              <a:custGeom>
+                <a:avLst/>
+                <a:gdLst/>
+                <a:ahLst/>
+                <a:cxnLst/>
+                <a:rect l="l" t="t" r="r" b="b"/>
+                <a:pathLst>
+                  <a:path w="152400" h="2413000">
+                    <a:moveTo>
+                      <a:pt x="0" y="0"/>
+                    </a:moveTo>
+                    <a:lnTo>
+                      <a:pt x="152400" y="0"/>
+                    </a:lnTo>
+                    <a:lnTo>
+                      <a:pt x="152400" y="2413000"/>
+                    </a:lnTo>
+                    <a:lnTo>
+                      <a:pt x="0" y="2413000"/>
+                    </a:lnTo>
+                    <a:close/>
+                  </a:path>
+                </a:pathLst>
+              </a:custGeom>
+              <a:solidFill>
+                <a:srgbClr val="FFC857"/>
+              </a:solidFill>
+              <a:ln cap="sq">
+                <a:noFill/>
+                <a:prstDash val="solid"/>
+                <a:miter/>
+              </a:ln>
+            </p:spPr>
+            <p:txBody>
+              <a:bodyPr/>
+              <a:lstStyle/>
+              <a:p>
+                <a:pPr marL="285750" indent="-285750">
+                  <a:buFont typeface="Arial" panose="020B0604020202020204" pitchFamily="34" charset="0"/>
+                  <a:buChar char="•"/>
+                </a:pPr>
+                <a:endParaRPr lang="en-US"/>
+              </a:p>
+            </p:txBody>
+          </p:sp>
+          <p:sp>
+            <p:nvSpPr>
+              <p:cNvPr id="35" name="TextBox 35">
+                <a:extLst>
+                  <a:ext uri="{FF2B5EF4-FFF2-40B4-BE49-F238E27FC236}">
+                    <a16:creationId xmlns:a16="http://schemas.microsoft.com/office/drawing/2014/main" id="{98B2C759-747C-E383-065D-60B625EE5E94}"/>
+                  </a:ext>
+                </a:extLst>
+              </p:cNvPr>
+              <p:cNvSpPr txBox="1"/>
+              <p:nvPr/>
+            </p:nvSpPr>
+            <p:spPr>
+              <a:xfrm>
+                <a:off x="0" y="-38100"/>
+                <a:ext cx="152400" cy="2451100"/>
+              </a:xfrm>
+              <a:prstGeom prst="rect">
+                <a:avLst/>
+              </a:prstGeom>
+            </p:spPr>
+            <p:txBody>
+              <a:bodyPr lIns="50800" tIns="50800" rIns="50800" bIns="50800" rtlCol="0" anchor="ctr"/>
+              <a:lstStyle/>
+              <a:p>
+                <a:pPr marL="285750" indent="-285750" algn="l">
+                  <a:lnSpc>
+                    <a:spcPts val="1679"/>
+                  </a:lnSpc>
+                  <a:buFont typeface="Arial" panose="020B0604020202020204" pitchFamily="34" charset="0"/>
+                  <a:buChar char="•"/>
+                </a:pPr>
+                <a:endParaRPr/>
+              </a:p>
+            </p:txBody>
+          </p:sp>
+        </p:grpSp>
         <p:sp>
           <p:nvSpPr>
-            <p:cNvPr id="28" name="TextBox 28"/>
+            <p:cNvPr id="36" name="TextBox 36">
+              <a:extLst>
+                <a:ext uri="{FF2B5EF4-FFF2-40B4-BE49-F238E27FC236}">
+                  <a16:creationId xmlns:a16="http://schemas.microsoft.com/office/drawing/2014/main" id="{32C0EA74-F2A9-3B94-E691-E608CE1EB016}"/>
+                </a:ext>
+              </a:extLst>
+            </p:cNvPr>
             <p:cNvSpPr txBox="1"/>
             <p:nvPr/>
           </p:nvSpPr>
           <p:spPr>
             <a:xfrm>
-              <a:off x="5334000" y="298450"/>
-              <a:ext cx="14732000" cy="610870"/>
+              <a:off x="401467" y="254520"/>
+              <a:ext cx="9525001" cy="1969771"/>
             </a:xfrm>
             <a:prstGeom prst="rect">
               <a:avLst/>
@@ -14099,32 +17771,75 @@
             <a:bodyPr lIns="0" tIns="0" rIns="0" bIns="0" rtlCol="0" anchor="t">
               <a:spAutoFit/>
             </a:bodyPr>
-            <a:lstStyle/>
+            <a:lstStyle>
+              <a:defPPr>
+                <a:defRPr lang="en-US"/>
+              </a:defPPr>
+              <a:lvl1pPr marL="457200" lvl="0" indent="-457200">
+                <a:buFont typeface="+mj-lt"/>
+                <a:buAutoNum type="arabicPeriod"/>
+                <a:defRPr sz="2400"/>
+              </a:lvl1pPr>
+            </a:lstStyle>
             <a:p>
-              <a:pPr algn="l">
-                <a:lnSpc>
-                  <a:spcPts val="3884"/>
-                </a:lnSpc>
+              <a:pPr>
+                <a:buFont typeface="Arial" panose="020B0604020202020204" pitchFamily="34" charset="0"/>
+                <a:buChar char="•"/>
               </a:pPr>
               <a:r>
-                <a:rPr lang="en-US" sz="2775" b="1">
-                  <a:solidFill>
-                    <a:srgbClr val="FFFFFF"/>
-                  </a:solidFill>
-                  <a:latin typeface="Bricolage Grotesque Bold"/>
-                  <a:ea typeface="Bricolage Grotesque Bold"/>
-                  <a:cs typeface="Bricolage Grotesque Bold"/>
-                  <a:sym typeface="Bricolage Grotesque Bold"/>
-                </a:rPr>
-                <a:t>Analisis Kredibilitas Informasi</a:t>
+                <a:rPr lang="en-ID" dirty="0"/>
+                <a:t>Zakaria Rizky Latif, </a:t>
               </a:r>
+            </a:p>
+            <a:p>
+              <a:pPr>
+                <a:buFont typeface="Arial" panose="020B0604020202020204" pitchFamily="34" charset="0"/>
+                <a:buChar char="•"/>
+              </a:pPr>
+              <a:r>
+                <a:rPr lang="en-ID" dirty="0"/>
+                <a:t>Dedek Bara Samudra, </a:t>
+              </a:r>
+            </a:p>
+            <a:p>
+              <a:pPr>
+                <a:buFont typeface="Arial" panose="020B0604020202020204" pitchFamily="34" charset="0"/>
+                <a:buChar char="•"/>
+              </a:pPr>
+              <a:r>
+                <a:rPr lang="en-ID" dirty="0" err="1"/>
+                <a:t>Hafiyyan</a:t>
+              </a:r>
+              <a:r>
+                <a:rPr lang="en-ID" dirty="0"/>
+                <a:t> Ghani, </a:t>
+              </a:r>
+            </a:p>
+            <a:p>
+              <a:pPr>
+                <a:buFont typeface="Arial" panose="020B0604020202020204" pitchFamily="34" charset="0"/>
+                <a:buChar char="•"/>
+              </a:pPr>
+              <a:r>
+                <a:rPr lang="en-ID" dirty="0"/>
+                <a:t>Ramadhan Bagus Maulana </a:t>
+              </a:r>
+              <a:endParaRPr lang="en-US" dirty="0">
+                <a:sym typeface="Bricolage Grotesque Bold"/>
+              </a:endParaRPr>
             </a:p>
           </p:txBody>
         </p:sp>
       </p:grpSp>
       <p:sp>
         <p:nvSpPr>
-          <p:cNvPr id="29" name="TextBox 29"/>
+          <p:cNvPr id="38" name="TextBox 38">
+            <a:extLst>
+              <a:ext uri="{FF2B5EF4-FFF2-40B4-BE49-F238E27FC236}">
+                <a16:creationId xmlns:a16="http://schemas.microsoft.com/office/drawing/2014/main" id="{4484D7A7-8DAB-AF71-3DEB-3C6F61352D5E}"/>
+              </a:ext>
+            </a:extLst>
+          </p:cNvPr>
           <p:cNvSpPr txBox="1"/>
           <p:nvPr/>
         </p:nvSpPr>
@@ -14165,7 +17880,13 @@
       </p:sp>
       <p:sp>
         <p:nvSpPr>
-          <p:cNvPr id="30" name="TextBox 30"/>
+          <p:cNvPr id="39" name="TextBox 39">
+            <a:extLst>
+              <a:ext uri="{FF2B5EF4-FFF2-40B4-BE49-F238E27FC236}">
+                <a16:creationId xmlns:a16="http://schemas.microsoft.com/office/drawing/2014/main" id="{B537714E-BF32-CD99-1C6E-8D14EF10F141}"/>
+              </a:ext>
+            </a:extLst>
+          </p:cNvPr>
           <p:cNvSpPr txBox="1"/>
           <p:nvPr/>
         </p:nvSpPr>
@@ -14199,12 +17920,2248 @@
                 <a:cs typeface="Archivo Black"/>
                 <a:sym typeface="Archivo Black"/>
               </a:rPr>
-              <a:t>02</a:t>
+              <a:t>18</a:t>
+            </a:r>
+          </a:p>
+        </p:txBody>
+      </p:sp>
+      <p:grpSp>
+        <p:nvGrpSpPr>
+          <p:cNvPr id="48" name="Group 13">
+            <a:extLst>
+              <a:ext uri="{FF2B5EF4-FFF2-40B4-BE49-F238E27FC236}">
+                <a16:creationId xmlns:a16="http://schemas.microsoft.com/office/drawing/2014/main" id="{698D1A1F-002B-33AC-1A62-65E99370A0A3}"/>
+              </a:ext>
+            </a:extLst>
+          </p:cNvPr>
+          <p:cNvGrpSpPr/>
+          <p:nvPr/>
+        </p:nvGrpSpPr>
+        <p:grpSpPr>
+          <a:xfrm>
+            <a:off x="11759797" y="2351678"/>
+            <a:ext cx="4340360" cy="1809750"/>
+            <a:chOff x="0" y="0"/>
+            <a:chExt cx="10563266" cy="2413000"/>
+          </a:xfrm>
+        </p:grpSpPr>
+        <p:grpSp>
+          <p:nvGrpSpPr>
+            <p:cNvPr id="49" name="Group 14">
+              <a:extLst>
+                <a:ext uri="{FF2B5EF4-FFF2-40B4-BE49-F238E27FC236}">
+                  <a16:creationId xmlns:a16="http://schemas.microsoft.com/office/drawing/2014/main" id="{01E7AA1E-EA87-B959-BB57-8E869C9AA1DE}"/>
+                </a:ext>
+              </a:extLst>
+            </p:cNvPr>
+            <p:cNvGrpSpPr/>
+            <p:nvPr/>
+          </p:nvGrpSpPr>
+          <p:grpSpPr>
+            <a:xfrm>
+              <a:off x="0" y="0"/>
+              <a:ext cx="10414000" cy="2413000"/>
+              <a:chOff x="0" y="0"/>
+              <a:chExt cx="10414000" cy="2413000"/>
+            </a:xfrm>
+          </p:grpSpPr>
+          <p:sp>
+            <p:nvSpPr>
+              <p:cNvPr id="54" name="Freeform 15">
+                <a:extLst>
+                  <a:ext uri="{FF2B5EF4-FFF2-40B4-BE49-F238E27FC236}">
+                    <a16:creationId xmlns:a16="http://schemas.microsoft.com/office/drawing/2014/main" id="{25231F14-3C8E-DE84-3E5B-BB4903082843}"/>
+                  </a:ext>
+                </a:extLst>
+              </p:cNvPr>
+              <p:cNvSpPr/>
+              <p:nvPr/>
+            </p:nvSpPr>
+            <p:spPr>
+              <a:xfrm>
+                <a:off x="0" y="0"/>
+                <a:ext cx="10414000" cy="2413000"/>
+              </a:xfrm>
+              <a:custGeom>
+                <a:avLst/>
+                <a:gdLst/>
+                <a:ahLst/>
+                <a:cxnLst/>
+                <a:rect l="l" t="t" r="r" b="b"/>
+                <a:pathLst>
+                  <a:path w="10414000" h="2413000">
+                    <a:moveTo>
+                      <a:pt x="0" y="0"/>
+                    </a:moveTo>
+                    <a:lnTo>
+                      <a:pt x="10414000" y="0"/>
+                    </a:lnTo>
+                    <a:lnTo>
+                      <a:pt x="10414000" y="2413000"/>
+                    </a:lnTo>
+                    <a:lnTo>
+                      <a:pt x="0" y="2413000"/>
+                    </a:lnTo>
+                    <a:close/>
+                  </a:path>
+                </a:pathLst>
+              </a:custGeom>
+              <a:solidFill>
+                <a:srgbClr val="FFFFFF"/>
+              </a:solidFill>
+              <a:ln cap="sq">
+                <a:noFill/>
+                <a:prstDash val="solid"/>
+                <a:miter/>
+              </a:ln>
+            </p:spPr>
+            <p:txBody>
+              <a:bodyPr/>
+              <a:lstStyle/>
+              <a:p>
+                <a:pPr marL="285750" indent="-285750">
+                  <a:buFont typeface="Arial" panose="020B0604020202020204" pitchFamily="34" charset="0"/>
+                  <a:buChar char="•"/>
+                </a:pPr>
+                <a:endParaRPr lang="en-US"/>
+              </a:p>
+            </p:txBody>
+          </p:sp>
+          <p:sp>
+            <p:nvSpPr>
+              <p:cNvPr id="55" name="TextBox 16">
+                <a:extLst>
+                  <a:ext uri="{FF2B5EF4-FFF2-40B4-BE49-F238E27FC236}">
+                    <a16:creationId xmlns:a16="http://schemas.microsoft.com/office/drawing/2014/main" id="{11DC4C3D-91D5-9064-03DB-D93508EF42D9}"/>
+                  </a:ext>
+                </a:extLst>
+              </p:cNvPr>
+              <p:cNvSpPr txBox="1"/>
+              <p:nvPr/>
+            </p:nvSpPr>
+            <p:spPr>
+              <a:xfrm>
+                <a:off x="0" y="-38100"/>
+                <a:ext cx="10414000" cy="2451100"/>
+              </a:xfrm>
+              <a:prstGeom prst="rect">
+                <a:avLst/>
+              </a:prstGeom>
+            </p:spPr>
+            <p:txBody>
+              <a:bodyPr lIns="50800" tIns="50800" rIns="50800" bIns="50800" rtlCol="0" anchor="ctr"/>
+              <a:lstStyle/>
+              <a:p>
+                <a:pPr marL="285750" indent="-285750" algn="l">
+                  <a:lnSpc>
+                    <a:spcPts val="1679"/>
+                  </a:lnSpc>
+                  <a:buFont typeface="Arial" panose="020B0604020202020204" pitchFamily="34" charset="0"/>
+                  <a:buChar char="•"/>
+                </a:pPr>
+                <a:endParaRPr/>
+              </a:p>
+            </p:txBody>
+          </p:sp>
+        </p:grpSp>
+        <p:grpSp>
+          <p:nvGrpSpPr>
+            <p:cNvPr id="50" name="Group 17">
+              <a:extLst>
+                <a:ext uri="{FF2B5EF4-FFF2-40B4-BE49-F238E27FC236}">
+                  <a16:creationId xmlns:a16="http://schemas.microsoft.com/office/drawing/2014/main" id="{AA9D567C-C420-7755-0BB8-D0D40F9E39AB}"/>
+                </a:ext>
+              </a:extLst>
+            </p:cNvPr>
+            <p:cNvGrpSpPr/>
+            <p:nvPr/>
+          </p:nvGrpSpPr>
+          <p:grpSpPr>
+            <a:xfrm>
+              <a:off x="0" y="0"/>
+              <a:ext cx="152400" cy="2413000"/>
+              <a:chOff x="0" y="0"/>
+              <a:chExt cx="152400" cy="2413000"/>
+            </a:xfrm>
+          </p:grpSpPr>
+          <p:sp>
+            <p:nvSpPr>
+              <p:cNvPr id="52" name="Freeform 18">
+                <a:extLst>
+                  <a:ext uri="{FF2B5EF4-FFF2-40B4-BE49-F238E27FC236}">
+                    <a16:creationId xmlns:a16="http://schemas.microsoft.com/office/drawing/2014/main" id="{0C9C20F3-5F63-C246-3BC2-173FEDE97341}"/>
+                  </a:ext>
+                </a:extLst>
+              </p:cNvPr>
+              <p:cNvSpPr/>
+              <p:nvPr/>
+            </p:nvSpPr>
+            <p:spPr>
+              <a:xfrm>
+                <a:off x="0" y="0"/>
+                <a:ext cx="152400" cy="2413000"/>
+              </a:xfrm>
+              <a:custGeom>
+                <a:avLst/>
+                <a:gdLst/>
+                <a:ahLst/>
+                <a:cxnLst/>
+                <a:rect l="l" t="t" r="r" b="b"/>
+                <a:pathLst>
+                  <a:path w="152400" h="2413000">
+                    <a:moveTo>
+                      <a:pt x="0" y="0"/>
+                    </a:moveTo>
+                    <a:lnTo>
+                      <a:pt x="152400" y="0"/>
+                    </a:lnTo>
+                    <a:lnTo>
+                      <a:pt x="152400" y="2413000"/>
+                    </a:lnTo>
+                    <a:lnTo>
+                      <a:pt x="0" y="2413000"/>
+                    </a:lnTo>
+                    <a:close/>
+                  </a:path>
+                </a:pathLst>
+              </a:custGeom>
+              <a:solidFill>
+                <a:srgbClr val="18A999"/>
+              </a:solidFill>
+              <a:ln cap="sq">
+                <a:noFill/>
+                <a:prstDash val="solid"/>
+                <a:miter/>
+              </a:ln>
+            </p:spPr>
+            <p:txBody>
+              <a:bodyPr/>
+              <a:lstStyle/>
+              <a:p>
+                <a:pPr marL="285750" indent="-285750">
+                  <a:buFont typeface="Arial" panose="020B0604020202020204" pitchFamily="34" charset="0"/>
+                  <a:buChar char="•"/>
+                </a:pPr>
+                <a:endParaRPr lang="en-US"/>
+              </a:p>
+            </p:txBody>
+          </p:sp>
+          <p:sp>
+            <p:nvSpPr>
+              <p:cNvPr id="53" name="TextBox 19">
+                <a:extLst>
+                  <a:ext uri="{FF2B5EF4-FFF2-40B4-BE49-F238E27FC236}">
+                    <a16:creationId xmlns:a16="http://schemas.microsoft.com/office/drawing/2014/main" id="{93C7A3D7-4542-BEE8-1B78-867A9500DE65}"/>
+                  </a:ext>
+                </a:extLst>
+              </p:cNvPr>
+              <p:cNvSpPr txBox="1"/>
+              <p:nvPr/>
+            </p:nvSpPr>
+            <p:spPr>
+              <a:xfrm>
+                <a:off x="0" y="-38100"/>
+                <a:ext cx="152400" cy="2451100"/>
+              </a:xfrm>
+              <a:prstGeom prst="rect">
+                <a:avLst/>
+              </a:prstGeom>
+            </p:spPr>
+            <p:txBody>
+              <a:bodyPr lIns="50800" tIns="50800" rIns="50800" bIns="50800" rtlCol="0" anchor="ctr"/>
+              <a:lstStyle/>
+              <a:p>
+                <a:pPr marL="285750" indent="-285750" algn="l">
+                  <a:lnSpc>
+                    <a:spcPts val="1679"/>
+                  </a:lnSpc>
+                  <a:buFont typeface="Arial" panose="020B0604020202020204" pitchFamily="34" charset="0"/>
+                  <a:buChar char="•"/>
+                </a:pPr>
+                <a:endParaRPr/>
+              </a:p>
+            </p:txBody>
+          </p:sp>
+        </p:grpSp>
+        <p:sp>
+          <p:nvSpPr>
+            <p:cNvPr id="51" name="TextBox 20">
+              <a:extLst>
+                <a:ext uri="{FF2B5EF4-FFF2-40B4-BE49-F238E27FC236}">
+                  <a16:creationId xmlns:a16="http://schemas.microsoft.com/office/drawing/2014/main" id="{C9EB08BA-963B-8B69-7DDA-4DF7D407A49D}"/>
+                </a:ext>
+              </a:extLst>
+            </p:cNvPr>
+            <p:cNvSpPr txBox="1"/>
+            <p:nvPr/>
+          </p:nvSpPr>
+          <p:spPr>
+            <a:xfrm>
+              <a:off x="363502" y="221615"/>
+              <a:ext cx="10199764" cy="1969771"/>
+            </a:xfrm>
+            <a:prstGeom prst="rect">
+              <a:avLst/>
+            </a:prstGeom>
+          </p:spPr>
+          <p:txBody>
+            <a:bodyPr wrap="square" lIns="0" tIns="0" rIns="0" bIns="0" rtlCol="0" anchor="t">
+              <a:spAutoFit/>
+            </a:bodyPr>
+            <a:lstStyle>
+              <a:defPPr>
+                <a:defRPr lang="en-US"/>
+              </a:defPPr>
+              <a:lvl1pPr marL="457200" lvl="0" indent="-457200">
+                <a:buFont typeface="+mj-lt"/>
+                <a:buAutoNum type="arabicPeriod"/>
+                <a:defRPr sz="2800"/>
+              </a:lvl1pPr>
+            </a:lstStyle>
+            <a:p>
+              <a:pPr>
+                <a:buFont typeface="Arial" panose="020B0604020202020204" pitchFamily="34" charset="0"/>
+                <a:buChar char="•"/>
+              </a:pPr>
+              <a:r>
+                <a:rPr lang="en-ID" sz="2400" dirty="0" err="1"/>
+                <a:t>Islamulloh</a:t>
+              </a:r>
+              <a:r>
+                <a:rPr lang="en-ID" sz="2400" dirty="0"/>
+                <a:t> Nur Muhammad, </a:t>
+              </a:r>
+            </a:p>
+            <a:p>
+              <a:pPr>
+                <a:buFont typeface="Arial" panose="020B0604020202020204" pitchFamily="34" charset="0"/>
+                <a:buChar char="•"/>
+              </a:pPr>
+              <a:r>
+                <a:rPr lang="en-ID" sz="2400" dirty="0"/>
+                <a:t>Ahmat Galih Pratama, </a:t>
+              </a:r>
+            </a:p>
+            <a:p>
+              <a:pPr>
+                <a:buFont typeface="Arial" panose="020B0604020202020204" pitchFamily="34" charset="0"/>
+                <a:buChar char="•"/>
+              </a:pPr>
+              <a:r>
+                <a:rPr lang="en-ID" sz="2400" dirty="0" err="1"/>
+                <a:t>Arga</a:t>
+              </a:r>
+              <a:r>
+                <a:rPr lang="en-ID" sz="2400" dirty="0"/>
+                <a:t> Galih Adha, </a:t>
+              </a:r>
+            </a:p>
+            <a:p>
+              <a:pPr>
+                <a:buFont typeface="Arial" panose="020B0604020202020204" pitchFamily="34" charset="0"/>
+                <a:buChar char="•"/>
+              </a:pPr>
+              <a:r>
+                <a:rPr lang="en-ID" sz="2400" dirty="0"/>
+                <a:t>Raka </a:t>
+              </a:r>
+              <a:r>
+                <a:rPr lang="en-ID" sz="2400" dirty="0" err="1"/>
+                <a:t>Arbima</a:t>
+              </a:r>
+              <a:r>
+                <a:rPr lang="en-ID" sz="2400" dirty="0"/>
+                <a:t> Putra </a:t>
+              </a:r>
+              <a:endParaRPr lang="en-US" sz="2400" dirty="0">
+                <a:sym typeface="Bricolage Grotesque Bold"/>
+              </a:endParaRPr>
+            </a:p>
+          </p:txBody>
+        </p:sp>
+      </p:grpSp>
+      <p:grpSp>
+        <p:nvGrpSpPr>
+          <p:cNvPr id="56" name="Group 29">
+            <a:extLst>
+              <a:ext uri="{FF2B5EF4-FFF2-40B4-BE49-F238E27FC236}">
+                <a16:creationId xmlns:a16="http://schemas.microsoft.com/office/drawing/2014/main" id="{ED91C3CB-AD27-7C5D-F307-36D641784D4D}"/>
+              </a:ext>
+            </a:extLst>
+          </p:cNvPr>
+          <p:cNvGrpSpPr/>
+          <p:nvPr/>
+        </p:nvGrpSpPr>
+        <p:grpSpPr>
+          <a:xfrm>
+            <a:off x="11821129" y="4635945"/>
+            <a:ext cx="4191000" cy="1809750"/>
+            <a:chOff x="0" y="0"/>
+            <a:chExt cx="10414000" cy="2413000"/>
+          </a:xfrm>
+        </p:grpSpPr>
+        <p:grpSp>
+          <p:nvGrpSpPr>
+            <p:cNvPr id="57" name="Group 30">
+              <a:extLst>
+                <a:ext uri="{FF2B5EF4-FFF2-40B4-BE49-F238E27FC236}">
+                  <a16:creationId xmlns:a16="http://schemas.microsoft.com/office/drawing/2014/main" id="{59A225B3-FB68-00E8-F81E-185CE3C93B0E}"/>
+                </a:ext>
+              </a:extLst>
+            </p:cNvPr>
+            <p:cNvGrpSpPr/>
+            <p:nvPr/>
+          </p:nvGrpSpPr>
+          <p:grpSpPr>
+            <a:xfrm>
+              <a:off x="0" y="0"/>
+              <a:ext cx="10414000" cy="2413000"/>
+              <a:chOff x="0" y="0"/>
+              <a:chExt cx="10414000" cy="2413000"/>
+            </a:xfrm>
+          </p:grpSpPr>
+          <p:sp>
+            <p:nvSpPr>
+              <p:cNvPr id="62" name="Freeform 31">
+                <a:extLst>
+                  <a:ext uri="{FF2B5EF4-FFF2-40B4-BE49-F238E27FC236}">
+                    <a16:creationId xmlns:a16="http://schemas.microsoft.com/office/drawing/2014/main" id="{FCC6332B-651D-E368-D4F7-134A2486C22F}"/>
+                  </a:ext>
+                </a:extLst>
+              </p:cNvPr>
+              <p:cNvSpPr/>
+              <p:nvPr/>
+            </p:nvSpPr>
+            <p:spPr>
+              <a:xfrm>
+                <a:off x="0" y="0"/>
+                <a:ext cx="10414000" cy="2413000"/>
+              </a:xfrm>
+              <a:custGeom>
+                <a:avLst/>
+                <a:gdLst/>
+                <a:ahLst/>
+                <a:cxnLst/>
+                <a:rect l="l" t="t" r="r" b="b"/>
+                <a:pathLst>
+                  <a:path w="10414000" h="2413000">
+                    <a:moveTo>
+                      <a:pt x="0" y="0"/>
+                    </a:moveTo>
+                    <a:lnTo>
+                      <a:pt x="10414000" y="0"/>
+                    </a:lnTo>
+                    <a:lnTo>
+                      <a:pt x="10414000" y="2413000"/>
+                    </a:lnTo>
+                    <a:lnTo>
+                      <a:pt x="0" y="2413000"/>
+                    </a:lnTo>
+                    <a:close/>
+                  </a:path>
+                </a:pathLst>
+              </a:custGeom>
+              <a:solidFill>
+                <a:srgbClr val="FFFFFF"/>
+              </a:solidFill>
+              <a:ln cap="sq">
+                <a:noFill/>
+                <a:prstDash val="solid"/>
+                <a:miter/>
+              </a:ln>
+            </p:spPr>
+            <p:txBody>
+              <a:bodyPr/>
+              <a:lstStyle/>
+              <a:p>
+                <a:pPr marL="285750" indent="-285750">
+                  <a:buFont typeface="Arial" panose="020B0604020202020204" pitchFamily="34" charset="0"/>
+                  <a:buChar char="•"/>
+                </a:pPr>
+                <a:endParaRPr lang="en-US"/>
+              </a:p>
+            </p:txBody>
+          </p:sp>
+          <p:sp>
+            <p:nvSpPr>
+              <p:cNvPr id="63" name="TextBox 32">
+                <a:extLst>
+                  <a:ext uri="{FF2B5EF4-FFF2-40B4-BE49-F238E27FC236}">
+                    <a16:creationId xmlns:a16="http://schemas.microsoft.com/office/drawing/2014/main" id="{B04B5BE7-E90A-F862-9E88-DB51528704B3}"/>
+                  </a:ext>
+                </a:extLst>
+              </p:cNvPr>
+              <p:cNvSpPr txBox="1"/>
+              <p:nvPr/>
+            </p:nvSpPr>
+            <p:spPr>
+              <a:xfrm>
+                <a:off x="0" y="-38100"/>
+                <a:ext cx="10414000" cy="2451100"/>
+              </a:xfrm>
+              <a:prstGeom prst="rect">
+                <a:avLst/>
+              </a:prstGeom>
+            </p:spPr>
+            <p:txBody>
+              <a:bodyPr lIns="50800" tIns="50800" rIns="50800" bIns="50800" rtlCol="0" anchor="ctr"/>
+              <a:lstStyle/>
+              <a:p>
+                <a:pPr marL="285750" indent="-285750" algn="l">
+                  <a:lnSpc>
+                    <a:spcPts val="1679"/>
+                  </a:lnSpc>
+                  <a:buFont typeface="Arial" panose="020B0604020202020204" pitchFamily="34" charset="0"/>
+                  <a:buChar char="•"/>
+                </a:pPr>
+                <a:endParaRPr/>
+              </a:p>
+            </p:txBody>
+          </p:sp>
+        </p:grpSp>
+        <p:grpSp>
+          <p:nvGrpSpPr>
+            <p:cNvPr id="58" name="Group 33">
+              <a:extLst>
+                <a:ext uri="{FF2B5EF4-FFF2-40B4-BE49-F238E27FC236}">
+                  <a16:creationId xmlns:a16="http://schemas.microsoft.com/office/drawing/2014/main" id="{13657C13-F893-DFC6-1C64-0D52ACA70E43}"/>
+                </a:ext>
+              </a:extLst>
+            </p:cNvPr>
+            <p:cNvGrpSpPr/>
+            <p:nvPr/>
+          </p:nvGrpSpPr>
+          <p:grpSpPr>
+            <a:xfrm>
+              <a:off x="0" y="0"/>
+              <a:ext cx="152400" cy="2413000"/>
+              <a:chOff x="0" y="0"/>
+              <a:chExt cx="152400" cy="2413000"/>
+            </a:xfrm>
+          </p:grpSpPr>
+          <p:sp>
+            <p:nvSpPr>
+              <p:cNvPr id="60" name="Freeform 34">
+                <a:extLst>
+                  <a:ext uri="{FF2B5EF4-FFF2-40B4-BE49-F238E27FC236}">
+                    <a16:creationId xmlns:a16="http://schemas.microsoft.com/office/drawing/2014/main" id="{C15621D1-A435-69B7-44A7-316D9848851A}"/>
+                  </a:ext>
+                </a:extLst>
+              </p:cNvPr>
+              <p:cNvSpPr/>
+              <p:nvPr/>
+            </p:nvSpPr>
+            <p:spPr>
+              <a:xfrm>
+                <a:off x="0" y="0"/>
+                <a:ext cx="152400" cy="2413000"/>
+              </a:xfrm>
+              <a:custGeom>
+                <a:avLst/>
+                <a:gdLst/>
+                <a:ahLst/>
+                <a:cxnLst/>
+                <a:rect l="l" t="t" r="r" b="b"/>
+                <a:pathLst>
+                  <a:path w="152400" h="2413000">
+                    <a:moveTo>
+                      <a:pt x="0" y="0"/>
+                    </a:moveTo>
+                    <a:lnTo>
+                      <a:pt x="152400" y="0"/>
+                    </a:lnTo>
+                    <a:lnTo>
+                      <a:pt x="152400" y="2413000"/>
+                    </a:lnTo>
+                    <a:lnTo>
+                      <a:pt x="0" y="2413000"/>
+                    </a:lnTo>
+                    <a:close/>
+                  </a:path>
+                </a:pathLst>
+              </a:custGeom>
+              <a:solidFill>
+                <a:srgbClr val="FFC857"/>
+              </a:solidFill>
+              <a:ln cap="sq">
+                <a:noFill/>
+                <a:prstDash val="solid"/>
+                <a:miter/>
+              </a:ln>
+            </p:spPr>
+            <p:txBody>
+              <a:bodyPr/>
+              <a:lstStyle/>
+              <a:p>
+                <a:pPr marL="285750" indent="-285750">
+                  <a:buFont typeface="Arial" panose="020B0604020202020204" pitchFamily="34" charset="0"/>
+                  <a:buChar char="•"/>
+                </a:pPr>
+                <a:endParaRPr lang="en-US"/>
+              </a:p>
+            </p:txBody>
+          </p:sp>
+          <p:sp>
+            <p:nvSpPr>
+              <p:cNvPr id="61" name="TextBox 35">
+                <a:extLst>
+                  <a:ext uri="{FF2B5EF4-FFF2-40B4-BE49-F238E27FC236}">
+                    <a16:creationId xmlns:a16="http://schemas.microsoft.com/office/drawing/2014/main" id="{C820DACD-8202-B083-5453-3AF63F400CCC}"/>
+                  </a:ext>
+                </a:extLst>
+              </p:cNvPr>
+              <p:cNvSpPr txBox="1"/>
+              <p:nvPr/>
+            </p:nvSpPr>
+            <p:spPr>
+              <a:xfrm>
+                <a:off x="0" y="-38100"/>
+                <a:ext cx="152400" cy="2451100"/>
+              </a:xfrm>
+              <a:prstGeom prst="rect">
+                <a:avLst/>
+              </a:prstGeom>
+            </p:spPr>
+            <p:txBody>
+              <a:bodyPr lIns="50800" tIns="50800" rIns="50800" bIns="50800" rtlCol="0" anchor="ctr"/>
+              <a:lstStyle/>
+              <a:p>
+                <a:pPr marL="285750" indent="-285750" algn="l">
+                  <a:lnSpc>
+                    <a:spcPts val="1679"/>
+                  </a:lnSpc>
+                  <a:buFont typeface="Arial" panose="020B0604020202020204" pitchFamily="34" charset="0"/>
+                  <a:buChar char="•"/>
+                </a:pPr>
+                <a:endParaRPr/>
+              </a:p>
+            </p:txBody>
+          </p:sp>
+        </p:grpSp>
+        <p:sp>
+          <p:nvSpPr>
+            <p:cNvPr id="59" name="TextBox 36">
+              <a:extLst>
+                <a:ext uri="{FF2B5EF4-FFF2-40B4-BE49-F238E27FC236}">
+                  <a16:creationId xmlns:a16="http://schemas.microsoft.com/office/drawing/2014/main" id="{E4408107-818B-5293-EDCE-E3E5486CD955}"/>
+                </a:ext>
+              </a:extLst>
+            </p:cNvPr>
+            <p:cNvSpPr txBox="1"/>
+            <p:nvPr/>
+          </p:nvSpPr>
+          <p:spPr>
+            <a:xfrm>
+              <a:off x="401467" y="268288"/>
+              <a:ext cx="9525001" cy="1969771"/>
+            </a:xfrm>
+            <a:prstGeom prst="rect">
+              <a:avLst/>
+            </a:prstGeom>
+          </p:spPr>
+          <p:txBody>
+            <a:bodyPr lIns="0" tIns="0" rIns="0" bIns="0" rtlCol="0" anchor="t">
+              <a:spAutoFit/>
+            </a:bodyPr>
+            <a:lstStyle>
+              <a:defPPr>
+                <a:defRPr lang="en-US"/>
+              </a:defPPr>
+              <a:lvl1pPr marL="457200" lvl="0" indent="-457200">
+                <a:buFont typeface="+mj-lt"/>
+                <a:buAutoNum type="arabicPeriod"/>
+                <a:defRPr sz="2400"/>
+              </a:lvl1pPr>
+            </a:lstStyle>
+            <a:p>
+              <a:pPr>
+                <a:buFont typeface="Arial" panose="020B0604020202020204" pitchFamily="34" charset="0"/>
+                <a:buChar char="•"/>
+              </a:pPr>
+              <a:r>
+                <a:rPr lang="en-ID" dirty="0"/>
+                <a:t>Arnoldus Anjar </a:t>
+              </a:r>
+              <a:r>
+                <a:rPr lang="en-ID" dirty="0" err="1"/>
+                <a:t>Prakoso</a:t>
+              </a:r>
+              <a:r>
+                <a:rPr lang="en-ID" dirty="0"/>
+                <a:t>, </a:t>
+              </a:r>
+            </a:p>
+            <a:p>
+              <a:pPr>
+                <a:buFont typeface="Arial" panose="020B0604020202020204" pitchFamily="34" charset="0"/>
+                <a:buChar char="•"/>
+              </a:pPr>
+              <a:r>
+                <a:rPr lang="en-ID" dirty="0"/>
+                <a:t>Chenia Wahyu </a:t>
+              </a:r>
+              <a:r>
+                <a:rPr lang="en-ID" dirty="0" err="1"/>
+                <a:t>Indahsari</a:t>
+              </a:r>
+              <a:r>
+                <a:rPr lang="en-ID" dirty="0"/>
+                <a:t>, </a:t>
+              </a:r>
+            </a:p>
+            <a:p>
+              <a:pPr>
+                <a:buFont typeface="Arial" panose="020B0604020202020204" pitchFamily="34" charset="0"/>
+                <a:buChar char="•"/>
+              </a:pPr>
+              <a:r>
+                <a:rPr lang="en-ID" dirty="0" err="1"/>
+                <a:t>Ligar</a:t>
+              </a:r>
+              <a:r>
+                <a:rPr lang="en-ID" dirty="0"/>
+                <a:t> Aji Pratama, </a:t>
+              </a:r>
+            </a:p>
+            <a:p>
+              <a:pPr>
+                <a:buFont typeface="Arial" panose="020B0604020202020204" pitchFamily="34" charset="0"/>
+                <a:buChar char="•"/>
+              </a:pPr>
+              <a:r>
+                <a:rPr lang="en-ID" dirty="0"/>
+                <a:t>Zaki </a:t>
+              </a:r>
+              <a:r>
+                <a:rPr lang="en-ID" dirty="0" err="1"/>
+                <a:t>Yuantama</a:t>
+              </a:r>
+              <a:r>
+                <a:rPr lang="en-ID" dirty="0"/>
+                <a:t> Putra </a:t>
+              </a:r>
+              <a:endParaRPr lang="en-US" dirty="0">
+                <a:sym typeface="Bricolage Grotesque Bold"/>
+              </a:endParaRPr>
+            </a:p>
+          </p:txBody>
+        </p:sp>
+      </p:grpSp>
+      <p:grpSp>
+        <p:nvGrpSpPr>
+          <p:cNvPr id="64" name="Group 21">
+            <a:extLst>
+              <a:ext uri="{FF2B5EF4-FFF2-40B4-BE49-F238E27FC236}">
+                <a16:creationId xmlns:a16="http://schemas.microsoft.com/office/drawing/2014/main" id="{70BF1702-0838-97D0-E308-461FE8DA5ABC}"/>
+              </a:ext>
+            </a:extLst>
+          </p:cNvPr>
+          <p:cNvGrpSpPr/>
+          <p:nvPr/>
+        </p:nvGrpSpPr>
+        <p:grpSpPr>
+          <a:xfrm>
+            <a:off x="2084096" y="7046204"/>
+            <a:ext cx="4191000" cy="1809750"/>
+            <a:chOff x="0" y="0"/>
+            <a:chExt cx="10414000" cy="2413000"/>
+          </a:xfrm>
+        </p:grpSpPr>
+        <p:grpSp>
+          <p:nvGrpSpPr>
+            <p:cNvPr id="65" name="Group 22">
+              <a:extLst>
+                <a:ext uri="{FF2B5EF4-FFF2-40B4-BE49-F238E27FC236}">
+                  <a16:creationId xmlns:a16="http://schemas.microsoft.com/office/drawing/2014/main" id="{49403C47-02F2-AB91-9A7B-E4E73D520F0F}"/>
+                </a:ext>
+              </a:extLst>
+            </p:cNvPr>
+            <p:cNvGrpSpPr/>
+            <p:nvPr/>
+          </p:nvGrpSpPr>
+          <p:grpSpPr>
+            <a:xfrm>
+              <a:off x="0" y="0"/>
+              <a:ext cx="10414000" cy="2413000"/>
+              <a:chOff x="0" y="0"/>
+              <a:chExt cx="10414000" cy="2413000"/>
+            </a:xfrm>
+          </p:grpSpPr>
+          <p:sp>
+            <p:nvSpPr>
+              <p:cNvPr id="70" name="Freeform 23">
+                <a:extLst>
+                  <a:ext uri="{FF2B5EF4-FFF2-40B4-BE49-F238E27FC236}">
+                    <a16:creationId xmlns:a16="http://schemas.microsoft.com/office/drawing/2014/main" id="{5DD31EAF-7C50-F27B-59BD-742ADB99ECC9}"/>
+                  </a:ext>
+                </a:extLst>
+              </p:cNvPr>
+              <p:cNvSpPr/>
+              <p:nvPr/>
+            </p:nvSpPr>
+            <p:spPr>
+              <a:xfrm>
+                <a:off x="0" y="0"/>
+                <a:ext cx="10414000" cy="2413000"/>
+              </a:xfrm>
+              <a:custGeom>
+                <a:avLst/>
+                <a:gdLst/>
+                <a:ahLst/>
+                <a:cxnLst/>
+                <a:rect l="l" t="t" r="r" b="b"/>
+                <a:pathLst>
+                  <a:path w="10414000" h="2413000">
+                    <a:moveTo>
+                      <a:pt x="0" y="0"/>
+                    </a:moveTo>
+                    <a:lnTo>
+                      <a:pt x="10414000" y="0"/>
+                    </a:lnTo>
+                    <a:lnTo>
+                      <a:pt x="10414000" y="2413000"/>
+                    </a:lnTo>
+                    <a:lnTo>
+                      <a:pt x="0" y="2413000"/>
+                    </a:lnTo>
+                    <a:close/>
+                  </a:path>
+                </a:pathLst>
+              </a:custGeom>
+              <a:solidFill>
+                <a:srgbClr val="FFFFFF"/>
+              </a:solidFill>
+              <a:ln cap="sq">
+                <a:noFill/>
+                <a:prstDash val="solid"/>
+                <a:miter/>
+              </a:ln>
+            </p:spPr>
+            <p:txBody>
+              <a:bodyPr/>
+              <a:lstStyle/>
+              <a:p>
+                <a:pPr marL="285750" indent="-285750">
+                  <a:buFont typeface="Arial" panose="020B0604020202020204" pitchFamily="34" charset="0"/>
+                  <a:buChar char="•"/>
+                </a:pPr>
+                <a:endParaRPr lang="en-US"/>
+              </a:p>
+            </p:txBody>
+          </p:sp>
+          <p:sp>
+            <p:nvSpPr>
+              <p:cNvPr id="71" name="TextBox 24">
+                <a:extLst>
+                  <a:ext uri="{FF2B5EF4-FFF2-40B4-BE49-F238E27FC236}">
+                    <a16:creationId xmlns:a16="http://schemas.microsoft.com/office/drawing/2014/main" id="{1238D425-38E5-5B29-C7AE-52AD6FB59523}"/>
+                  </a:ext>
+                </a:extLst>
+              </p:cNvPr>
+              <p:cNvSpPr txBox="1"/>
+              <p:nvPr/>
+            </p:nvSpPr>
+            <p:spPr>
+              <a:xfrm>
+                <a:off x="0" y="-38100"/>
+                <a:ext cx="10414000" cy="2451100"/>
+              </a:xfrm>
+              <a:prstGeom prst="rect">
+                <a:avLst/>
+              </a:prstGeom>
+            </p:spPr>
+            <p:txBody>
+              <a:bodyPr lIns="50800" tIns="50800" rIns="50800" bIns="50800" rtlCol="0" anchor="ctr"/>
+              <a:lstStyle/>
+              <a:p>
+                <a:pPr marL="285750" indent="-285750" algn="l">
+                  <a:lnSpc>
+                    <a:spcPts val="1679"/>
+                  </a:lnSpc>
+                  <a:buFont typeface="Arial" panose="020B0604020202020204" pitchFamily="34" charset="0"/>
+                  <a:buChar char="•"/>
+                </a:pPr>
+                <a:endParaRPr/>
+              </a:p>
+            </p:txBody>
+          </p:sp>
+        </p:grpSp>
+        <p:grpSp>
+          <p:nvGrpSpPr>
+            <p:cNvPr id="66" name="Group 25">
+              <a:extLst>
+                <a:ext uri="{FF2B5EF4-FFF2-40B4-BE49-F238E27FC236}">
+                  <a16:creationId xmlns:a16="http://schemas.microsoft.com/office/drawing/2014/main" id="{96DD4403-2C6A-E745-C831-DFF41BECB7AB}"/>
+                </a:ext>
+              </a:extLst>
+            </p:cNvPr>
+            <p:cNvGrpSpPr/>
+            <p:nvPr/>
+          </p:nvGrpSpPr>
+          <p:grpSpPr>
+            <a:xfrm>
+              <a:off x="0" y="0"/>
+              <a:ext cx="152400" cy="2413000"/>
+              <a:chOff x="0" y="0"/>
+              <a:chExt cx="152400" cy="2413000"/>
+            </a:xfrm>
+          </p:grpSpPr>
+          <p:sp>
+            <p:nvSpPr>
+              <p:cNvPr id="68" name="Freeform 26">
+                <a:extLst>
+                  <a:ext uri="{FF2B5EF4-FFF2-40B4-BE49-F238E27FC236}">
+                    <a16:creationId xmlns:a16="http://schemas.microsoft.com/office/drawing/2014/main" id="{5F91EE0F-BC05-6918-A5C8-FD9B1E7013FD}"/>
+                  </a:ext>
+                </a:extLst>
+              </p:cNvPr>
+              <p:cNvSpPr/>
+              <p:nvPr/>
+            </p:nvSpPr>
+            <p:spPr>
+              <a:xfrm>
+                <a:off x="0" y="0"/>
+                <a:ext cx="152400" cy="2413000"/>
+              </a:xfrm>
+              <a:custGeom>
+                <a:avLst/>
+                <a:gdLst/>
+                <a:ahLst/>
+                <a:cxnLst/>
+                <a:rect l="l" t="t" r="r" b="b"/>
+                <a:pathLst>
+                  <a:path w="152400" h="2413000">
+                    <a:moveTo>
+                      <a:pt x="0" y="0"/>
+                    </a:moveTo>
+                    <a:lnTo>
+                      <a:pt x="152400" y="0"/>
+                    </a:lnTo>
+                    <a:lnTo>
+                      <a:pt x="152400" y="2413000"/>
+                    </a:lnTo>
+                    <a:lnTo>
+                      <a:pt x="0" y="2413000"/>
+                    </a:lnTo>
+                    <a:close/>
+                  </a:path>
+                </a:pathLst>
+              </a:custGeom>
+              <a:solidFill>
+                <a:srgbClr val="FFC857"/>
+              </a:solidFill>
+              <a:ln cap="sq">
+                <a:noFill/>
+                <a:prstDash val="solid"/>
+                <a:miter/>
+              </a:ln>
+            </p:spPr>
+            <p:txBody>
+              <a:bodyPr/>
+              <a:lstStyle/>
+              <a:p>
+                <a:pPr marL="285750" indent="-285750">
+                  <a:buFont typeface="Arial" panose="020B0604020202020204" pitchFamily="34" charset="0"/>
+                  <a:buChar char="•"/>
+                </a:pPr>
+                <a:endParaRPr lang="en-US"/>
+              </a:p>
+            </p:txBody>
+          </p:sp>
+          <p:sp>
+            <p:nvSpPr>
+              <p:cNvPr id="69" name="TextBox 27">
+                <a:extLst>
+                  <a:ext uri="{FF2B5EF4-FFF2-40B4-BE49-F238E27FC236}">
+                    <a16:creationId xmlns:a16="http://schemas.microsoft.com/office/drawing/2014/main" id="{045229B6-3255-EDE8-E994-39C55F6BFB82}"/>
+                  </a:ext>
+                </a:extLst>
+              </p:cNvPr>
+              <p:cNvSpPr txBox="1"/>
+              <p:nvPr/>
+            </p:nvSpPr>
+            <p:spPr>
+              <a:xfrm>
+                <a:off x="0" y="-38100"/>
+                <a:ext cx="152400" cy="2451100"/>
+              </a:xfrm>
+              <a:prstGeom prst="rect">
+                <a:avLst/>
+              </a:prstGeom>
+            </p:spPr>
+            <p:txBody>
+              <a:bodyPr lIns="50800" tIns="50800" rIns="50800" bIns="50800" rtlCol="0" anchor="ctr"/>
+              <a:lstStyle/>
+              <a:p>
+                <a:pPr marL="285750" indent="-285750" algn="l">
+                  <a:lnSpc>
+                    <a:spcPts val="1679"/>
+                  </a:lnSpc>
+                  <a:buFont typeface="Arial" panose="020B0604020202020204" pitchFamily="34" charset="0"/>
+                  <a:buChar char="•"/>
+                </a:pPr>
+                <a:endParaRPr/>
+              </a:p>
+            </p:txBody>
+          </p:sp>
+        </p:grpSp>
+        <p:sp>
+          <p:nvSpPr>
+            <p:cNvPr id="67" name="TextBox 28">
+              <a:extLst>
+                <a:ext uri="{FF2B5EF4-FFF2-40B4-BE49-F238E27FC236}">
+                  <a16:creationId xmlns:a16="http://schemas.microsoft.com/office/drawing/2014/main" id="{96284D83-5F42-93E6-E33F-38F6DFB65226}"/>
+                </a:ext>
+              </a:extLst>
+            </p:cNvPr>
+            <p:cNvSpPr txBox="1"/>
+            <p:nvPr/>
+          </p:nvSpPr>
+          <p:spPr>
+            <a:xfrm>
+              <a:off x="444500" y="221613"/>
+              <a:ext cx="9525001" cy="1969771"/>
+            </a:xfrm>
+            <a:prstGeom prst="rect">
+              <a:avLst/>
+            </a:prstGeom>
+          </p:spPr>
+          <p:txBody>
+            <a:bodyPr wrap="square" lIns="0" tIns="0" rIns="0" bIns="0" rtlCol="0" anchor="t">
+              <a:spAutoFit/>
+            </a:bodyPr>
+            <a:lstStyle>
+              <a:defPPr>
+                <a:defRPr lang="en-US"/>
+              </a:defPPr>
+              <a:lvl1pPr marL="457200" lvl="0" indent="-457200">
+                <a:buFont typeface="+mj-lt"/>
+                <a:buAutoNum type="arabicPeriod"/>
+                <a:defRPr sz="2400"/>
+              </a:lvl1pPr>
+            </a:lstStyle>
+            <a:p>
+              <a:pPr>
+                <a:buFont typeface="Arial" panose="020B0604020202020204" pitchFamily="34" charset="0"/>
+                <a:buChar char="•"/>
+              </a:pPr>
+              <a:r>
+                <a:rPr lang="en-ID" dirty="0" err="1"/>
+                <a:t>Mahatva</a:t>
+              </a:r>
+              <a:r>
+                <a:rPr lang="en-ID" dirty="0"/>
+                <a:t> </a:t>
+              </a:r>
+              <a:r>
+                <a:rPr lang="en-ID" dirty="0" err="1"/>
+                <a:t>Yudha</a:t>
+              </a:r>
+              <a:r>
+                <a:rPr lang="en-ID" dirty="0"/>
+                <a:t> Satria, </a:t>
+              </a:r>
+            </a:p>
+            <a:p>
+              <a:pPr>
+                <a:buFont typeface="Arial" panose="020B0604020202020204" pitchFamily="34" charset="0"/>
+                <a:buChar char="•"/>
+              </a:pPr>
+              <a:r>
+                <a:rPr lang="en-ID" dirty="0"/>
+                <a:t>Apolinaris Morel </a:t>
+              </a:r>
+              <a:r>
+                <a:rPr lang="en-ID" dirty="0" err="1"/>
+                <a:t>Radhitya</a:t>
+              </a:r>
+              <a:r>
+                <a:rPr lang="en-ID" dirty="0"/>
+                <a:t>, </a:t>
+              </a:r>
+            </a:p>
+            <a:p>
+              <a:pPr>
+                <a:buFont typeface="Arial" panose="020B0604020202020204" pitchFamily="34" charset="0"/>
+                <a:buChar char="•"/>
+              </a:pPr>
+              <a:r>
+                <a:rPr lang="en-ID" dirty="0"/>
+                <a:t>Fathan </a:t>
+              </a:r>
+              <a:r>
+                <a:rPr lang="en-ID" dirty="0" err="1"/>
+                <a:t>Fakhrizal</a:t>
+              </a:r>
+              <a:r>
+                <a:rPr lang="en-ID" dirty="0"/>
+                <a:t>, </a:t>
+              </a:r>
+            </a:p>
+            <a:p>
+              <a:pPr>
+                <a:buFont typeface="Arial" panose="020B0604020202020204" pitchFamily="34" charset="0"/>
+                <a:buChar char="•"/>
+              </a:pPr>
+              <a:r>
+                <a:rPr lang="en-ID" dirty="0" err="1"/>
+                <a:t>Relygiano</a:t>
+              </a:r>
+              <a:r>
+                <a:rPr lang="en-ID" dirty="0"/>
+                <a:t> </a:t>
+              </a:r>
+              <a:r>
+                <a:rPr lang="en-ID" dirty="0" err="1"/>
+                <a:t>Dwibhima</a:t>
+              </a:r>
+              <a:r>
+                <a:rPr lang="en-ID" dirty="0"/>
+                <a:t> </a:t>
+              </a:r>
+              <a:endParaRPr lang="en-US" dirty="0">
+                <a:sym typeface="Bricolage Grotesque Bold"/>
+              </a:endParaRPr>
+            </a:p>
+          </p:txBody>
+        </p:sp>
+      </p:grpSp>
+      <p:grpSp>
+        <p:nvGrpSpPr>
+          <p:cNvPr id="72" name="Group 29">
+            <a:extLst>
+              <a:ext uri="{FF2B5EF4-FFF2-40B4-BE49-F238E27FC236}">
+                <a16:creationId xmlns:a16="http://schemas.microsoft.com/office/drawing/2014/main" id="{54F11444-0D2B-2757-C6E6-4D942B8D2A64}"/>
+              </a:ext>
+            </a:extLst>
+          </p:cNvPr>
+          <p:cNvGrpSpPr/>
+          <p:nvPr/>
+        </p:nvGrpSpPr>
+        <p:grpSpPr>
+          <a:xfrm>
+            <a:off x="6963591" y="7000743"/>
+            <a:ext cx="4191000" cy="1873665"/>
+            <a:chOff x="0" y="0"/>
+            <a:chExt cx="10414000" cy="2498220"/>
+          </a:xfrm>
+        </p:grpSpPr>
+        <p:grpSp>
+          <p:nvGrpSpPr>
+            <p:cNvPr id="73" name="Group 30">
+              <a:extLst>
+                <a:ext uri="{FF2B5EF4-FFF2-40B4-BE49-F238E27FC236}">
+                  <a16:creationId xmlns:a16="http://schemas.microsoft.com/office/drawing/2014/main" id="{ACFAB819-C6E3-8DE7-46BA-7C2F0B65B886}"/>
+                </a:ext>
+              </a:extLst>
+            </p:cNvPr>
+            <p:cNvGrpSpPr/>
+            <p:nvPr/>
+          </p:nvGrpSpPr>
+          <p:grpSpPr>
+            <a:xfrm>
+              <a:off x="0" y="0"/>
+              <a:ext cx="10414000" cy="2413000"/>
+              <a:chOff x="0" y="0"/>
+              <a:chExt cx="10414000" cy="2413000"/>
+            </a:xfrm>
+          </p:grpSpPr>
+          <p:sp>
+            <p:nvSpPr>
+              <p:cNvPr id="78" name="Freeform 31">
+                <a:extLst>
+                  <a:ext uri="{FF2B5EF4-FFF2-40B4-BE49-F238E27FC236}">
+                    <a16:creationId xmlns:a16="http://schemas.microsoft.com/office/drawing/2014/main" id="{1A15EC12-0D44-0318-0EFC-8F2EB7C2AA81}"/>
+                  </a:ext>
+                </a:extLst>
+              </p:cNvPr>
+              <p:cNvSpPr/>
+              <p:nvPr/>
+            </p:nvSpPr>
+            <p:spPr>
+              <a:xfrm>
+                <a:off x="0" y="0"/>
+                <a:ext cx="10414000" cy="2413000"/>
+              </a:xfrm>
+              <a:custGeom>
+                <a:avLst/>
+                <a:gdLst/>
+                <a:ahLst/>
+                <a:cxnLst/>
+                <a:rect l="l" t="t" r="r" b="b"/>
+                <a:pathLst>
+                  <a:path w="10414000" h="2413000">
+                    <a:moveTo>
+                      <a:pt x="0" y="0"/>
+                    </a:moveTo>
+                    <a:lnTo>
+                      <a:pt x="10414000" y="0"/>
+                    </a:lnTo>
+                    <a:lnTo>
+                      <a:pt x="10414000" y="2413000"/>
+                    </a:lnTo>
+                    <a:lnTo>
+                      <a:pt x="0" y="2413000"/>
+                    </a:lnTo>
+                    <a:close/>
+                  </a:path>
+                </a:pathLst>
+              </a:custGeom>
+              <a:solidFill>
+                <a:srgbClr val="FFFFFF"/>
+              </a:solidFill>
+              <a:ln cap="sq">
+                <a:noFill/>
+                <a:prstDash val="solid"/>
+                <a:miter/>
+              </a:ln>
+            </p:spPr>
+            <p:txBody>
+              <a:bodyPr/>
+              <a:lstStyle/>
+              <a:p>
+                <a:pPr marL="285750" indent="-285750">
+                  <a:buFont typeface="Arial" panose="020B0604020202020204" pitchFamily="34" charset="0"/>
+                  <a:buChar char="•"/>
+                </a:pPr>
+                <a:endParaRPr lang="en-US"/>
+              </a:p>
+            </p:txBody>
+          </p:sp>
+          <p:sp>
+            <p:nvSpPr>
+              <p:cNvPr id="79" name="TextBox 32">
+                <a:extLst>
+                  <a:ext uri="{FF2B5EF4-FFF2-40B4-BE49-F238E27FC236}">
+                    <a16:creationId xmlns:a16="http://schemas.microsoft.com/office/drawing/2014/main" id="{F3C0819C-B960-A747-328B-E89E88A92081}"/>
+                  </a:ext>
+                </a:extLst>
+              </p:cNvPr>
+              <p:cNvSpPr txBox="1"/>
+              <p:nvPr/>
+            </p:nvSpPr>
+            <p:spPr>
+              <a:xfrm>
+                <a:off x="0" y="-38100"/>
+                <a:ext cx="10414000" cy="2451100"/>
+              </a:xfrm>
+              <a:prstGeom prst="rect">
+                <a:avLst/>
+              </a:prstGeom>
+            </p:spPr>
+            <p:txBody>
+              <a:bodyPr lIns="50800" tIns="50800" rIns="50800" bIns="50800" rtlCol="0" anchor="ctr"/>
+              <a:lstStyle/>
+              <a:p>
+                <a:pPr marL="285750" indent="-285750" algn="l">
+                  <a:lnSpc>
+                    <a:spcPts val="1679"/>
+                  </a:lnSpc>
+                  <a:buFont typeface="Arial" panose="020B0604020202020204" pitchFamily="34" charset="0"/>
+                  <a:buChar char="•"/>
+                </a:pPr>
+                <a:endParaRPr/>
+              </a:p>
+            </p:txBody>
+          </p:sp>
+        </p:grpSp>
+        <p:grpSp>
+          <p:nvGrpSpPr>
+            <p:cNvPr id="74" name="Group 33">
+              <a:extLst>
+                <a:ext uri="{FF2B5EF4-FFF2-40B4-BE49-F238E27FC236}">
+                  <a16:creationId xmlns:a16="http://schemas.microsoft.com/office/drawing/2014/main" id="{9879C848-D716-A4CF-709C-43818C890C71}"/>
+                </a:ext>
+              </a:extLst>
+            </p:cNvPr>
+            <p:cNvGrpSpPr/>
+            <p:nvPr/>
+          </p:nvGrpSpPr>
+          <p:grpSpPr>
+            <a:xfrm>
+              <a:off x="0" y="0"/>
+              <a:ext cx="152400" cy="2413000"/>
+              <a:chOff x="0" y="0"/>
+              <a:chExt cx="152400" cy="2413000"/>
+            </a:xfrm>
+          </p:grpSpPr>
+          <p:sp>
+            <p:nvSpPr>
+              <p:cNvPr id="76" name="Freeform 34">
+                <a:extLst>
+                  <a:ext uri="{FF2B5EF4-FFF2-40B4-BE49-F238E27FC236}">
+                    <a16:creationId xmlns:a16="http://schemas.microsoft.com/office/drawing/2014/main" id="{04DCEFFA-A152-867A-FF99-F59DFDB59617}"/>
+                  </a:ext>
+                </a:extLst>
+              </p:cNvPr>
+              <p:cNvSpPr/>
+              <p:nvPr/>
+            </p:nvSpPr>
+            <p:spPr>
+              <a:xfrm>
+                <a:off x="0" y="0"/>
+                <a:ext cx="152400" cy="2413000"/>
+              </a:xfrm>
+              <a:custGeom>
+                <a:avLst/>
+                <a:gdLst/>
+                <a:ahLst/>
+                <a:cxnLst/>
+                <a:rect l="l" t="t" r="r" b="b"/>
+                <a:pathLst>
+                  <a:path w="152400" h="2413000">
+                    <a:moveTo>
+                      <a:pt x="0" y="0"/>
+                    </a:moveTo>
+                    <a:lnTo>
+                      <a:pt x="152400" y="0"/>
+                    </a:lnTo>
+                    <a:lnTo>
+                      <a:pt x="152400" y="2413000"/>
+                    </a:lnTo>
+                    <a:lnTo>
+                      <a:pt x="0" y="2413000"/>
+                    </a:lnTo>
+                    <a:close/>
+                  </a:path>
+                </a:pathLst>
+              </a:custGeom>
+              <a:solidFill>
+                <a:srgbClr val="FFC857"/>
+              </a:solidFill>
+              <a:ln cap="sq">
+                <a:noFill/>
+                <a:prstDash val="solid"/>
+                <a:miter/>
+              </a:ln>
+            </p:spPr>
+            <p:txBody>
+              <a:bodyPr/>
+              <a:lstStyle/>
+              <a:p>
+                <a:pPr marL="285750" indent="-285750">
+                  <a:buFont typeface="Arial" panose="020B0604020202020204" pitchFamily="34" charset="0"/>
+                  <a:buChar char="•"/>
+                </a:pPr>
+                <a:endParaRPr lang="en-US"/>
+              </a:p>
+            </p:txBody>
+          </p:sp>
+          <p:sp>
+            <p:nvSpPr>
+              <p:cNvPr id="77" name="TextBox 35">
+                <a:extLst>
+                  <a:ext uri="{FF2B5EF4-FFF2-40B4-BE49-F238E27FC236}">
+                    <a16:creationId xmlns:a16="http://schemas.microsoft.com/office/drawing/2014/main" id="{38681DC2-1603-3EC3-D6EF-C97BCFA6AB3E}"/>
+                  </a:ext>
+                </a:extLst>
+              </p:cNvPr>
+              <p:cNvSpPr txBox="1"/>
+              <p:nvPr/>
+            </p:nvSpPr>
+            <p:spPr>
+              <a:xfrm>
+                <a:off x="0" y="-38100"/>
+                <a:ext cx="152400" cy="2451100"/>
+              </a:xfrm>
+              <a:prstGeom prst="rect">
+                <a:avLst/>
+              </a:prstGeom>
+            </p:spPr>
+            <p:txBody>
+              <a:bodyPr lIns="50800" tIns="50800" rIns="50800" bIns="50800" rtlCol="0" anchor="ctr"/>
+              <a:lstStyle/>
+              <a:p>
+                <a:pPr marL="285750" indent="-285750" algn="l">
+                  <a:lnSpc>
+                    <a:spcPts val="1679"/>
+                  </a:lnSpc>
+                  <a:buFont typeface="Arial" panose="020B0604020202020204" pitchFamily="34" charset="0"/>
+                  <a:buChar char="•"/>
+                </a:pPr>
+                <a:endParaRPr/>
+              </a:p>
+            </p:txBody>
+          </p:sp>
+        </p:grpSp>
+        <p:sp>
+          <p:nvSpPr>
+            <p:cNvPr id="75" name="TextBox 36">
+              <a:extLst>
+                <a:ext uri="{FF2B5EF4-FFF2-40B4-BE49-F238E27FC236}">
+                  <a16:creationId xmlns:a16="http://schemas.microsoft.com/office/drawing/2014/main" id="{9B586BDF-A435-E093-2CCD-AD6C39A2CA64}"/>
+                </a:ext>
+              </a:extLst>
+            </p:cNvPr>
+            <p:cNvSpPr txBox="1"/>
+            <p:nvPr/>
+          </p:nvSpPr>
+          <p:spPr>
+            <a:xfrm>
+              <a:off x="444500" y="36008"/>
+              <a:ext cx="9525001" cy="2462212"/>
+            </a:xfrm>
+            <a:prstGeom prst="rect">
+              <a:avLst/>
+            </a:prstGeom>
+          </p:spPr>
+          <p:txBody>
+            <a:bodyPr wrap="square" lIns="0" tIns="0" rIns="0" bIns="0" rtlCol="0" anchor="t">
+              <a:spAutoFit/>
+            </a:bodyPr>
+            <a:lstStyle>
+              <a:defPPr>
+                <a:defRPr lang="en-US"/>
+              </a:defPPr>
+              <a:lvl1pPr marL="457200" lvl="0" indent="-457200">
+                <a:buFont typeface="+mj-lt"/>
+                <a:buAutoNum type="arabicPeriod"/>
+                <a:defRPr sz="2400"/>
+              </a:lvl1pPr>
+            </a:lstStyle>
+            <a:p>
+              <a:pPr>
+                <a:buFont typeface="Arial" panose="020B0604020202020204" pitchFamily="34" charset="0"/>
+                <a:buChar char="•"/>
+              </a:pPr>
+              <a:r>
+                <a:rPr lang="en-ID" dirty="0"/>
+                <a:t>Muhammad </a:t>
+              </a:r>
+              <a:r>
+                <a:rPr lang="en-ID" dirty="0" err="1"/>
+                <a:t>Fachri</a:t>
+              </a:r>
+              <a:r>
+                <a:rPr lang="en-ID" dirty="0"/>
+                <a:t> </a:t>
+              </a:r>
+              <a:r>
+                <a:rPr lang="en-ID" dirty="0" err="1"/>
+                <a:t>Setya</a:t>
+              </a:r>
+              <a:r>
+                <a:rPr lang="en-ID" dirty="0"/>
+                <a:t> </a:t>
+              </a:r>
+              <a:r>
+                <a:rPr lang="en-ID" dirty="0" err="1"/>
+                <a:t>Bagaskara</a:t>
+              </a:r>
+              <a:r>
+                <a:rPr lang="en-ID" dirty="0"/>
+                <a:t>, </a:t>
+              </a:r>
+            </a:p>
+            <a:p>
+              <a:pPr>
+                <a:buFont typeface="Arial" panose="020B0604020202020204" pitchFamily="34" charset="0"/>
+                <a:buChar char="•"/>
+              </a:pPr>
+              <a:r>
+                <a:rPr lang="en-ID" dirty="0"/>
+                <a:t>Arkana Ilham Naufal, </a:t>
+              </a:r>
+            </a:p>
+            <a:p>
+              <a:pPr>
+                <a:buFont typeface="Arial" panose="020B0604020202020204" pitchFamily="34" charset="0"/>
+                <a:buChar char="•"/>
+              </a:pPr>
+              <a:r>
+                <a:rPr lang="en-ID" dirty="0" err="1"/>
+                <a:t>Faadhilah</a:t>
+              </a:r>
+              <a:r>
+                <a:rPr lang="en-ID" dirty="0"/>
+                <a:t> Reno </a:t>
+              </a:r>
+              <a:r>
+                <a:rPr lang="en-ID" dirty="0" err="1"/>
+                <a:t>Wahyudha</a:t>
+              </a:r>
+              <a:r>
+                <a:rPr lang="en-ID" dirty="0"/>
+                <a:t>, </a:t>
+              </a:r>
+            </a:p>
+            <a:p>
+              <a:pPr>
+                <a:buFont typeface="Arial" panose="020B0604020202020204" pitchFamily="34" charset="0"/>
+                <a:buChar char="•"/>
+              </a:pPr>
+              <a:r>
+                <a:rPr lang="en-ID" dirty="0" err="1"/>
+                <a:t>Zudan</a:t>
+              </a:r>
+              <a:r>
+                <a:rPr lang="en-ID" dirty="0"/>
+                <a:t> Candra Kahana </a:t>
+              </a:r>
+              <a:endParaRPr lang="en-US" dirty="0">
+                <a:sym typeface="Bricolage Grotesque Bold"/>
+              </a:endParaRPr>
+            </a:p>
+          </p:txBody>
+        </p:sp>
+      </p:grpSp>
+      <p:grpSp>
+        <p:nvGrpSpPr>
+          <p:cNvPr id="80" name="Group 29">
+            <a:extLst>
+              <a:ext uri="{FF2B5EF4-FFF2-40B4-BE49-F238E27FC236}">
+                <a16:creationId xmlns:a16="http://schemas.microsoft.com/office/drawing/2014/main" id="{FB3C08E5-1B7F-5177-D647-7A48F22AEC3C}"/>
+              </a:ext>
+            </a:extLst>
+          </p:cNvPr>
+          <p:cNvGrpSpPr/>
+          <p:nvPr/>
+        </p:nvGrpSpPr>
+        <p:grpSpPr>
+          <a:xfrm>
+            <a:off x="11847825" y="6998145"/>
+            <a:ext cx="4191000" cy="1809750"/>
+            <a:chOff x="0" y="0"/>
+            <a:chExt cx="10414000" cy="2413000"/>
+          </a:xfrm>
+        </p:grpSpPr>
+        <p:grpSp>
+          <p:nvGrpSpPr>
+            <p:cNvPr id="81" name="Group 30">
+              <a:extLst>
+                <a:ext uri="{FF2B5EF4-FFF2-40B4-BE49-F238E27FC236}">
+                  <a16:creationId xmlns:a16="http://schemas.microsoft.com/office/drawing/2014/main" id="{DE87A617-4CD2-04D8-ACF4-CC0213F711A8}"/>
+                </a:ext>
+              </a:extLst>
+            </p:cNvPr>
+            <p:cNvGrpSpPr/>
+            <p:nvPr/>
+          </p:nvGrpSpPr>
+          <p:grpSpPr>
+            <a:xfrm>
+              <a:off x="0" y="0"/>
+              <a:ext cx="10414000" cy="2413000"/>
+              <a:chOff x="0" y="0"/>
+              <a:chExt cx="10414000" cy="2413000"/>
+            </a:xfrm>
+          </p:grpSpPr>
+          <p:sp>
+            <p:nvSpPr>
+              <p:cNvPr id="86" name="Freeform 31">
+                <a:extLst>
+                  <a:ext uri="{FF2B5EF4-FFF2-40B4-BE49-F238E27FC236}">
+                    <a16:creationId xmlns:a16="http://schemas.microsoft.com/office/drawing/2014/main" id="{7352E2CE-C2EB-7A5D-6BD2-D772C3240CA0}"/>
+                  </a:ext>
+                </a:extLst>
+              </p:cNvPr>
+              <p:cNvSpPr/>
+              <p:nvPr/>
+            </p:nvSpPr>
+            <p:spPr>
+              <a:xfrm>
+                <a:off x="0" y="0"/>
+                <a:ext cx="10414000" cy="2413000"/>
+              </a:xfrm>
+              <a:custGeom>
+                <a:avLst/>
+                <a:gdLst/>
+                <a:ahLst/>
+                <a:cxnLst/>
+                <a:rect l="l" t="t" r="r" b="b"/>
+                <a:pathLst>
+                  <a:path w="10414000" h="2413000">
+                    <a:moveTo>
+                      <a:pt x="0" y="0"/>
+                    </a:moveTo>
+                    <a:lnTo>
+                      <a:pt x="10414000" y="0"/>
+                    </a:lnTo>
+                    <a:lnTo>
+                      <a:pt x="10414000" y="2413000"/>
+                    </a:lnTo>
+                    <a:lnTo>
+                      <a:pt x="0" y="2413000"/>
+                    </a:lnTo>
+                    <a:close/>
+                  </a:path>
+                </a:pathLst>
+              </a:custGeom>
+              <a:solidFill>
+                <a:srgbClr val="FFFFFF"/>
+              </a:solidFill>
+              <a:ln cap="sq">
+                <a:noFill/>
+                <a:prstDash val="solid"/>
+                <a:miter/>
+              </a:ln>
+            </p:spPr>
+            <p:txBody>
+              <a:bodyPr/>
+              <a:lstStyle/>
+              <a:p>
+                <a:pPr marL="285750" indent="-285750">
+                  <a:buFont typeface="Arial" panose="020B0604020202020204" pitchFamily="34" charset="0"/>
+                  <a:buChar char="•"/>
+                </a:pPr>
+                <a:endParaRPr lang="en-US"/>
+              </a:p>
+            </p:txBody>
+          </p:sp>
+          <p:sp>
+            <p:nvSpPr>
+              <p:cNvPr id="87" name="TextBox 32">
+                <a:extLst>
+                  <a:ext uri="{FF2B5EF4-FFF2-40B4-BE49-F238E27FC236}">
+                    <a16:creationId xmlns:a16="http://schemas.microsoft.com/office/drawing/2014/main" id="{912643A4-2AF2-6C4F-7FDC-B9EE177140B4}"/>
+                  </a:ext>
+                </a:extLst>
+              </p:cNvPr>
+              <p:cNvSpPr txBox="1"/>
+              <p:nvPr/>
+            </p:nvSpPr>
+            <p:spPr>
+              <a:xfrm>
+                <a:off x="0" y="-38100"/>
+                <a:ext cx="10414000" cy="2451100"/>
+              </a:xfrm>
+              <a:prstGeom prst="rect">
+                <a:avLst/>
+              </a:prstGeom>
+            </p:spPr>
+            <p:txBody>
+              <a:bodyPr lIns="50800" tIns="50800" rIns="50800" bIns="50800" rtlCol="0" anchor="ctr"/>
+              <a:lstStyle/>
+              <a:p>
+                <a:pPr marL="285750" indent="-285750" algn="l">
+                  <a:lnSpc>
+                    <a:spcPts val="1679"/>
+                  </a:lnSpc>
+                  <a:buFont typeface="Arial" panose="020B0604020202020204" pitchFamily="34" charset="0"/>
+                  <a:buChar char="•"/>
+                </a:pPr>
+                <a:endParaRPr/>
+              </a:p>
+            </p:txBody>
+          </p:sp>
+        </p:grpSp>
+        <p:grpSp>
+          <p:nvGrpSpPr>
+            <p:cNvPr id="82" name="Group 33">
+              <a:extLst>
+                <a:ext uri="{FF2B5EF4-FFF2-40B4-BE49-F238E27FC236}">
+                  <a16:creationId xmlns:a16="http://schemas.microsoft.com/office/drawing/2014/main" id="{06D72199-CEB5-859F-F886-D00882170977}"/>
+                </a:ext>
+              </a:extLst>
+            </p:cNvPr>
+            <p:cNvGrpSpPr/>
+            <p:nvPr/>
+          </p:nvGrpSpPr>
+          <p:grpSpPr>
+            <a:xfrm>
+              <a:off x="0" y="0"/>
+              <a:ext cx="152400" cy="2413000"/>
+              <a:chOff x="0" y="0"/>
+              <a:chExt cx="152400" cy="2413000"/>
+            </a:xfrm>
+          </p:grpSpPr>
+          <p:sp>
+            <p:nvSpPr>
+              <p:cNvPr id="84" name="Freeform 34">
+                <a:extLst>
+                  <a:ext uri="{FF2B5EF4-FFF2-40B4-BE49-F238E27FC236}">
+                    <a16:creationId xmlns:a16="http://schemas.microsoft.com/office/drawing/2014/main" id="{2D919227-6595-388D-F90C-40D4A5E74F94}"/>
+                  </a:ext>
+                </a:extLst>
+              </p:cNvPr>
+              <p:cNvSpPr/>
+              <p:nvPr/>
+            </p:nvSpPr>
+            <p:spPr>
+              <a:xfrm>
+                <a:off x="0" y="0"/>
+                <a:ext cx="152400" cy="2413000"/>
+              </a:xfrm>
+              <a:custGeom>
+                <a:avLst/>
+                <a:gdLst/>
+                <a:ahLst/>
+                <a:cxnLst/>
+                <a:rect l="l" t="t" r="r" b="b"/>
+                <a:pathLst>
+                  <a:path w="152400" h="2413000">
+                    <a:moveTo>
+                      <a:pt x="0" y="0"/>
+                    </a:moveTo>
+                    <a:lnTo>
+                      <a:pt x="152400" y="0"/>
+                    </a:lnTo>
+                    <a:lnTo>
+                      <a:pt x="152400" y="2413000"/>
+                    </a:lnTo>
+                    <a:lnTo>
+                      <a:pt x="0" y="2413000"/>
+                    </a:lnTo>
+                    <a:close/>
+                  </a:path>
+                </a:pathLst>
+              </a:custGeom>
+              <a:solidFill>
+                <a:srgbClr val="FFC857"/>
+              </a:solidFill>
+              <a:ln cap="sq">
+                <a:noFill/>
+                <a:prstDash val="solid"/>
+                <a:miter/>
+              </a:ln>
+            </p:spPr>
+            <p:txBody>
+              <a:bodyPr/>
+              <a:lstStyle/>
+              <a:p>
+                <a:pPr marL="285750" indent="-285750">
+                  <a:buFont typeface="Arial" panose="020B0604020202020204" pitchFamily="34" charset="0"/>
+                  <a:buChar char="•"/>
+                </a:pPr>
+                <a:endParaRPr lang="en-US"/>
+              </a:p>
+            </p:txBody>
+          </p:sp>
+          <p:sp>
+            <p:nvSpPr>
+              <p:cNvPr id="85" name="TextBox 35">
+                <a:extLst>
+                  <a:ext uri="{FF2B5EF4-FFF2-40B4-BE49-F238E27FC236}">
+                    <a16:creationId xmlns:a16="http://schemas.microsoft.com/office/drawing/2014/main" id="{069C70A2-1E52-F396-5B97-9D1FAE3A4532}"/>
+                  </a:ext>
+                </a:extLst>
+              </p:cNvPr>
+              <p:cNvSpPr txBox="1"/>
+              <p:nvPr/>
+            </p:nvSpPr>
+            <p:spPr>
+              <a:xfrm>
+                <a:off x="0" y="-38100"/>
+                <a:ext cx="152400" cy="2451100"/>
+              </a:xfrm>
+              <a:prstGeom prst="rect">
+                <a:avLst/>
+              </a:prstGeom>
+            </p:spPr>
+            <p:txBody>
+              <a:bodyPr lIns="50800" tIns="50800" rIns="50800" bIns="50800" rtlCol="0" anchor="ctr"/>
+              <a:lstStyle/>
+              <a:p>
+                <a:pPr marL="285750" indent="-285750" algn="l">
+                  <a:lnSpc>
+                    <a:spcPts val="1679"/>
+                  </a:lnSpc>
+                  <a:buFont typeface="Arial" panose="020B0604020202020204" pitchFamily="34" charset="0"/>
+                  <a:buChar char="•"/>
+                </a:pPr>
+                <a:endParaRPr/>
+              </a:p>
+            </p:txBody>
+          </p:sp>
+        </p:grpSp>
+        <p:sp>
+          <p:nvSpPr>
+            <p:cNvPr id="83" name="TextBox 36">
+              <a:extLst>
+                <a:ext uri="{FF2B5EF4-FFF2-40B4-BE49-F238E27FC236}">
+                  <a16:creationId xmlns:a16="http://schemas.microsoft.com/office/drawing/2014/main" id="{FC515377-ADB3-FD05-235A-4C74A28C8D08}"/>
+                </a:ext>
+              </a:extLst>
+            </p:cNvPr>
+            <p:cNvSpPr txBox="1"/>
+            <p:nvPr/>
+          </p:nvSpPr>
+          <p:spPr>
+            <a:xfrm>
+              <a:off x="380537" y="202564"/>
+              <a:ext cx="9805324" cy="1969771"/>
+            </a:xfrm>
+            <a:prstGeom prst="rect">
+              <a:avLst/>
+            </a:prstGeom>
+          </p:spPr>
+          <p:txBody>
+            <a:bodyPr wrap="square" lIns="0" tIns="0" rIns="0" bIns="0" rtlCol="0" anchor="t">
+              <a:spAutoFit/>
+            </a:bodyPr>
+            <a:lstStyle>
+              <a:defPPr>
+                <a:defRPr lang="en-US"/>
+              </a:defPPr>
+              <a:lvl1pPr marL="457200" lvl="0" indent="-457200">
+                <a:buFont typeface="+mj-lt"/>
+                <a:buAutoNum type="arabicPeriod"/>
+                <a:defRPr sz="2400"/>
+              </a:lvl1pPr>
+            </a:lstStyle>
+            <a:p>
+              <a:pPr>
+                <a:buFont typeface="Arial" panose="020B0604020202020204" pitchFamily="34" charset="0"/>
+                <a:buChar char="•"/>
+              </a:pPr>
+              <a:r>
+                <a:rPr lang="en-ID" dirty="0"/>
+                <a:t>Indra Saputra, </a:t>
+              </a:r>
+            </a:p>
+            <a:p>
+              <a:pPr>
+                <a:buFont typeface="Arial" panose="020B0604020202020204" pitchFamily="34" charset="0"/>
+                <a:buChar char="•"/>
+              </a:pPr>
+              <a:r>
+                <a:rPr lang="en-ID" dirty="0"/>
+                <a:t>Muhamad Dirham Al Abrar, </a:t>
+              </a:r>
+            </a:p>
+            <a:p>
+              <a:pPr>
+                <a:buFont typeface="Arial" panose="020B0604020202020204" pitchFamily="34" charset="0"/>
+                <a:buChar char="•"/>
+              </a:pPr>
+              <a:r>
+                <a:rPr lang="en-ID" dirty="0"/>
+                <a:t>Fakhri </a:t>
+              </a:r>
+              <a:r>
+                <a:rPr lang="en-ID" dirty="0" err="1"/>
+                <a:t>Syarif</a:t>
+              </a:r>
+              <a:r>
+                <a:rPr lang="en-ID" dirty="0"/>
+                <a:t> </a:t>
+              </a:r>
+              <a:r>
+                <a:rPr lang="en-ID" dirty="0" err="1"/>
+                <a:t>Arrozaq</a:t>
+              </a:r>
+              <a:r>
+                <a:rPr lang="en-ID" dirty="0"/>
+                <a:t>, </a:t>
+              </a:r>
+            </a:p>
+            <a:p>
+              <a:pPr>
+                <a:buFont typeface="Arial" panose="020B0604020202020204" pitchFamily="34" charset="0"/>
+                <a:buChar char="•"/>
+              </a:pPr>
+              <a:r>
+                <a:rPr lang="en-ID" dirty="0"/>
+                <a:t>Nur Ahsan Fadila </a:t>
+              </a:r>
+              <a:endParaRPr lang="en-US" dirty="0">
+                <a:sym typeface="Bricolage Grotesque Bold"/>
+              </a:endParaRPr>
+            </a:p>
+          </p:txBody>
+        </p:sp>
+      </p:grpSp>
+      <p:sp>
+        <p:nvSpPr>
+          <p:cNvPr id="88" name="TextBox 9">
+            <a:extLst>
+              <a:ext uri="{FF2B5EF4-FFF2-40B4-BE49-F238E27FC236}">
+                <a16:creationId xmlns:a16="http://schemas.microsoft.com/office/drawing/2014/main" id="{E181E6DC-4429-5919-4783-78C32DF20958}"/>
+              </a:ext>
+            </a:extLst>
+          </p:cNvPr>
+          <p:cNvSpPr txBox="1"/>
+          <p:nvPr/>
+        </p:nvSpPr>
+        <p:spPr>
+          <a:xfrm>
+            <a:off x="1555295" y="2819232"/>
+            <a:ext cx="552318" cy="643446"/>
+          </a:xfrm>
+          <a:prstGeom prst="rect">
+            <a:avLst/>
+          </a:prstGeom>
+        </p:spPr>
+        <p:txBody>
+          <a:bodyPr wrap="square" lIns="0" tIns="0" rIns="0" bIns="0" rtlCol="0" anchor="t">
+            <a:spAutoFit/>
+          </a:bodyPr>
+          <a:lstStyle/>
+          <a:p>
+            <a:pPr algn="l">
+              <a:lnSpc>
+                <a:spcPts val="5250"/>
+              </a:lnSpc>
+            </a:pPr>
+            <a:r>
+              <a:rPr lang="en-US" sz="3750" dirty="0">
+                <a:latin typeface="Archivo Black"/>
+                <a:ea typeface="Archivo Black"/>
+                <a:cs typeface="Archivo Black"/>
+                <a:sym typeface="Archivo Black"/>
+              </a:rPr>
+              <a:t>1</a:t>
+            </a:r>
+          </a:p>
+        </p:txBody>
+      </p:sp>
+      <p:sp>
+        <p:nvSpPr>
+          <p:cNvPr id="89" name="TextBox 9">
+            <a:extLst>
+              <a:ext uri="{FF2B5EF4-FFF2-40B4-BE49-F238E27FC236}">
+                <a16:creationId xmlns:a16="http://schemas.microsoft.com/office/drawing/2014/main" id="{FFCCB56E-961F-7FC3-32F5-3BE90F0EF917}"/>
+              </a:ext>
+            </a:extLst>
+          </p:cNvPr>
+          <p:cNvSpPr txBox="1"/>
+          <p:nvPr/>
+        </p:nvSpPr>
+        <p:spPr>
+          <a:xfrm>
+            <a:off x="6494908" y="2815902"/>
+            <a:ext cx="552318" cy="643446"/>
+          </a:xfrm>
+          <a:prstGeom prst="rect">
+            <a:avLst/>
+          </a:prstGeom>
+        </p:spPr>
+        <p:txBody>
+          <a:bodyPr wrap="square" lIns="0" tIns="0" rIns="0" bIns="0" rtlCol="0" anchor="t">
+            <a:spAutoFit/>
+          </a:bodyPr>
+          <a:lstStyle/>
+          <a:p>
+            <a:pPr algn="l">
+              <a:lnSpc>
+                <a:spcPts val="5250"/>
+              </a:lnSpc>
+            </a:pPr>
+            <a:r>
+              <a:rPr lang="en-US" sz="3750" dirty="0">
+                <a:latin typeface="Archivo Black"/>
+                <a:ea typeface="Archivo Black"/>
+                <a:cs typeface="Archivo Black"/>
+                <a:sym typeface="Archivo Black"/>
+              </a:rPr>
+              <a:t>2</a:t>
+            </a:r>
+          </a:p>
+        </p:txBody>
+      </p:sp>
+      <p:sp>
+        <p:nvSpPr>
+          <p:cNvPr id="90" name="TextBox 9">
+            <a:extLst>
+              <a:ext uri="{FF2B5EF4-FFF2-40B4-BE49-F238E27FC236}">
+                <a16:creationId xmlns:a16="http://schemas.microsoft.com/office/drawing/2014/main" id="{46A2C148-BD12-10BC-F8B7-D6F04D4ABEB1}"/>
+              </a:ext>
+            </a:extLst>
+          </p:cNvPr>
+          <p:cNvSpPr txBox="1"/>
+          <p:nvPr/>
+        </p:nvSpPr>
+        <p:spPr>
+          <a:xfrm>
+            <a:off x="11418855" y="2815902"/>
+            <a:ext cx="552318" cy="643446"/>
+          </a:xfrm>
+          <a:prstGeom prst="rect">
+            <a:avLst/>
+          </a:prstGeom>
+        </p:spPr>
+        <p:txBody>
+          <a:bodyPr wrap="square" lIns="0" tIns="0" rIns="0" bIns="0" rtlCol="0" anchor="t">
+            <a:spAutoFit/>
+          </a:bodyPr>
+          <a:lstStyle/>
+          <a:p>
+            <a:pPr algn="l">
+              <a:lnSpc>
+                <a:spcPts val="5250"/>
+              </a:lnSpc>
+            </a:pPr>
+            <a:r>
+              <a:rPr lang="en-US" sz="3750" dirty="0">
+                <a:latin typeface="Archivo Black"/>
+                <a:ea typeface="Archivo Black"/>
+                <a:cs typeface="Archivo Black"/>
+                <a:sym typeface="Archivo Black"/>
+              </a:rPr>
+              <a:t>3</a:t>
+            </a:r>
+          </a:p>
+        </p:txBody>
+      </p:sp>
+      <p:sp>
+        <p:nvSpPr>
+          <p:cNvPr id="91" name="TextBox 9">
+            <a:extLst>
+              <a:ext uri="{FF2B5EF4-FFF2-40B4-BE49-F238E27FC236}">
+                <a16:creationId xmlns:a16="http://schemas.microsoft.com/office/drawing/2014/main" id="{CB2BC0B6-E26B-40B9-5C6B-12CCA37F765E}"/>
+              </a:ext>
+            </a:extLst>
+          </p:cNvPr>
+          <p:cNvSpPr txBox="1"/>
+          <p:nvPr/>
+        </p:nvSpPr>
+        <p:spPr>
+          <a:xfrm>
+            <a:off x="1680746" y="5144037"/>
+            <a:ext cx="552318" cy="643446"/>
+          </a:xfrm>
+          <a:prstGeom prst="rect">
+            <a:avLst/>
+          </a:prstGeom>
+        </p:spPr>
+        <p:txBody>
+          <a:bodyPr wrap="square" lIns="0" tIns="0" rIns="0" bIns="0" rtlCol="0" anchor="t">
+            <a:spAutoFit/>
+          </a:bodyPr>
+          <a:lstStyle/>
+          <a:p>
+            <a:pPr algn="l">
+              <a:lnSpc>
+                <a:spcPts val="5250"/>
+              </a:lnSpc>
+            </a:pPr>
+            <a:r>
+              <a:rPr lang="en-US" sz="3750" dirty="0">
+                <a:latin typeface="Archivo Black"/>
+                <a:ea typeface="Archivo Black"/>
+                <a:cs typeface="Archivo Black"/>
+                <a:sym typeface="Archivo Black"/>
+              </a:rPr>
+              <a:t>4</a:t>
+            </a:r>
+          </a:p>
+        </p:txBody>
+      </p:sp>
+      <p:sp>
+        <p:nvSpPr>
+          <p:cNvPr id="92" name="TextBox 9">
+            <a:extLst>
+              <a:ext uri="{FF2B5EF4-FFF2-40B4-BE49-F238E27FC236}">
+                <a16:creationId xmlns:a16="http://schemas.microsoft.com/office/drawing/2014/main" id="{55E71DCA-6E35-ACE2-25F9-CF90747DEEEF}"/>
+              </a:ext>
+            </a:extLst>
+          </p:cNvPr>
+          <p:cNvSpPr txBox="1"/>
+          <p:nvPr/>
+        </p:nvSpPr>
+        <p:spPr>
+          <a:xfrm>
+            <a:off x="6546143" y="5144574"/>
+            <a:ext cx="552318" cy="643446"/>
+          </a:xfrm>
+          <a:prstGeom prst="rect">
+            <a:avLst/>
+          </a:prstGeom>
+        </p:spPr>
+        <p:txBody>
+          <a:bodyPr wrap="square" lIns="0" tIns="0" rIns="0" bIns="0" rtlCol="0" anchor="t">
+            <a:spAutoFit/>
+          </a:bodyPr>
+          <a:lstStyle/>
+          <a:p>
+            <a:pPr algn="l">
+              <a:lnSpc>
+                <a:spcPts val="5250"/>
+              </a:lnSpc>
+            </a:pPr>
+            <a:r>
+              <a:rPr lang="en-US" sz="3750" dirty="0">
+                <a:latin typeface="Archivo Black"/>
+                <a:ea typeface="Archivo Black"/>
+                <a:cs typeface="Archivo Black"/>
+                <a:sym typeface="Archivo Black"/>
+              </a:rPr>
+              <a:t>5</a:t>
+            </a:r>
+          </a:p>
+        </p:txBody>
+      </p:sp>
+      <p:sp>
+        <p:nvSpPr>
+          <p:cNvPr id="93" name="TextBox 9">
+            <a:extLst>
+              <a:ext uri="{FF2B5EF4-FFF2-40B4-BE49-F238E27FC236}">
+                <a16:creationId xmlns:a16="http://schemas.microsoft.com/office/drawing/2014/main" id="{4BF301B8-2EE2-02DD-33A6-2AED89F0CADE}"/>
+              </a:ext>
+            </a:extLst>
+          </p:cNvPr>
+          <p:cNvSpPr txBox="1"/>
+          <p:nvPr/>
+        </p:nvSpPr>
+        <p:spPr>
+          <a:xfrm>
+            <a:off x="11428233" y="5143500"/>
+            <a:ext cx="552318" cy="643446"/>
+          </a:xfrm>
+          <a:prstGeom prst="rect">
+            <a:avLst/>
+          </a:prstGeom>
+        </p:spPr>
+        <p:txBody>
+          <a:bodyPr wrap="square" lIns="0" tIns="0" rIns="0" bIns="0" rtlCol="0" anchor="t">
+            <a:spAutoFit/>
+          </a:bodyPr>
+          <a:lstStyle/>
+          <a:p>
+            <a:pPr algn="l">
+              <a:lnSpc>
+                <a:spcPts val="5250"/>
+              </a:lnSpc>
+            </a:pPr>
+            <a:r>
+              <a:rPr lang="en-US" sz="3750" dirty="0">
+                <a:latin typeface="Archivo Black"/>
+                <a:ea typeface="Archivo Black"/>
+                <a:cs typeface="Archivo Black"/>
+                <a:sym typeface="Archivo Black"/>
+              </a:rPr>
+              <a:t>6</a:t>
+            </a:r>
+          </a:p>
+        </p:txBody>
+      </p:sp>
+      <p:sp>
+        <p:nvSpPr>
+          <p:cNvPr id="94" name="TextBox 9">
+            <a:extLst>
+              <a:ext uri="{FF2B5EF4-FFF2-40B4-BE49-F238E27FC236}">
+                <a16:creationId xmlns:a16="http://schemas.microsoft.com/office/drawing/2014/main" id="{D7F7604E-F565-A7B3-829D-97192AD6082A}"/>
+              </a:ext>
+            </a:extLst>
+          </p:cNvPr>
+          <p:cNvSpPr txBox="1"/>
+          <p:nvPr/>
+        </p:nvSpPr>
+        <p:spPr>
+          <a:xfrm>
+            <a:off x="1675620" y="7581297"/>
+            <a:ext cx="552318" cy="643446"/>
+          </a:xfrm>
+          <a:prstGeom prst="rect">
+            <a:avLst/>
+          </a:prstGeom>
+        </p:spPr>
+        <p:txBody>
+          <a:bodyPr wrap="square" lIns="0" tIns="0" rIns="0" bIns="0" rtlCol="0" anchor="t">
+            <a:spAutoFit/>
+          </a:bodyPr>
+          <a:lstStyle/>
+          <a:p>
+            <a:pPr algn="l">
+              <a:lnSpc>
+                <a:spcPts val="5250"/>
+              </a:lnSpc>
+            </a:pPr>
+            <a:r>
+              <a:rPr lang="en-US" sz="3750" dirty="0">
+                <a:latin typeface="Archivo Black"/>
+                <a:ea typeface="Archivo Black"/>
+                <a:cs typeface="Archivo Black"/>
+                <a:sym typeface="Archivo Black"/>
+              </a:rPr>
+              <a:t>7</a:t>
+            </a:r>
+          </a:p>
+        </p:txBody>
+      </p:sp>
+      <p:sp>
+        <p:nvSpPr>
+          <p:cNvPr id="95" name="TextBox 9">
+            <a:extLst>
+              <a:ext uri="{FF2B5EF4-FFF2-40B4-BE49-F238E27FC236}">
+                <a16:creationId xmlns:a16="http://schemas.microsoft.com/office/drawing/2014/main" id="{7B8007DE-61E2-F742-25EB-270F49E684EF}"/>
+              </a:ext>
+            </a:extLst>
+          </p:cNvPr>
+          <p:cNvSpPr txBox="1"/>
+          <p:nvPr/>
+        </p:nvSpPr>
+        <p:spPr>
+          <a:xfrm>
+            <a:off x="6546143" y="7505210"/>
+            <a:ext cx="552318" cy="643446"/>
+          </a:xfrm>
+          <a:prstGeom prst="rect">
+            <a:avLst/>
+          </a:prstGeom>
+        </p:spPr>
+        <p:txBody>
+          <a:bodyPr wrap="square" lIns="0" tIns="0" rIns="0" bIns="0" rtlCol="0" anchor="t">
+            <a:spAutoFit/>
+          </a:bodyPr>
+          <a:lstStyle/>
+          <a:p>
+            <a:pPr algn="l">
+              <a:lnSpc>
+                <a:spcPts val="5250"/>
+              </a:lnSpc>
+            </a:pPr>
+            <a:r>
+              <a:rPr lang="en-US" sz="3750" dirty="0">
+                <a:latin typeface="Archivo Black"/>
+                <a:ea typeface="Archivo Black"/>
+                <a:cs typeface="Archivo Black"/>
+                <a:sym typeface="Archivo Black"/>
+              </a:rPr>
+              <a:t>8</a:t>
+            </a:r>
+          </a:p>
+        </p:txBody>
+      </p:sp>
+      <p:sp>
+        <p:nvSpPr>
+          <p:cNvPr id="96" name="TextBox 9">
+            <a:extLst>
+              <a:ext uri="{FF2B5EF4-FFF2-40B4-BE49-F238E27FC236}">
+                <a16:creationId xmlns:a16="http://schemas.microsoft.com/office/drawing/2014/main" id="{48E82AC3-632E-79DF-C0E2-E4C0D6DF1D26}"/>
+              </a:ext>
+            </a:extLst>
+          </p:cNvPr>
+          <p:cNvSpPr txBox="1"/>
+          <p:nvPr/>
+        </p:nvSpPr>
+        <p:spPr>
+          <a:xfrm>
+            <a:off x="11450490" y="7505210"/>
+            <a:ext cx="552318" cy="643446"/>
+          </a:xfrm>
+          <a:prstGeom prst="rect">
+            <a:avLst/>
+          </a:prstGeom>
+        </p:spPr>
+        <p:txBody>
+          <a:bodyPr wrap="square" lIns="0" tIns="0" rIns="0" bIns="0" rtlCol="0" anchor="t">
+            <a:spAutoFit/>
+          </a:bodyPr>
+          <a:lstStyle/>
+          <a:p>
+            <a:pPr algn="l">
+              <a:lnSpc>
+                <a:spcPts val="5250"/>
+              </a:lnSpc>
+            </a:pPr>
+            <a:r>
+              <a:rPr lang="en-US" sz="3750" dirty="0">
+                <a:latin typeface="Archivo Black"/>
+                <a:ea typeface="Archivo Black"/>
+                <a:cs typeface="Archivo Black"/>
+                <a:sym typeface="Archivo Black"/>
+              </a:rPr>
+              <a:t>9</a:t>
             </a:r>
           </a:p>
         </p:txBody>
       </p:sp>
     </p:spTree>
+    <p:extLst>
+      <p:ext uri="{BB962C8B-B14F-4D97-AF65-F5344CB8AC3E}">
+        <p14:creationId xmlns:p14="http://schemas.microsoft.com/office/powerpoint/2010/main" val="220160704"/>
+      </p:ext>
+    </p:extLst>
   </p:cSld>
   <p:clrMapOvr>
     <a:masterClrMapping/>
